--- a/decks/talking-to-your-parents-lesson-v2.pptx
+++ b/decks/talking-to-your-parents-lesson-v2.pptx
@@ -16,6 +16,7 @@
     <p:sldId id="264" r:id="rId16"/>
     <p:sldId id="265" r:id="rId17"/>
     <p:sldId id="266" r:id="rId18"/>
+    <p:sldId id="267" r:id="rId19"/>
   </p:sldIdLst>
   <p:sldSz cx="12192000" cy="6858000" type="screen4x3"/>
   <p:notesSz cx="6858000" cy="9144000"/>
@@ -512,7 +513,7 @@
           <a:lstStyle/>
           <a:p>
             <a:r>
-              <a:t>This page and the next three are hidden. They stay in the deck for you and are skipped when you present.</a:t>
+              <a:t>This page is hidden and skipped when you present. The full plan, care notes and research are on the hidden pages at the end of the deck, if you want them.</a:t>
             </a:r>
           </a:p>
         </p:txBody>
@@ -1003,6 +1004,76 @@
           <a:p>
             <a:r>
               <a:t>2 MINUTES. Private, on the card. Nobody shares. Share the student page link (post it on your advisory page too). It has the loops, the moves, a planner, a private check-in, and who to talk to. Close with this, plainly: "If talking at home doesn't feel safe, or arguments end in threats or someone getting hurt, come find me or a counselor. You don't have to figure that out alone." Childhelp answers at 1-800-422-4453 any time, and 911 is for emergencies.</a:t>
+            </a:r>
+          </a:p>
+        </p:txBody>
+      </p:sp>
+      <p:sp>
+        <p:nvSpPr>
+          <p:cNvPr id="4" name="Slide Number Placeholder 3"/>
+          <p:cNvSpPr>
+            <a:spLocks noGrp="1"/>
+          </p:cNvSpPr>
+          <p:nvPr>
+            <p:ph type="sldNum" idx="5" sz="quarter"/>
+          </p:nvPr>
+        </p:nvSpPr>
+        <p:spPr/>
+      </p:sp>
+    </p:spTree>
+  </p:cSld>
+  <p:clrMapOvr>
+    <a:masterClrMapping/>
+  </p:clrMapOvr>
+</p:notes>
+</file>
+
+<file path=ppt/notesSlides/notesSlide9.xml><?xml version="1.0" encoding="utf-8"?>
+<p:notes xmlns:a="http://schemas.openxmlformats.org/drawingml/2006/main" xmlns:p="http://schemas.openxmlformats.org/presentationml/2006/main" xmlns:r="http://schemas.openxmlformats.org/officeDocument/2006/relationships">
+  <p:cSld>
+    <p:spTree>
+      <p:nvGrpSpPr>
+        <p:cNvPr id="1" name=""/>
+        <p:cNvGrpSpPr/>
+        <p:nvPr/>
+      </p:nvGrpSpPr>
+      <p:grpSpPr>
+        <a:xfrm>
+          <a:off x="0" y="0"/>
+          <a:ext cx="0" cy="0"/>
+          <a:chOff x="0" y="0"/>
+          <a:chExt cx="0" cy="0"/>
+        </a:xfrm>
+      </p:grpSpPr>
+      <p:sp>
+        <p:nvSpPr>
+          <p:cNvPr id="2" name="Slide Image Placeholder 1"/>
+          <p:cNvSpPr>
+            <a:spLocks noGrp="1"/>
+          </p:cNvSpPr>
+          <p:nvPr>
+            <p:ph type="sldImg" idx="2"/>
+          </p:nvPr>
+        </p:nvSpPr>
+        <p:spPr/>
+      </p:sp>
+      <p:sp>
+        <p:nvSpPr>
+          <p:cNvPr id="3" name="Notes Placeholder 2"/>
+          <p:cNvSpPr>
+            <a:spLocks noGrp="1"/>
+          </p:cNvSpPr>
+          <p:nvPr>
+            <p:ph type="body" idx="3" sz="quarter"/>
+          </p:nvPr>
+        </p:nvSpPr>
+        <p:spPr/>
+        <p:txBody>
+          <a:bodyPr/>
+          <a:lstStyle/>
+          <a:p>
+            <a:r>
+              <a:t>If you want more: this page and the next three are hidden and skipped when you present.</a:t>
             </a:r>
           </a:p>
         </p:txBody>
@@ -4094,7 +4165,7 @@
                 </a:solidFill>
                 <a:latin typeface="Inter Tight"/>
               </a:rPr>
-              <a:t>TEACHER PAGE  ·  skipped when you present  ·  Lesson plan</a:t>
+              <a:t>TEACHER PAGE  ·  skipped when you present  ·  Before you start</a:t>
             </a:r>
           </a:p>
         </p:txBody>
@@ -4185,8 +4256,8 @@
         </p:nvSpPr>
         <p:spPr>
           <a:xfrm>
-            <a:off x="548640" y="1828800"/>
-            <a:ext cx="5120640" cy="4389120"/>
+            <a:off x="548640" y="2011680"/>
+            <a:ext cx="11064240" cy="4206240"/>
           </a:xfrm>
           <a:prstGeom prst="rect">
             <a:avLst/>
@@ -4201,43 +4272,43 @@
           <a:p>
             <a:pPr algn="l">
               <a:spcAft>
-                <a:spcPts val="675"/>
-              </a:spcAft>
-            </a:pPr>
-            <a:r>
-              <a:rPr sz="1100" b="1" i="0">
+                <a:spcPts val="900"/>
+              </a:spcAft>
+            </a:pPr>
+            <a:r>
+              <a:rPr sz="1200" b="1" i="0">
                 <a:solidFill>
                   <a:srgbClr val="0B2D5B"/>
                 </a:solidFill>
                 <a:latin typeface="Inter Tight"/>
               </a:rPr>
-              <a:t>GOAL</a:t>
-            </a:r>
-          </a:p>
-          <a:p>
-            <a:pPr algn="l">
-              <a:spcAft>
-                <a:spcPts val="675"/>
-              </a:spcAft>
-            </a:pPr>
-            <a:r>
-              <a:rPr sz="1500" b="0" i="0">
+              <a:t>BEFORE YOU START</a:t>
+            </a:r>
+          </a:p>
+          <a:p>
+            <a:pPr algn="l">
+              <a:spcAft>
+                <a:spcPts val="900"/>
+              </a:spcAft>
+            </a:pPr>
+            <a:r>
+              <a:rPr sz="2000" b="0" i="0">
                 <a:solidFill>
                   <a:srgbClr val="1C1B19"/>
                 </a:solidFill>
                 <a:latin typeface="Source Serif 4"/>
               </a:rPr>
-              <a:t>Students can explain why what they share builds trust (the trust loop and the worry loop), plan a request with a clear ask, a good moment and an answer to the adults' worry, and know that a counselor is there when talking at home doesn't feel safe. "Parents" means whoever is raising them.</a:t>
-            </a:r>
-          </a:p>
-          <a:p>
-            <a:pPr algn="l">
-              <a:spcAft>
-                <a:spcPts val="675"/>
-              </a:spcAft>
-            </a:pPr>
-            <a:r>
-              <a:rPr sz="1500" b="0" i="0">
+              <a:t>Students learn why sharing builds trust and how to plan an ask with a clear request, a good moment and an answer to the adults' worry. Bring index cards, say "the adults at home," and if a student hints home isn't safe, thank them and bring in a counselor that day.</a:t>
+            </a:r>
+          </a:p>
+          <a:p>
+            <a:pPr algn="l">
+              <a:spcAft>
+                <a:spcPts val="900"/>
+              </a:spcAft>
+            </a:pPr>
+            <a:r>
+              <a:rPr sz="2000" b="0" i="0">
                 <a:solidFill>
                   <a:srgbClr val="1C1B19"/>
                 </a:solidFill>
@@ -4249,302 +4320,33 @@
           <a:p>
             <a:pPr algn="l">
               <a:spcAft>
-                <a:spcPts val="675"/>
-              </a:spcAft>
-            </a:pPr>
-            <a:r>
-              <a:rPr sz="1100" b="1" i="0">
+                <a:spcPts val="900"/>
+              </a:spcAft>
+            </a:pPr>
+            <a:r>
+              <a:rPr sz="1200" b="1" i="0">
                 <a:solidFill>
                   <a:srgbClr val="0B2D5B"/>
                 </a:solidFill>
                 <a:latin typeface="Inter Tight"/>
               </a:rPr>
-              <a:t>MATERIALS</a:t>
-            </a:r>
-          </a:p>
-          <a:p>
-            <a:pPr algn="l">
-              <a:spcAft>
-                <a:spcPts val="675"/>
-              </a:spcAft>
-            </a:pPr>
-            <a:r>
-              <a:rPr sz="1500" b="0" i="0">
+              <a:t>EVERY STUDENT IN THE ROOM</a:t>
+            </a:r>
+          </a:p>
+          <a:p>
+            <a:pPr algn="l">
+              <a:spcAft>
+                <a:spcPts val="900"/>
+              </a:spcAft>
+            </a:pPr>
+            <a:r>
+              <a:rPr sz="2000" b="0" i="0">
                 <a:solidFill>
                   <a:srgbClr val="1C1B19"/>
                 </a:solidFill>
                 <a:latin typeface="Source Serif 4"/>
               </a:rPr>
-              <a:t>Index cards: one per student, for the anonymous tally and the private plan</a:t>
-            </a:r>
-          </a:p>
-          <a:p>
-            <a:pPr algn="l">
-              <a:spcAft>
-                <a:spcPts val="675"/>
-              </a:spcAft>
-            </a:pPr>
-            <a:r>
-              <a:rPr sz="1500" b="0" i="0">
-                <a:solidFill>
-                  <a:srgbClr val="1C1B19"/>
-                </a:solidFill>
-                <a:latin typeface="Source Serif 4"/>
-              </a:rPr>
-              <a:t>A board or sheet of paper for the tally</a:t>
-            </a:r>
-          </a:p>
-          <a:p>
-            <a:pPr algn="l">
-              <a:spcAft>
-                <a:spcPts val="675"/>
-              </a:spcAft>
-            </a:pPr>
-            <a:r>
-              <a:rPr sz="1500" b="0" i="0">
-                <a:solidFill>
-                  <a:srgbClr val="1C1B19"/>
-                </a:solidFill>
-                <a:latin typeface="Source Serif 4"/>
-              </a:rPr>
-              <a:t>The student page link (last slide) to share after advisory</a:t>
-            </a:r>
-          </a:p>
-        </p:txBody>
-      </p:sp>
-      <p:sp>
-        <p:nvSpPr>
-          <p:cNvPr id="7" name="TextBox 6"/>
-          <p:cNvSpPr txBox="1"/>
-          <p:nvPr/>
-        </p:nvSpPr>
-        <p:spPr>
-          <a:xfrm>
-            <a:off x="6126480" y="1828800"/>
-            <a:ext cx="5486400" cy="4389120"/>
-          </a:xfrm>
-          <a:prstGeom prst="rect">
-            <a:avLst/>
-          </a:prstGeom>
-          <a:noFill/>
-        </p:spPr>
-        <p:txBody>
-          <a:bodyPr wrap="square" anchor="t" lIns="0" rIns="0" tIns="0" bIns="0">
-            <a:spAutoFit/>
-          </a:bodyPr>
-          <a:lstStyle/>
-          <a:p>
-            <a:pPr algn="l">
-              <a:spcAft>
-                <a:spcPts val="630"/>
-              </a:spcAft>
-            </a:pPr>
-            <a:r>
-              <a:rPr sz="1100" b="1" i="0">
-                <a:solidFill>
-                  <a:srgbClr val="0B2D5B"/>
-                </a:solidFill>
-                <a:latin typeface="Inter Tight"/>
-              </a:rPr>
-              <a:t>FLOW</a:t>
-            </a:r>
-          </a:p>
-          <a:p>
-            <a:pPr algn="l">
-              <a:spcAft>
-                <a:spcPts val="630"/>
-              </a:spcAft>
-            </a:pPr>
-            <a:r>
-              <a:rPr sz="1300" b="1" i="0">
-                <a:solidFill>
-                  <a:srgbClr val="F47B20"/>
-                </a:solidFill>
-                <a:latin typeface="Inter Tight"/>
-              </a:rPr>
-              <a:t>3 min   </a:t>
-            </a:r>
-            <a:r>
-              <a:rPr sz="1400" b="0" i="0">
-                <a:solidFill>
-                  <a:srgbClr val="1C1B19"/>
-                </a:solidFill>
-                <a:latin typeface="Source Serif 4"/>
-              </a:rPr>
-              <a:t>What's hardest to bring up? (anonymous cards)</a:t>
-            </a:r>
-          </a:p>
-          <a:p>
-            <a:pPr algn="l">
-              <a:spcAft>
-                <a:spcPts val="630"/>
-              </a:spcAft>
-            </a:pPr>
-            <a:r>
-              <a:rPr sz="1300" b="1" i="0">
-                <a:solidFill>
-                  <a:srgbClr val="F47B20"/>
-                </a:solidFill>
-                <a:latin typeface="Inter Tight"/>
-              </a:rPr>
-              <a:t>4 min   </a:t>
-            </a:r>
-            <a:r>
-              <a:rPr sz="1400" b="0" i="0">
-                <a:solidFill>
-                  <a:srgbClr val="1C1B19"/>
-                </a:solidFill>
-                <a:latin typeface="Source Serif 4"/>
-              </a:rPr>
-              <a:t>The trust loop and the worry loop (pair-share)</a:t>
-            </a:r>
-          </a:p>
-          <a:p>
-            <a:pPr algn="l">
-              <a:spcAft>
-                <a:spcPts val="630"/>
-              </a:spcAft>
-            </a:pPr>
-            <a:r>
-              <a:rPr sz="1300" b="1" i="0">
-                <a:solidFill>
-                  <a:srgbClr val="F47B20"/>
-                </a:solidFill>
-                <a:latin typeface="Inter Tight"/>
-              </a:rPr>
-              <a:t>3 min   </a:t>
-            </a:r>
-            <a:r>
-              <a:rPr sz="1400" b="0" i="0">
-                <a:solidFill>
-                  <a:srgbClr val="1C1B19"/>
-                </a:solidFill>
-                <a:latin typeface="Source Serif 4"/>
-              </a:rPr>
-              <a:t>Fewer fights, bigger feelings</a:t>
-            </a:r>
-          </a:p>
-          <a:p>
-            <a:pPr algn="l">
-              <a:spcAft>
-                <a:spcPts val="630"/>
-              </a:spcAft>
-            </a:pPr>
-            <a:r>
-              <a:rPr sz="1300" b="1" i="0">
-                <a:solidFill>
-                  <a:srgbClr val="F47B20"/>
-                </a:solidFill>
-                <a:latin typeface="Inter Tight"/>
-              </a:rPr>
-              <a:t>3 min   </a:t>
-            </a:r>
-            <a:r>
-              <a:rPr sz="1400" b="0" i="0">
-                <a:solidFill>
-                  <a:srgbClr val="1C1B19"/>
-                </a:solidFill>
-                <a:latin typeface="Source Serif 4"/>
-              </a:rPr>
-              <a:t>Clear ask, right moment, a plan for their worry</a:t>
-            </a:r>
-          </a:p>
-          <a:p>
-            <a:pPr algn="l">
-              <a:spcAft>
-                <a:spcPts val="630"/>
-              </a:spcAft>
-            </a:pPr>
-            <a:r>
-              <a:rPr sz="1300" b="1" i="0">
-                <a:solidFill>
-                  <a:srgbClr val="F47B20"/>
-                </a:solidFill>
-                <a:latin typeface="Inter Tight"/>
-              </a:rPr>
-              <a:t>5 min   </a:t>
-            </a:r>
-            <a:r>
-              <a:rPr sz="1400" b="0" i="0">
-                <a:solidFill>
-                  <a:srgbClr val="1C1B19"/>
-                </a:solidFill>
-                <a:latin typeface="Source Serif 4"/>
-              </a:rPr>
-              <a:t>Three conversations (scenario talk)</a:t>
-            </a:r>
-          </a:p>
-          <a:p>
-            <a:pPr algn="l">
-              <a:spcAft>
-                <a:spcPts val="630"/>
-              </a:spcAft>
-            </a:pPr>
-            <a:r>
-              <a:rPr sz="1300" b="1" i="0">
-                <a:solidFill>
-                  <a:srgbClr val="F47B20"/>
-                </a:solidFill>
-                <a:latin typeface="Inter Tight"/>
-              </a:rPr>
-              <a:t>2 min   </a:t>
-            </a:r>
-            <a:r>
-              <a:rPr sz="1400" b="0" i="0">
-                <a:solidFill>
-                  <a:srgbClr val="1C1B19"/>
-                </a:solidFill>
-                <a:latin typeface="Source Serif 4"/>
-              </a:rPr>
-              <a:t>Plan one conversation (private) and the link</a:t>
-            </a:r>
-          </a:p>
-          <a:p>
-            <a:pPr algn="l">
-              <a:spcAft>
-                <a:spcPts val="630"/>
-              </a:spcAft>
-            </a:pPr>
-            <a:r>
-              <a:rPr sz="1400" b="0" i="0">
-                <a:solidFill>
-                  <a:srgbClr val="1C1B19"/>
-                </a:solidFill>
-                <a:latin typeface="Source Serif 4"/>
-              </a:rPr>
-              <a:t/>
-            </a:r>
-          </a:p>
-          <a:p>
-            <a:pPr algn="l">
-              <a:spcAft>
-                <a:spcPts val="630"/>
-              </a:spcAft>
-            </a:pPr>
-            <a:r>
-              <a:rPr sz="1100" b="1" i="0">
-                <a:solidFill>
-                  <a:srgbClr val="0B2D5B"/>
-                </a:solidFill>
-                <a:latin typeface="Inter Tight"/>
-              </a:rPr>
-              <a:t>SHORT ON TIME (10-MINUTE CHECK-IN)</a:t>
-            </a:r>
-          </a:p>
-          <a:p>
-            <a:pPr algn="l">
-              <a:spcAft>
-                <a:spcPts val="630"/>
-              </a:spcAft>
-            </a:pPr>
-            <a:r>
-              <a:rPr sz="1400" b="0" i="0">
-                <a:solidFill>
-                  <a:srgbClr val="1C1B19"/>
-                </a:solidFill>
-                <a:latin typeface="Source Serif 4"/>
-              </a:rPr>
-              <a:t>The anonymous tally (2), the two loops (3), clear ask, right moment, a plan for their worry (3), plan one conversation and the link (2).</a:t>
+              <a:t>Families differ on how much teens negotiate, and a student who isn't out at home doesn't owe that conversation; "write it instead" helps students who lose their words face to face.</a:t>
             </a:r>
           </a:p>
         </p:txBody>
@@ -4558,6 +4360,1660 @@
 </file>
 
 <file path=ppt/slides/slide10.xml><?xml version="1.0" encoding="utf-8"?>
+<p:sld xmlns:a="http://schemas.openxmlformats.org/drawingml/2006/main" xmlns:p="http://schemas.openxmlformats.org/presentationml/2006/main" xmlns:r="http://schemas.openxmlformats.org/officeDocument/2006/relationships" show="0">
+  <p:cSld>
+    <p:bg>
+      <p:bgPr>
+        <a:solidFill>
+          <a:srgbClr val="EEEBE4"/>
+        </a:solidFill>
+        <a:effectLst/>
+      </p:bgPr>
+    </p:bg>
+    <p:spTree>
+      <p:nvGrpSpPr>
+        <p:cNvPr id="1" name=""/>
+        <p:cNvGrpSpPr/>
+        <p:nvPr/>
+      </p:nvGrpSpPr>
+      <p:grpSpPr/>
+      <p:sp>
+        <p:nvSpPr>
+          <p:cNvPr id="2" name="Rectangle 1"/>
+          <p:cNvSpPr/>
+          <p:nvPr/>
+        </p:nvSpPr>
+        <p:spPr>
+          <a:xfrm>
+            <a:off x="0" y="0"/>
+            <a:ext cx="12191695" cy="384048"/>
+          </a:xfrm>
+          <a:prstGeom prst="rect">
+            <a:avLst/>
+          </a:prstGeom>
+          <a:solidFill>
+            <a:srgbClr val="0B2D5B"/>
+          </a:solidFill>
+          <a:ln>
+            <a:noFill/>
+          </a:ln>
+          <a:effectLst/>
+        </p:spPr>
+        <p:style>
+          <a:lnRef idx="1">
+            <a:schemeClr val="accent1"/>
+          </a:lnRef>
+          <a:fillRef idx="3">
+            <a:schemeClr val="accent1"/>
+          </a:fillRef>
+          <a:effectRef idx="2">
+            <a:schemeClr val="accent1"/>
+          </a:effectRef>
+          <a:fontRef idx="minor">
+            <a:schemeClr val="lt1"/>
+          </a:fontRef>
+        </p:style>
+        <p:txBody>
+          <a:bodyPr rtlCol="0" anchor="ctr"/>
+          <a:lstStyle/>
+          <a:p>
+            <a:pPr algn="ctr"/>
+          </a:p>
+        </p:txBody>
+      </p:sp>
+      <p:sp>
+        <p:nvSpPr>
+          <p:cNvPr id="3" name="TextBox 2"/>
+          <p:cNvSpPr txBox="1"/>
+          <p:nvPr/>
+        </p:nvSpPr>
+        <p:spPr>
+          <a:xfrm>
+            <a:off x="548640" y="100584"/>
+            <a:ext cx="10972800" cy="274320"/>
+          </a:xfrm>
+          <a:prstGeom prst="rect">
+            <a:avLst/>
+          </a:prstGeom>
+          <a:noFill/>
+        </p:spPr>
+        <p:txBody>
+          <a:bodyPr wrap="square" anchor="t" lIns="0" rIns="0" tIns="0" bIns="0">
+            <a:spAutoFit/>
+          </a:bodyPr>
+          <a:lstStyle/>
+          <a:p>
+            <a:pPr algn="l">
+              <a:spcAft>
+                <a:spcPts val="495"/>
+              </a:spcAft>
+            </a:pPr>
+            <a:r>
+              <a:rPr sz="1100" b="1" i="0">
+                <a:solidFill>
+                  <a:srgbClr val="FFFFFF"/>
+                </a:solidFill>
+                <a:latin typeface="Inter Tight"/>
+              </a:rPr>
+              <a:t>TEACHER PAGE  ·  skipped when you present  ·  Before you teach</a:t>
+            </a:r>
+          </a:p>
+        </p:txBody>
+      </p:sp>
+      <p:sp>
+        <p:nvSpPr>
+          <p:cNvPr id="4" name="TextBox 3"/>
+          <p:cNvSpPr txBox="1"/>
+          <p:nvPr/>
+        </p:nvSpPr>
+        <p:spPr>
+          <a:xfrm>
+            <a:off x="548640" y="685800"/>
+            <a:ext cx="10972800" cy="640080"/>
+          </a:xfrm>
+          <a:prstGeom prst="rect">
+            <a:avLst/>
+          </a:prstGeom>
+          <a:noFill/>
+        </p:spPr>
+        <p:txBody>
+          <a:bodyPr wrap="square" anchor="t" lIns="0" rIns="0" tIns="0" bIns="0">
+            <a:spAutoFit/>
+          </a:bodyPr>
+          <a:lstStyle/>
+          <a:p>
+            <a:pPr algn="l">
+              <a:spcAft>
+                <a:spcPts val="1350"/>
+              </a:spcAft>
+            </a:pPr>
+            <a:r>
+              <a:rPr sz="3000" b="1" i="0">
+                <a:solidFill>
+                  <a:srgbClr val="1C1B19"/>
+                </a:solidFill>
+                <a:latin typeface="Source Serif 4"/>
+              </a:rPr>
+              <a:t>Before you teach</a:t>
+            </a:r>
+          </a:p>
+        </p:txBody>
+      </p:sp>
+      <p:sp>
+        <p:nvSpPr>
+          <p:cNvPr id="5" name="TextBox 4"/>
+          <p:cNvSpPr txBox="1"/>
+          <p:nvPr/>
+        </p:nvSpPr>
+        <p:spPr>
+          <a:xfrm>
+            <a:off x="548640" y="1463040"/>
+            <a:ext cx="5394960" cy="4937760"/>
+          </a:xfrm>
+          <a:prstGeom prst="rect">
+            <a:avLst/>
+          </a:prstGeom>
+          <a:noFill/>
+        </p:spPr>
+        <p:txBody>
+          <a:bodyPr wrap="square" anchor="t" lIns="0" rIns="0" tIns="0" bIns="0">
+            <a:spAutoFit/>
+          </a:bodyPr>
+          <a:lstStyle/>
+          <a:p>
+            <a:pPr algn="l">
+              <a:spcAft>
+                <a:spcPts val="585"/>
+              </a:spcAft>
+            </a:pPr>
+            <a:r>
+              <a:rPr sz="1500" b="1" i="0">
+                <a:solidFill>
+                  <a:srgbClr val="1C1B19"/>
+                </a:solidFill>
+                <a:latin typeface="Source Serif 4"/>
+              </a:rPr>
+              <a:t>Not every home is safe.</a:t>
+            </a:r>
+          </a:p>
+          <a:p>
+            <a:pPr algn="l">
+              <a:spcAft>
+                <a:spcPts val="585"/>
+              </a:spcAft>
+            </a:pPr>
+            <a:r>
+              <a:rPr sz="1300" b="0" i="0">
+                <a:solidFill>
+                  <a:srgbClr val="1C1B19"/>
+                </a:solidFill>
+                <a:latin typeface="Source Serif 4"/>
+              </a:rPr>
+              <a:t>Never ask students to describe fights at home. If a student hints that home isn't safe (threats, someone getting hurt, being afraid to go home), thank them, take it out of the circle, and bring in a counselor that day. Know Beaver's reporting protocol before advisory. Childhelp answers at 1-800-422-4453 any time, and 911 is for emergencies.</a:t>
+            </a:r>
+          </a:p>
+          <a:p>
+            <a:pPr algn="l">
+              <a:spcAft>
+                <a:spcPts val="585"/>
+              </a:spcAft>
+            </a:pPr>
+            <a:r>
+              <a:rPr sz="1300" b="0" i="0">
+                <a:solidFill>
+                  <a:srgbClr val="1C1B19"/>
+                </a:solidFill>
+                <a:latin typeface="Source Serif 4"/>
+              </a:rPr>
+              <a:t/>
+            </a:r>
+          </a:p>
+          <a:p>
+            <a:pPr algn="l">
+              <a:spcAft>
+                <a:spcPts val="585"/>
+              </a:spcAft>
+            </a:pPr>
+            <a:r>
+              <a:rPr sz="1500" b="1" i="0">
+                <a:solidFill>
+                  <a:srgbClr val="1C1B19"/>
+                </a:solidFill>
+                <a:latin typeface="Source Serif 4"/>
+              </a:rPr>
+              <a:t>Say "the adults at home."</a:t>
+            </a:r>
+          </a:p>
+          <a:p>
+            <a:pPr algn="l">
+              <a:spcAft>
+                <a:spcPts val="585"/>
+              </a:spcAft>
+            </a:pPr>
+            <a:r>
+              <a:rPr sz="1300" b="0" i="0">
+                <a:solidFill>
+                  <a:srgbClr val="1C1B19"/>
+                </a:solidFill>
+                <a:latin typeface="Source Serif 4"/>
+              </a:rPr>
+              <a:t>Students live with one parent, two moms or two dads, grandparents, aunts or uncles, foster parents, older siblings, or between two homes. Some have a parent who is away or has died. Use "the adults at home" or "whoever is raising you," and avoid "your mom and dad."</a:t>
+            </a:r>
+          </a:p>
+          <a:p>
+            <a:pPr algn="l">
+              <a:spcAft>
+                <a:spcPts val="585"/>
+              </a:spcAft>
+            </a:pPr>
+            <a:r>
+              <a:rPr sz="1300" b="0" i="0">
+                <a:solidFill>
+                  <a:srgbClr val="1C1B19"/>
+                </a:solidFill>
+                <a:latin typeface="Source Serif 4"/>
+              </a:rPr>
+              <a:t/>
+            </a:r>
+          </a:p>
+          <a:p>
+            <a:pPr algn="l">
+              <a:spcAft>
+                <a:spcPts val="585"/>
+              </a:spcAft>
+            </a:pPr>
+            <a:r>
+              <a:rPr sz="1500" b="1" i="0">
+                <a:solidFill>
+                  <a:srgbClr val="1C1B19"/>
+                </a:solidFill>
+                <a:latin typeface="Source Serif 4"/>
+              </a:rPr>
+              <a:t>Keep the opening card to categories.</a:t>
+            </a:r>
+          </a:p>
+          <a:p>
+            <a:pPr algn="l">
+              <a:spcAft>
+                <a:spcPts val="585"/>
+              </a:spcAft>
+            </a:pPr>
+            <a:r>
+              <a:rPr sz="1300" b="0" i="0">
+                <a:solidFill>
+                  <a:srgbClr val="1C1B19"/>
+                </a:solidFill>
+                <a:latin typeface="Source Serif 4"/>
+              </a:rPr>
+              <a:t>Tally only which kind of conversation is hardest. Don't read anything else aloud. If a card says more, read it privately afterward and follow up with a counselor if it points to something serious.</a:t>
+            </a:r>
+          </a:p>
+          <a:p>
+            <a:pPr algn="l">
+              <a:spcAft>
+                <a:spcPts val="585"/>
+              </a:spcAft>
+            </a:pPr>
+            <a:r>
+              <a:rPr sz="1300" b="0" i="0">
+                <a:solidFill>
+                  <a:srgbClr val="1C1B19"/>
+                </a:solidFill>
+                <a:latin typeface="Source Serif 4"/>
+              </a:rPr>
+              <a:t/>
+            </a:r>
+          </a:p>
+        </p:txBody>
+      </p:sp>
+      <p:sp>
+        <p:nvSpPr>
+          <p:cNvPr id="6" name="TextBox 5"/>
+          <p:cNvSpPr txBox="1"/>
+          <p:nvPr/>
+        </p:nvSpPr>
+        <p:spPr>
+          <a:xfrm>
+            <a:off x="6217920" y="1463040"/>
+            <a:ext cx="5394960" cy="4937760"/>
+          </a:xfrm>
+          <a:prstGeom prst="rect">
+            <a:avLst/>
+          </a:prstGeom>
+          <a:noFill/>
+        </p:spPr>
+        <p:txBody>
+          <a:bodyPr wrap="square" anchor="t" lIns="0" rIns="0" tIns="0" bIns="0">
+            <a:spAutoFit/>
+          </a:bodyPr>
+          <a:lstStyle/>
+          <a:p>
+            <a:pPr algn="l">
+              <a:spcAft>
+                <a:spcPts val="585"/>
+              </a:spcAft>
+            </a:pPr>
+            <a:r>
+              <a:rPr sz="1500" b="1" i="0">
+                <a:solidFill>
+                  <a:srgbClr val="1C1B19"/>
+                </a:solidFill>
+                <a:latin typeface="Source Serif 4"/>
+              </a:rPr>
+              <a:t>Privacy is normal. Safety things need an adult.</a:t>
+            </a:r>
+          </a:p>
+          <a:p>
+            <a:pPr algn="l">
+              <a:spcAft>
+                <a:spcPts val="585"/>
+              </a:spcAft>
+            </a:pPr>
+            <a:r>
+              <a:rPr sz="1300" b="0" i="0">
+                <a:solidFill>
+                  <a:srgbClr val="1C1B19"/>
+                </a:solidFill>
+                <a:latin typeface="Source Serif 4"/>
+              </a:rPr>
+              <a:t>Don't tell students to share everything. Keeping a journal or a group chat private is normal at their age. You or a friend in danger, someone hurting you, or substances are different: those need an adult in the loop, even if it isn't a parent.</a:t>
+            </a:r>
+          </a:p>
+          <a:p>
+            <a:pPr algn="l">
+              <a:spcAft>
+                <a:spcPts val="585"/>
+              </a:spcAft>
+            </a:pPr>
+            <a:r>
+              <a:rPr sz="1300" b="0" i="0">
+                <a:solidFill>
+                  <a:srgbClr val="1C1B19"/>
+                </a:solidFill>
+                <a:latin typeface="Source Serif 4"/>
+              </a:rPr>
+              <a:t/>
+            </a:r>
+          </a:p>
+          <a:p>
+            <a:pPr algn="l">
+              <a:spcAft>
+                <a:spcPts val="585"/>
+              </a:spcAft>
+            </a:pPr>
+            <a:r>
+              <a:rPr sz="1500" b="1" i="0">
+                <a:solidFill>
+                  <a:srgbClr val="1C1B19"/>
+                </a:solidFill>
+                <a:latin typeface="Source Serif 4"/>
+              </a:rPr>
+              <a:t>Don't take sides.</a:t>
+            </a:r>
+          </a:p>
+          <a:p>
+            <a:pPr algn="l">
+              <a:spcAft>
+                <a:spcPts val="585"/>
+              </a:spcAft>
+            </a:pPr>
+            <a:r>
+              <a:rPr sz="1300" b="0" i="0">
+                <a:solidFill>
+                  <a:srgbClr val="1C1B19"/>
+                </a:solidFill>
+                <a:latin typeface="Source Serif 4"/>
+              </a:rPr>
+              <a:t>The lesson isn't about whether anyone's family rules are fair. Keep it on skills students can use. If a student vents about a specific rule, acknowledge it and bring it back to the plan.</a:t>
+            </a:r>
+          </a:p>
+          <a:p>
+            <a:pPr algn="l">
+              <a:spcAft>
+                <a:spcPts val="585"/>
+              </a:spcAft>
+            </a:pPr>
+            <a:r>
+              <a:rPr sz="1300" b="0" i="0">
+                <a:solidFill>
+                  <a:srgbClr val="1C1B19"/>
+                </a:solidFill>
+                <a:latin typeface="Source Serif 4"/>
+              </a:rPr>
+              <a:t/>
+            </a:r>
+          </a:p>
+          <a:p>
+            <a:pPr algn="l">
+              <a:spcAft>
+                <a:spcPts val="585"/>
+              </a:spcAft>
+            </a:pPr>
+            <a:r>
+              <a:rPr sz="1500" b="1" i="0">
+                <a:solidFill>
+                  <a:srgbClr val="1C1B19"/>
+                </a:solidFill>
+                <a:latin typeface="Source Serif 4"/>
+              </a:rPr>
+              <a:t>Diego's scenario is about feeling low.</a:t>
+            </a:r>
+          </a:p>
+          <a:p>
+            <a:pPr algn="l">
+              <a:spcAft>
+                <a:spcPts val="585"/>
+              </a:spcAft>
+            </a:pPr>
+            <a:r>
+              <a:rPr sz="1300" b="0" i="0">
+                <a:solidFill>
+                  <a:srgbClr val="1C1B19"/>
+                </a:solidFill>
+                <a:latin typeface="Source Serif 4"/>
+              </a:rPr>
+              <a:t>Keep the discussion on how he asks to be heard. If a student says it sounds like them, check in privately afterward and bring in a counselor. Don't ask about mood or safety in the circle.</a:t>
+            </a:r>
+          </a:p>
+          <a:p>
+            <a:pPr algn="l">
+              <a:spcAft>
+                <a:spcPts val="585"/>
+              </a:spcAft>
+            </a:pPr>
+            <a:r>
+              <a:rPr sz="1300" b="0" i="0">
+                <a:solidFill>
+                  <a:srgbClr val="1C1B19"/>
+                </a:solidFill>
+                <a:latin typeface="Source Serif 4"/>
+              </a:rPr>
+              <a:t/>
+            </a:r>
+          </a:p>
+        </p:txBody>
+      </p:sp>
+    </p:spTree>
+  </p:cSld>
+  <p:clrMapOvr>
+    <a:masterClrMapping/>
+  </p:clrMapOvr>
+</p:sld>
+</file>
+
+<file path=ppt/slides/slide11.xml><?xml version="1.0" encoding="utf-8"?>
+<p:sld xmlns:a="http://schemas.openxmlformats.org/drawingml/2006/main" xmlns:p="http://schemas.openxmlformats.org/presentationml/2006/main" xmlns:r="http://schemas.openxmlformats.org/officeDocument/2006/relationships" show="0">
+  <p:cSld>
+    <p:bg>
+      <p:bgPr>
+        <a:solidFill>
+          <a:srgbClr val="EEEBE4"/>
+        </a:solidFill>
+        <a:effectLst/>
+      </p:bgPr>
+    </p:bg>
+    <p:spTree>
+      <p:nvGrpSpPr>
+        <p:cNvPr id="1" name=""/>
+        <p:cNvGrpSpPr/>
+        <p:nvPr/>
+      </p:nvGrpSpPr>
+      <p:grpSpPr/>
+      <p:sp>
+        <p:nvSpPr>
+          <p:cNvPr id="2" name="Rectangle 1"/>
+          <p:cNvSpPr/>
+          <p:nvPr/>
+        </p:nvSpPr>
+        <p:spPr>
+          <a:xfrm>
+            <a:off x="0" y="0"/>
+            <a:ext cx="12191695" cy="384048"/>
+          </a:xfrm>
+          <a:prstGeom prst="rect">
+            <a:avLst/>
+          </a:prstGeom>
+          <a:solidFill>
+            <a:srgbClr val="0B2D5B"/>
+          </a:solidFill>
+          <a:ln>
+            <a:noFill/>
+          </a:ln>
+          <a:effectLst/>
+        </p:spPr>
+        <p:style>
+          <a:lnRef idx="1">
+            <a:schemeClr val="accent1"/>
+          </a:lnRef>
+          <a:fillRef idx="3">
+            <a:schemeClr val="accent1"/>
+          </a:fillRef>
+          <a:effectRef idx="2">
+            <a:schemeClr val="accent1"/>
+          </a:effectRef>
+          <a:fontRef idx="minor">
+            <a:schemeClr val="lt1"/>
+          </a:fontRef>
+        </p:style>
+        <p:txBody>
+          <a:bodyPr rtlCol="0" anchor="ctr"/>
+          <a:lstStyle/>
+          <a:p>
+            <a:pPr algn="ctr"/>
+          </a:p>
+        </p:txBody>
+      </p:sp>
+      <p:sp>
+        <p:nvSpPr>
+          <p:cNvPr id="3" name="TextBox 2"/>
+          <p:cNvSpPr txBox="1"/>
+          <p:nvPr/>
+        </p:nvSpPr>
+        <p:spPr>
+          <a:xfrm>
+            <a:off x="548640" y="100584"/>
+            <a:ext cx="10972800" cy="274320"/>
+          </a:xfrm>
+          <a:prstGeom prst="rect">
+            <a:avLst/>
+          </a:prstGeom>
+          <a:noFill/>
+        </p:spPr>
+        <p:txBody>
+          <a:bodyPr wrap="square" anchor="t" lIns="0" rIns="0" tIns="0" bIns="0">
+            <a:spAutoFit/>
+          </a:bodyPr>
+          <a:lstStyle/>
+          <a:p>
+            <a:pPr algn="l">
+              <a:spcAft>
+                <a:spcPts val="495"/>
+              </a:spcAft>
+            </a:pPr>
+            <a:r>
+              <a:rPr sz="1100" b="1" i="0">
+                <a:solidFill>
+                  <a:srgbClr val="FFFFFF"/>
+                </a:solidFill>
+                <a:latin typeface="Inter Tight"/>
+              </a:rPr>
+              <a:t>TEACHER PAGE  ·  skipped when you present  ·  Every student in the room</a:t>
+            </a:r>
+          </a:p>
+        </p:txBody>
+      </p:sp>
+      <p:sp>
+        <p:nvSpPr>
+          <p:cNvPr id="4" name="TextBox 3"/>
+          <p:cNvSpPr txBox="1"/>
+          <p:nvPr/>
+        </p:nvSpPr>
+        <p:spPr>
+          <a:xfrm>
+            <a:off x="548640" y="685800"/>
+            <a:ext cx="10972800" cy="640080"/>
+          </a:xfrm>
+          <a:prstGeom prst="rect">
+            <a:avLst/>
+          </a:prstGeom>
+          <a:noFill/>
+        </p:spPr>
+        <p:txBody>
+          <a:bodyPr wrap="square" anchor="t" lIns="0" rIns="0" tIns="0" bIns="0">
+            <a:spAutoFit/>
+          </a:bodyPr>
+          <a:lstStyle/>
+          <a:p>
+            <a:pPr algn="l">
+              <a:spcAft>
+                <a:spcPts val="1350"/>
+              </a:spcAft>
+            </a:pPr>
+            <a:r>
+              <a:rPr sz="3000" b="1" i="0">
+                <a:solidFill>
+                  <a:srgbClr val="1C1B19"/>
+                </a:solidFill>
+                <a:latin typeface="Source Serif 4"/>
+              </a:rPr>
+              <a:t>Every student in the room</a:t>
+            </a:r>
+          </a:p>
+        </p:txBody>
+      </p:sp>
+      <p:sp>
+        <p:nvSpPr>
+          <p:cNvPr id="5" name="TextBox 4"/>
+          <p:cNvSpPr txBox="1"/>
+          <p:nvPr/>
+        </p:nvSpPr>
+        <p:spPr>
+          <a:xfrm>
+            <a:off x="548640" y="1325880"/>
+            <a:ext cx="10972800" cy="365760"/>
+          </a:xfrm>
+          <a:prstGeom prst="rect">
+            <a:avLst/>
+          </a:prstGeom>
+          <a:noFill/>
+        </p:spPr>
+        <p:txBody>
+          <a:bodyPr wrap="square" anchor="t" lIns="0" rIns="0" tIns="0" bIns="0">
+            <a:spAutoFit/>
+          </a:bodyPr>
+          <a:lstStyle/>
+          <a:p>
+            <a:pPr algn="l">
+              <a:spcAft>
+                <a:spcPts val="630"/>
+              </a:spcAft>
+            </a:pPr>
+            <a:r>
+              <a:rPr sz="1400" b="0" i="0">
+                <a:solidFill>
+                  <a:srgbClr val="5D5A54"/>
+                </a:solidFill>
+                <a:latin typeface="Inter Tight"/>
+              </a:rPr>
+              <a:t>Culture, family, identity, ability and money: what to keep in mind for this topic.</a:t>
+            </a:r>
+          </a:p>
+        </p:txBody>
+      </p:sp>
+      <p:sp>
+        <p:nvSpPr>
+          <p:cNvPr id="6" name="TextBox 5"/>
+          <p:cNvSpPr txBox="1"/>
+          <p:nvPr/>
+        </p:nvSpPr>
+        <p:spPr>
+          <a:xfrm>
+            <a:off x="548640" y="1828800"/>
+            <a:ext cx="5394960" cy="4572000"/>
+          </a:xfrm>
+          <a:prstGeom prst="rect">
+            <a:avLst/>
+          </a:prstGeom>
+          <a:noFill/>
+        </p:spPr>
+        <p:txBody>
+          <a:bodyPr wrap="square" anchor="t" lIns="0" rIns="0" tIns="0" bIns="0">
+            <a:spAutoFit/>
+          </a:bodyPr>
+          <a:lstStyle/>
+          <a:p>
+            <a:pPr algn="l">
+              <a:spcAft>
+                <a:spcPts val="585"/>
+              </a:spcAft>
+            </a:pPr>
+            <a:r>
+              <a:rPr sz="1500" b="1" i="0">
+                <a:solidFill>
+                  <a:srgbClr val="1C1B19"/>
+                </a:solidFill>
+                <a:latin typeface="Source Serif 4"/>
+              </a:rPr>
+              <a:t>Family structure.</a:t>
+            </a:r>
+          </a:p>
+          <a:p>
+            <a:pPr algn="l">
+              <a:spcAft>
+                <a:spcPts val="585"/>
+              </a:spcAft>
+            </a:pPr>
+            <a:r>
+              <a:rPr sz="1300" b="0" i="0">
+                <a:solidFill>
+                  <a:srgbClr val="1C1B19"/>
+                </a:solidFill>
+                <a:latin typeface="Source Serif 4"/>
+              </a:rPr>
+              <a:t>Scenarios include parents, a grandmother and a single dad on purpose. When you talk it through, say "the adults at home." A student who splits time between two homes may be negotiating with two sets of rules at once.</a:t>
+            </a:r>
+          </a:p>
+          <a:p>
+            <a:pPr algn="l">
+              <a:spcAft>
+                <a:spcPts val="585"/>
+              </a:spcAft>
+            </a:pPr>
+            <a:r>
+              <a:rPr sz="1300" b="0" i="0">
+                <a:solidFill>
+                  <a:srgbClr val="1C1B19"/>
+                </a:solidFill>
+                <a:latin typeface="Source Serif 4"/>
+              </a:rPr>
+              <a:t/>
+            </a:r>
+          </a:p>
+          <a:p>
+            <a:pPr algn="l">
+              <a:spcAft>
+                <a:spcPts val="585"/>
+              </a:spcAft>
+            </a:pPr>
+            <a:r>
+              <a:rPr sz="1500" b="1" i="0">
+                <a:solidFill>
+                  <a:srgbClr val="1C1B19"/>
+                </a:solidFill>
+                <a:latin typeface="Source Serif 4"/>
+              </a:rPr>
+              <a:t>Families differ in how much teens negotiate.</a:t>
+            </a:r>
+          </a:p>
+          <a:p>
+            <a:pPr algn="l">
+              <a:spcAft>
+                <a:spcPts val="585"/>
+              </a:spcAft>
+            </a:pPr>
+            <a:r>
+              <a:rPr sz="1300" b="0" i="0">
+                <a:solidFill>
+                  <a:srgbClr val="1C1B19"/>
+                </a:solidFill>
+                <a:latin typeface="Source Serif 4"/>
+              </a:rPr>
+              <a:t>Some families expect teens to speak up and argue their case. In others, arguing back reads as disrespect, and asks go better through tone, timing, or a trusted relative. Neither is wrong. Ask students what works in their own family, privately. Avoid "In X families" generalizations.</a:t>
+            </a:r>
+          </a:p>
+          <a:p>
+            <a:pPr algn="l">
+              <a:spcAft>
+                <a:spcPts val="585"/>
+              </a:spcAft>
+            </a:pPr>
+            <a:r>
+              <a:rPr sz="1300" b="0" i="0">
+                <a:solidFill>
+                  <a:srgbClr val="1C1B19"/>
+                </a:solidFill>
+                <a:latin typeface="Source Serif 4"/>
+              </a:rPr>
+              <a:t/>
+            </a:r>
+          </a:p>
+          <a:p>
+            <a:pPr algn="l">
+              <a:spcAft>
+                <a:spcPts val="585"/>
+              </a:spcAft>
+            </a:pPr>
+            <a:r>
+              <a:rPr sz="1500" b="1" i="0">
+                <a:solidFill>
+                  <a:srgbClr val="1C1B19"/>
+                </a:solidFill>
+                <a:latin typeface="Source Serif 4"/>
+              </a:rPr>
+              <a:t>Different countries, different languages.</a:t>
+            </a:r>
+          </a:p>
+          <a:p>
+            <a:pPr algn="l">
+              <a:spcAft>
+                <a:spcPts val="585"/>
+              </a:spcAft>
+            </a:pPr>
+            <a:r>
+              <a:rPr sz="1300" b="0" i="0">
+                <a:solidFill>
+                  <a:srgbClr val="1C1B19"/>
+                </a:solidFill>
+                <a:latin typeface="Source Serif 4"/>
+              </a:rPr>
+              <a:t>Some students grew up somewhere their adults didn't, translate for their family, or speak another language at home. "Bring in a bridge" (an aunt, a grandparent, a coach, a counselor, a faith leader) can help across generations and cultures. If a family meeting would help, a counselor can ask about an interpreter.</a:t>
+            </a:r>
+          </a:p>
+          <a:p>
+            <a:pPr algn="l">
+              <a:spcAft>
+                <a:spcPts val="585"/>
+              </a:spcAft>
+            </a:pPr>
+            <a:r>
+              <a:rPr sz="1300" b="0" i="0">
+                <a:solidFill>
+                  <a:srgbClr val="1C1B19"/>
+                </a:solidFill>
+                <a:latin typeface="Source Serif 4"/>
+              </a:rPr>
+              <a:t/>
+            </a:r>
+          </a:p>
+        </p:txBody>
+      </p:sp>
+      <p:sp>
+        <p:nvSpPr>
+          <p:cNvPr id="7" name="TextBox 6"/>
+          <p:cNvSpPr txBox="1"/>
+          <p:nvPr/>
+        </p:nvSpPr>
+        <p:spPr>
+          <a:xfrm>
+            <a:off x="6217920" y="1828800"/>
+            <a:ext cx="5394960" cy="4572000"/>
+          </a:xfrm>
+          <a:prstGeom prst="rect">
+            <a:avLst/>
+          </a:prstGeom>
+          <a:noFill/>
+        </p:spPr>
+        <p:txBody>
+          <a:bodyPr wrap="square" anchor="t" lIns="0" rIns="0" tIns="0" bIns="0">
+            <a:spAutoFit/>
+          </a:bodyPr>
+          <a:lstStyle/>
+          <a:p>
+            <a:pPr algn="l">
+              <a:spcAft>
+                <a:spcPts val="585"/>
+              </a:spcAft>
+            </a:pPr>
+            <a:r>
+              <a:rPr sz="1500" b="1" i="0">
+                <a:solidFill>
+                  <a:srgbClr val="1C1B19"/>
+                </a:solidFill>
+                <a:latin typeface="Source Serif 4"/>
+              </a:rPr>
+              <a:t>Students who aren't out at home.</a:t>
+            </a:r>
+          </a:p>
+          <a:p>
+            <a:pPr algn="l">
+              <a:spcAft>
+                <a:spcPts val="585"/>
+              </a:spcAft>
+            </a:pPr>
+            <a:r>
+              <a:rPr sz="1300" b="0" i="0">
+                <a:solidFill>
+                  <a:srgbClr val="1C1B19"/>
+                </a:solidFill>
+                <a:latin typeface="Source Serif 4"/>
+              </a:rPr>
+              <a:t>The "what they don't know won't hurt" warning is about safety and trust. A student who isn't out at home doesn't owe that conversation to anyone, and needs a safe school adult. The Trevor Project (call 1-866-488-7386 or text START to 678-678) is there any time.</a:t>
+            </a:r>
+          </a:p>
+          <a:p>
+            <a:pPr algn="l">
+              <a:spcAft>
+                <a:spcPts val="585"/>
+              </a:spcAft>
+            </a:pPr>
+            <a:r>
+              <a:rPr sz="1300" b="0" i="0">
+                <a:solidFill>
+                  <a:srgbClr val="1C1B19"/>
+                </a:solidFill>
+                <a:latin typeface="Source Serif 4"/>
+              </a:rPr>
+              <a:t/>
+            </a:r>
+          </a:p>
+          <a:p>
+            <a:pPr algn="l">
+              <a:spcAft>
+                <a:spcPts val="585"/>
+              </a:spcAft>
+            </a:pPr>
+            <a:r>
+              <a:rPr sz="1500" b="1" i="0">
+                <a:solidFill>
+                  <a:srgbClr val="1C1B19"/>
+                </a:solidFill>
+                <a:latin typeface="Source Serif 4"/>
+              </a:rPr>
+              <a:t>Not every ask is about a party.</a:t>
+            </a:r>
+          </a:p>
+          <a:p>
+            <a:pPr algn="l">
+              <a:spcAft>
+                <a:spcPts val="585"/>
+              </a:spcAft>
+            </a:pPr>
+            <a:r>
+              <a:rPr sz="1300" b="0" i="0">
+                <a:solidFill>
+                  <a:srgbClr val="1C1B19"/>
+                </a:solidFill>
+                <a:latin typeface="Source Serif 4"/>
+              </a:rPr>
+              <a:t>Some students are asking about work hours, helping with money, rides, or college costs. Side-by-side moments don't require a car: cooking, walking, or the bus count. Checkpoints like texting when you arrive assume a phone, so offer a call from a friend's phone or a set check-in time too.</a:t>
+            </a:r>
+          </a:p>
+          <a:p>
+            <a:pPr algn="l">
+              <a:spcAft>
+                <a:spcPts val="585"/>
+              </a:spcAft>
+            </a:pPr>
+            <a:r>
+              <a:rPr sz="1300" b="0" i="0">
+                <a:solidFill>
+                  <a:srgbClr val="1C1B19"/>
+                </a:solidFill>
+                <a:latin typeface="Source Serif 4"/>
+              </a:rPr>
+              <a:t/>
+            </a:r>
+          </a:p>
+          <a:p>
+            <a:pPr algn="l">
+              <a:spcAft>
+                <a:spcPts val="585"/>
+              </a:spcAft>
+            </a:pPr>
+            <a:r>
+              <a:rPr sz="1500" b="1" i="0">
+                <a:solidFill>
+                  <a:srgbClr val="1C1B19"/>
+                </a:solidFill>
+                <a:latin typeface="Source Serif 4"/>
+              </a:rPr>
+              <a:t>Face to face is hard for some students.</a:t>
+            </a:r>
+          </a:p>
+          <a:p>
+            <a:pPr algn="l">
+              <a:spcAft>
+                <a:spcPts val="585"/>
+              </a:spcAft>
+            </a:pPr>
+            <a:r>
+              <a:rPr sz="1300" b="0" i="0">
+                <a:solidFill>
+                  <a:srgbClr val="1C1B19"/>
+                </a:solidFill>
+                <a:latin typeface="Source Serif 4"/>
+              </a:rPr>
+              <a:t>Autistic students, students with ADHD, and students with anxiety may lose their words in a heated talk or find eye contact hard. "Write it if saying it is hard" is a full strategy, and side by side often works better than face to face for everyone.</a:t>
+            </a:r>
+          </a:p>
+          <a:p>
+            <a:pPr algn="l">
+              <a:spcAft>
+                <a:spcPts val="585"/>
+              </a:spcAft>
+            </a:pPr>
+            <a:r>
+              <a:rPr sz="1300" b="0" i="0">
+                <a:solidFill>
+                  <a:srgbClr val="1C1B19"/>
+                </a:solidFill>
+                <a:latin typeface="Source Serif 4"/>
+              </a:rPr>
+              <a:t/>
+            </a:r>
+          </a:p>
+        </p:txBody>
+      </p:sp>
+    </p:spTree>
+  </p:cSld>
+  <p:clrMapOvr>
+    <a:masterClrMapping/>
+  </p:clrMapOvr>
+</p:sld>
+</file>
+
+<file path=ppt/slides/slide12.xml><?xml version="1.0" encoding="utf-8"?>
+<p:sld xmlns:a="http://schemas.openxmlformats.org/drawingml/2006/main" xmlns:p="http://schemas.openxmlformats.org/presentationml/2006/main" xmlns:r="http://schemas.openxmlformats.org/officeDocument/2006/relationships" show="0">
+  <p:cSld>
+    <p:bg>
+      <p:bgPr>
+        <a:solidFill>
+          <a:srgbClr val="EEEBE4"/>
+        </a:solidFill>
+        <a:effectLst/>
+      </p:bgPr>
+    </p:bg>
+    <p:spTree>
+      <p:nvGrpSpPr>
+        <p:cNvPr id="1" name=""/>
+        <p:cNvGrpSpPr/>
+        <p:nvPr/>
+      </p:nvGrpSpPr>
+      <p:grpSpPr/>
+      <p:sp>
+        <p:nvSpPr>
+          <p:cNvPr id="2" name="Rectangle 1"/>
+          <p:cNvSpPr/>
+          <p:nvPr/>
+        </p:nvSpPr>
+        <p:spPr>
+          <a:xfrm>
+            <a:off x="0" y="0"/>
+            <a:ext cx="12191695" cy="384048"/>
+          </a:xfrm>
+          <a:prstGeom prst="rect">
+            <a:avLst/>
+          </a:prstGeom>
+          <a:solidFill>
+            <a:srgbClr val="0B2D5B"/>
+          </a:solidFill>
+          <a:ln>
+            <a:noFill/>
+          </a:ln>
+          <a:effectLst/>
+        </p:spPr>
+        <p:style>
+          <a:lnRef idx="1">
+            <a:schemeClr val="accent1"/>
+          </a:lnRef>
+          <a:fillRef idx="3">
+            <a:schemeClr val="accent1"/>
+          </a:fillRef>
+          <a:effectRef idx="2">
+            <a:schemeClr val="accent1"/>
+          </a:effectRef>
+          <a:fontRef idx="minor">
+            <a:schemeClr val="lt1"/>
+          </a:fontRef>
+        </p:style>
+        <p:txBody>
+          <a:bodyPr rtlCol="0" anchor="ctr"/>
+          <a:lstStyle/>
+          <a:p>
+            <a:pPr algn="ctr"/>
+          </a:p>
+        </p:txBody>
+      </p:sp>
+      <p:sp>
+        <p:nvSpPr>
+          <p:cNvPr id="3" name="TextBox 2"/>
+          <p:cNvSpPr txBox="1"/>
+          <p:nvPr/>
+        </p:nvSpPr>
+        <p:spPr>
+          <a:xfrm>
+            <a:off x="548640" y="100584"/>
+            <a:ext cx="10972800" cy="274320"/>
+          </a:xfrm>
+          <a:prstGeom prst="rect">
+            <a:avLst/>
+          </a:prstGeom>
+          <a:noFill/>
+        </p:spPr>
+        <p:txBody>
+          <a:bodyPr wrap="square" anchor="t" lIns="0" rIns="0" tIns="0" bIns="0">
+            <a:spAutoFit/>
+          </a:bodyPr>
+          <a:lstStyle/>
+          <a:p>
+            <a:pPr algn="l">
+              <a:spcAft>
+                <a:spcPts val="495"/>
+              </a:spcAft>
+            </a:pPr>
+            <a:r>
+              <a:rPr sz="1100" b="1" i="0">
+                <a:solidFill>
+                  <a:srgbClr val="FFFFFF"/>
+                </a:solidFill>
+                <a:latin typeface="Inter Tight"/>
+              </a:rPr>
+              <a:t>TEACHER PAGE  ·  skipped when you present  ·  Background</a:t>
+            </a:r>
+          </a:p>
+        </p:txBody>
+      </p:sp>
+      <p:sp>
+        <p:nvSpPr>
+          <p:cNvPr id="4" name="TextBox 3"/>
+          <p:cNvSpPr txBox="1"/>
+          <p:nvPr/>
+        </p:nvSpPr>
+        <p:spPr>
+          <a:xfrm>
+            <a:off x="548640" y="685800"/>
+            <a:ext cx="10972800" cy="640080"/>
+          </a:xfrm>
+          <a:prstGeom prst="rect">
+            <a:avLst/>
+          </a:prstGeom>
+          <a:noFill/>
+        </p:spPr>
+        <p:txBody>
+          <a:bodyPr wrap="square" anchor="t" lIns="0" rIns="0" tIns="0" bIns="0">
+            <a:spAutoFit/>
+          </a:bodyPr>
+          <a:lstStyle/>
+          <a:p>
+            <a:pPr algn="l">
+              <a:spcAft>
+                <a:spcPts val="1350"/>
+              </a:spcAft>
+            </a:pPr>
+            <a:r>
+              <a:rPr sz="3000" b="1" i="0">
+                <a:solidFill>
+                  <a:srgbClr val="1C1B19"/>
+                </a:solidFill>
+                <a:latin typeface="Source Serif 4"/>
+              </a:rPr>
+              <a:t>What the research says</a:t>
+            </a:r>
+          </a:p>
+        </p:txBody>
+      </p:sp>
+      <p:sp>
+        <p:nvSpPr>
+          <p:cNvPr id="5" name="TextBox 4"/>
+          <p:cNvSpPr txBox="1"/>
+          <p:nvPr/>
+        </p:nvSpPr>
+        <p:spPr>
+          <a:xfrm>
+            <a:off x="548640" y="1463040"/>
+            <a:ext cx="5394960" cy="4937760"/>
+          </a:xfrm>
+          <a:prstGeom prst="rect">
+            <a:avLst/>
+          </a:prstGeom>
+          <a:noFill/>
+        </p:spPr>
+        <p:txBody>
+          <a:bodyPr wrap="square" anchor="t" lIns="0" rIns="0" tIns="0" bIns="0">
+            <a:spAutoFit/>
+          </a:bodyPr>
+          <a:lstStyle/>
+          <a:p>
+            <a:pPr algn="l">
+              <a:spcAft>
+                <a:spcPts val="585"/>
+              </a:spcAft>
+            </a:pPr>
+            <a:r>
+              <a:rPr sz="1300" b="0" i="0">
+                <a:solidFill>
+                  <a:srgbClr val="1C1B19"/>
+                </a:solidFill>
+                <a:latin typeface="Source Serif 4"/>
+              </a:rPr>
+              <a:t>In a study of more than 1,000 14-year-olds in Sweden, what parents knew about their teens' lives came mostly from what teens chose to tell them.</a:t>
+            </a:r>
+          </a:p>
+          <a:p>
+            <a:pPr algn="l">
+              <a:spcAft>
+                <a:spcPts val="585"/>
+              </a:spcAft>
+            </a:pPr>
+            <a:r>
+              <a:rPr sz="1050" b="0" i="0">
+                <a:solidFill>
+                  <a:srgbClr val="5D5A54"/>
+                </a:solidFill>
+                <a:latin typeface="Inter Tight"/>
+              </a:rPr>
+              <a:t>Kerr and Stattin, Developmental Psychology, 2000</a:t>
+            </a:r>
+          </a:p>
+          <a:p>
+            <a:pPr algn="l">
+              <a:spcAft>
+                <a:spcPts val="585"/>
+              </a:spcAft>
+            </a:pPr>
+            <a:r>
+              <a:rPr sz="1300" b="0" i="0">
+                <a:solidFill>
+                  <a:srgbClr val="1C1B19"/>
+                </a:solidFill>
+                <a:latin typeface="Source Serif 4"/>
+              </a:rPr>
+              <a:t>Rules and checking up explained less of what parents knew than teens' own telling, which led researchers to rethink what "parental monitoring" measures.</a:t>
+            </a:r>
+          </a:p>
+          <a:p>
+            <a:pPr algn="l">
+              <a:spcAft>
+                <a:spcPts val="585"/>
+              </a:spcAft>
+            </a:pPr>
+            <a:r>
+              <a:rPr sz="1050" b="0" i="0">
+                <a:solidFill>
+                  <a:srgbClr val="5D5A54"/>
+                </a:solidFill>
+                <a:latin typeface="Inter Tight"/>
+              </a:rPr>
+              <a:t>Stattin and Kerr, Child Development, 2000</a:t>
+            </a:r>
+          </a:p>
+          <a:p>
+            <a:pPr algn="l">
+              <a:spcAft>
+                <a:spcPts val="585"/>
+              </a:spcAft>
+            </a:pPr>
+            <a:r>
+              <a:rPr sz="1300" b="0" i="0">
+                <a:solidFill>
+                  <a:srgbClr val="1C1B19"/>
+                </a:solidFill>
+                <a:latin typeface="Source Serif 4"/>
+              </a:rPr>
+              <a:t>A review of dozens of studies found that the number of conflicts with parents drops across the teen years, while the emotional intensity of conflict rises from early to mid-adolescence.</a:t>
+            </a:r>
+          </a:p>
+          <a:p>
+            <a:pPr algn="l">
+              <a:spcAft>
+                <a:spcPts val="585"/>
+              </a:spcAft>
+            </a:pPr>
+            <a:r>
+              <a:rPr sz="1050" b="0" i="0">
+                <a:solidFill>
+                  <a:srgbClr val="5D5A54"/>
+                </a:solidFill>
+                <a:latin typeface="Inter Tight"/>
+              </a:rPr>
+              <a:t>Laursen, Coy and Collins, Child Development, 1998</a:t>
+            </a:r>
+          </a:p>
+        </p:txBody>
+      </p:sp>
+      <p:sp>
+        <p:nvSpPr>
+          <p:cNvPr id="6" name="TextBox 5"/>
+          <p:cNvSpPr txBox="1"/>
+          <p:nvPr/>
+        </p:nvSpPr>
+        <p:spPr>
+          <a:xfrm>
+            <a:off x="6217920" y="1463040"/>
+            <a:ext cx="5394960" cy="4937760"/>
+          </a:xfrm>
+          <a:prstGeom prst="rect">
+            <a:avLst/>
+          </a:prstGeom>
+          <a:noFill/>
+        </p:spPr>
+        <p:txBody>
+          <a:bodyPr wrap="square" anchor="t" lIns="0" rIns="0" tIns="0" bIns="0">
+            <a:spAutoFit/>
+          </a:bodyPr>
+          <a:lstStyle/>
+          <a:p>
+            <a:pPr algn="l">
+              <a:spcAft>
+                <a:spcPts val="585"/>
+              </a:spcAft>
+            </a:pPr>
+            <a:r>
+              <a:rPr sz="1300" b="0" i="0">
+                <a:solidFill>
+                  <a:srgbClr val="1C1B19"/>
+                </a:solidFill>
+                <a:latin typeface="Source Serif 4"/>
+              </a:rPr>
+              <a:t>Teens listening to recordings of their own mothers criticizing them showed more activity in emotional brain areas and less in areas for self-control and for understanding another person's point of view.</a:t>
+            </a:r>
+          </a:p>
+          <a:p>
+            <a:pPr algn="l">
+              <a:spcAft>
+                <a:spcPts val="585"/>
+              </a:spcAft>
+            </a:pPr>
+            <a:r>
+              <a:rPr sz="1050" b="0" i="0">
+                <a:solidFill>
+                  <a:srgbClr val="5D5A54"/>
+                </a:solidFill>
+                <a:latin typeface="Inter Tight"/>
+              </a:rPr>
+              <a:t>Lee, Siegle, Dahl, Hooley and Silk, Social Cognitive and Affective Neuroscience, 2015</a:t>
+            </a:r>
+          </a:p>
+          <a:p>
+            <a:pPr algn="l">
+              <a:spcAft>
+                <a:spcPts val="585"/>
+              </a:spcAft>
+            </a:pPr>
+            <a:r>
+              <a:rPr sz="1300" b="0" i="0">
+                <a:solidFill>
+                  <a:srgbClr val="1C1B19"/>
+                </a:solidFill>
+                <a:latin typeface="Source Serif 4"/>
+              </a:rPr>
+              <a:t>Teens from Mexican, Chinese, Filipino and European backgrounds differed in their beliefs about parents' authority.</a:t>
+            </a:r>
+          </a:p>
+          <a:p>
+            <a:pPr algn="l">
+              <a:spcAft>
+                <a:spcPts val="585"/>
+              </a:spcAft>
+            </a:pPr>
+            <a:r>
+              <a:rPr sz="1050" b="0" i="0">
+                <a:solidFill>
+                  <a:srgbClr val="5D5A54"/>
+                </a:solidFill>
+                <a:latin typeface="Inter Tight"/>
+              </a:rPr>
+              <a:t>Fuligni, Developmental Psychology, 1998</a:t>
+            </a:r>
+          </a:p>
+          <a:p>
+            <a:pPr algn="l">
+              <a:spcAft>
+                <a:spcPts val="585"/>
+              </a:spcAft>
+            </a:pPr>
+            <a:r>
+              <a:rPr sz="1300" b="0" i="0">
+                <a:solidFill>
+                  <a:srgbClr val="1C1B19"/>
+                </a:solidFill>
+                <a:latin typeface="Source Serif 4"/>
+              </a:rPr>
+              <a:t>Those same teens reported similar levels of conflict and closeness with their parents across backgrounds.</a:t>
+            </a:r>
+          </a:p>
+          <a:p>
+            <a:pPr algn="l">
+              <a:spcAft>
+                <a:spcPts val="585"/>
+              </a:spcAft>
+            </a:pPr>
+            <a:r>
+              <a:rPr sz="1050" b="0" i="0">
+                <a:solidFill>
+                  <a:srgbClr val="5D5A54"/>
+                </a:solidFill>
+                <a:latin typeface="Inter Tight"/>
+              </a:rPr>
+              <a:t>Fuligni, 1998</a:t>
+            </a:r>
+          </a:p>
+        </p:txBody>
+      </p:sp>
+    </p:spTree>
+  </p:cSld>
+  <p:clrMapOvr>
+    <a:masterClrMapping/>
+  </p:clrMapOvr>
+</p:sld>
+</file>
+
+<file path=ppt/slides/slide2.xml><?xml version="1.0" encoding="utf-8"?>
+<p:sld xmlns:a="http://schemas.openxmlformats.org/drawingml/2006/main" xmlns:p="http://schemas.openxmlformats.org/presentationml/2006/main" xmlns:r="http://schemas.openxmlformats.org/officeDocument/2006/relationships">
+  <p:cSld>
+    <p:bg>
+      <p:bgPr>
+        <a:solidFill>
+          <a:srgbClr val="0B2D5B"/>
+        </a:solidFill>
+        <a:effectLst/>
+      </p:bgPr>
+    </p:bg>
+    <p:spTree>
+      <p:nvGrpSpPr>
+        <p:cNvPr id="1" name=""/>
+        <p:cNvGrpSpPr/>
+        <p:nvPr/>
+      </p:nvGrpSpPr>
+      <p:grpSpPr/>
+      <p:sp>
+        <p:nvSpPr>
+          <p:cNvPr id="2" name="Rectangle 1"/>
+          <p:cNvSpPr/>
+          <p:nvPr/>
+        </p:nvSpPr>
+        <p:spPr>
+          <a:xfrm>
+            <a:off x="548640" y="502920"/>
+            <a:ext cx="457200" cy="54864"/>
+          </a:xfrm>
+          <a:prstGeom prst="rect">
+            <a:avLst/>
+          </a:prstGeom>
+          <a:solidFill>
+            <a:srgbClr val="F47B20"/>
+          </a:solidFill>
+          <a:ln>
+            <a:noFill/>
+          </a:ln>
+          <a:effectLst/>
+        </p:spPr>
+        <p:style>
+          <a:lnRef idx="1">
+            <a:schemeClr val="accent1"/>
+          </a:lnRef>
+          <a:fillRef idx="3">
+            <a:schemeClr val="accent1"/>
+          </a:fillRef>
+          <a:effectRef idx="2">
+            <a:schemeClr val="accent1"/>
+          </a:effectRef>
+          <a:fontRef idx="minor">
+            <a:schemeClr val="lt1"/>
+          </a:fontRef>
+        </p:style>
+        <p:txBody>
+          <a:bodyPr rtlCol="0" anchor="ctr"/>
+          <a:lstStyle/>
+          <a:p>
+            <a:pPr algn="ctr"/>
+          </a:p>
+        </p:txBody>
+      </p:sp>
+      <p:sp>
+        <p:nvSpPr>
+          <p:cNvPr id="3" name="TextBox 2"/>
+          <p:cNvSpPr txBox="1"/>
+          <p:nvPr/>
+        </p:nvSpPr>
+        <p:spPr>
+          <a:xfrm>
+            <a:off x="1143000" y="393192"/>
+            <a:ext cx="8229600" cy="274320"/>
+          </a:xfrm>
+          <a:prstGeom prst="rect">
+            <a:avLst/>
+          </a:prstGeom>
+          <a:noFill/>
+        </p:spPr>
+        <p:txBody>
+          <a:bodyPr wrap="square" anchor="t" lIns="0" rIns="0" tIns="0" bIns="0">
+            <a:spAutoFit/>
+          </a:bodyPr>
+          <a:lstStyle/>
+          <a:p>
+            <a:pPr algn="l">
+              <a:spcAft>
+                <a:spcPts val="540"/>
+              </a:spcAft>
+            </a:pPr>
+            <a:r>
+              <a:rPr sz="1200" b="1" i="0">
+                <a:solidFill>
+                  <a:srgbClr val="5D5A54"/>
+                </a:solidFill>
+                <a:latin typeface="Inter Tight"/>
+              </a:rPr>
+              <a:t>TALKING TO YOUR PARENTS (SO THEY ACTUALLY LISTEN)</a:t>
+            </a:r>
+          </a:p>
+        </p:txBody>
+      </p:sp>
+      <p:sp>
+        <p:nvSpPr>
+          <p:cNvPr id="4" name="TextBox 3"/>
+          <p:cNvSpPr txBox="1"/>
+          <p:nvPr/>
+        </p:nvSpPr>
+        <p:spPr>
+          <a:xfrm>
+            <a:off x="8229600" y="6400800"/>
+            <a:ext cx="3410712" cy="274320"/>
+          </a:xfrm>
+          <a:prstGeom prst="rect">
+            <a:avLst/>
+          </a:prstGeom>
+          <a:noFill/>
+        </p:spPr>
+        <p:txBody>
+          <a:bodyPr wrap="square" anchor="t" lIns="0" rIns="0" tIns="0" bIns="0">
+            <a:spAutoFit/>
+          </a:bodyPr>
+          <a:lstStyle/>
+          <a:p>
+            <a:pPr algn="r">
+              <a:spcAft>
+                <a:spcPts val="450"/>
+              </a:spcAft>
+            </a:pPr>
+            <a:r>
+              <a:rPr sz="1000" b="0" i="0">
+                <a:solidFill>
+                  <a:srgbClr val="5D5A54"/>
+                </a:solidFill>
+                <a:latin typeface="Inter Tight"/>
+              </a:rPr>
+              <a:t>Beaver Counseling</a:t>
+            </a:r>
+          </a:p>
+        </p:txBody>
+      </p:sp>
+      <p:sp>
+        <p:nvSpPr>
+          <p:cNvPr id="5" name="TextBox 4"/>
+          <p:cNvSpPr txBox="1"/>
+          <p:nvPr/>
+        </p:nvSpPr>
+        <p:spPr>
+          <a:xfrm>
+            <a:off x="822960" y="1371600"/>
+            <a:ext cx="10515600" cy="2377440"/>
+          </a:xfrm>
+          <a:prstGeom prst="rect">
+            <a:avLst/>
+          </a:prstGeom>
+          <a:noFill/>
+        </p:spPr>
+        <p:txBody>
+          <a:bodyPr wrap="square" anchor="b" lIns="0" rIns="0" tIns="0" bIns="0">
+            <a:spAutoFit/>
+          </a:bodyPr>
+          <a:lstStyle/>
+          <a:p>
+            <a:pPr algn="l">
+              <a:spcAft>
+                <a:spcPts val="2430"/>
+              </a:spcAft>
+            </a:pPr>
+            <a:r>
+              <a:rPr sz="5400" b="1" i="0">
+                <a:solidFill>
+                  <a:srgbClr val="FFFFFF"/>
+                </a:solidFill>
+                <a:latin typeface="Source Serif 4"/>
+              </a:rPr>
+              <a:t>Talking to Your Parents (So They Actually Listen)</a:t>
+            </a:r>
+          </a:p>
+        </p:txBody>
+      </p:sp>
+      <p:sp>
+        <p:nvSpPr>
+          <p:cNvPr id="6" name="TextBox 5"/>
+          <p:cNvSpPr txBox="1"/>
+          <p:nvPr/>
+        </p:nvSpPr>
+        <p:spPr>
+          <a:xfrm>
+            <a:off x="822960" y="3931920"/>
+            <a:ext cx="10515600" cy="914400"/>
+          </a:xfrm>
+          <a:prstGeom prst="rect">
+            <a:avLst/>
+          </a:prstGeom>
+          <a:noFill/>
+        </p:spPr>
+        <p:txBody>
+          <a:bodyPr wrap="square" anchor="t" lIns="0" rIns="0" tIns="0" bIns="0">
+            <a:spAutoFit/>
+          </a:bodyPr>
+          <a:lstStyle/>
+          <a:p>
+            <a:pPr algn="l">
+              <a:spcAft>
+                <a:spcPts val="1080"/>
+              </a:spcAft>
+            </a:pPr>
+            <a:r>
+              <a:rPr sz="2400" b="0" i="1">
+                <a:solidFill>
+                  <a:srgbClr val="E8E4DA"/>
+                </a:solidFill>
+                <a:latin typeface="Source Serif 4"/>
+              </a:rPr>
+              <a:t>"Parents" means whoever is raising you.</a:t>
+            </a:r>
+          </a:p>
+        </p:txBody>
+      </p:sp>
+      <p:sp>
+        <p:nvSpPr>
+          <p:cNvPr id="7" name="TextBox 6"/>
+          <p:cNvSpPr txBox="1"/>
+          <p:nvPr/>
+        </p:nvSpPr>
+        <p:spPr>
+          <a:xfrm>
+            <a:off x="822960" y="6035040"/>
+            <a:ext cx="7315200" cy="365760"/>
+          </a:xfrm>
+          <a:prstGeom prst="rect">
+            <a:avLst/>
+          </a:prstGeom>
+          <a:noFill/>
+        </p:spPr>
+        <p:txBody>
+          <a:bodyPr wrap="square" anchor="t" lIns="0" rIns="0" tIns="0" bIns="0">
+            <a:spAutoFit/>
+          </a:bodyPr>
+          <a:lstStyle/>
+          <a:p>
+            <a:pPr algn="l">
+              <a:spcAft>
+                <a:spcPts val="585"/>
+              </a:spcAft>
+            </a:pPr>
+            <a:r>
+              <a:rPr sz="1300" b="0" i="0">
+                <a:solidFill>
+                  <a:srgbClr val="E8E4DA"/>
+                </a:solidFill>
+                <a:latin typeface="Inter Tight"/>
+              </a:rPr>
+              <a:t>Beaver Upper School · Counseling</a:t>
+            </a:r>
+          </a:p>
+        </p:txBody>
+      </p:sp>
+    </p:spTree>
+  </p:cSld>
+  <p:clrMapOvr>
+    <a:masterClrMapping/>
+  </p:clrMapOvr>
+</p:sld>
+</file>
+
+<file path=ppt/slides/slide3.xml><?xml version="1.0" encoding="utf-8"?>
 <p:sld xmlns:a="http://schemas.openxmlformats.org/drawingml/2006/main" xmlns:p="http://schemas.openxmlformats.org/presentationml/2006/main" xmlns:r="http://schemas.openxmlformats.org/officeDocument/2006/relationships">
   <p:cSld>
     <p:bg>
@@ -4653,7 +6109,7 @@
                 </a:solidFill>
                 <a:latin typeface="Inter Tight"/>
               </a:rPr>
-              <a:t>THREE CONVERSATIONS</a:t>
+              <a:t>ANONYMOUS CARDS</a:t>
             </a:r>
           </a:p>
         </p:txBody>
@@ -4699,64 +6155,23 @@
       </p:sp>
       <p:sp>
         <p:nvSpPr>
-          <p:cNvPr id="5" name="TextBox 4"/>
-          <p:cNvSpPr txBox="1"/>
-          <p:nvPr/>
-        </p:nvSpPr>
-        <p:spPr>
-          <a:xfrm>
-            <a:off x="822960" y="1005840"/>
-            <a:ext cx="10515600" cy="914400"/>
-          </a:xfrm>
-          <a:prstGeom prst="rect">
-            <a:avLst/>
-          </a:prstGeom>
-          <a:noFill/>
-        </p:spPr>
-        <p:txBody>
-          <a:bodyPr wrap="square" anchor="t" lIns="0" rIns="0" tIns="0" bIns="0">
-            <a:spAutoFit/>
-          </a:bodyPr>
-          <a:lstStyle/>
-          <a:p>
-            <a:pPr algn="l">
-              <a:spcAft>
-                <a:spcPts val="1530"/>
-              </a:spcAft>
-            </a:pPr>
-            <a:r>
-              <a:rPr sz="3400" b="1" i="0">
-                <a:solidFill>
-                  <a:srgbClr val="1C1B19"/>
-                </a:solidFill>
-                <a:latin typeface="Source Serif 4"/>
-              </a:rPr>
-              <a:t>Which move gets you further?</a:t>
-            </a:r>
-          </a:p>
-        </p:txBody>
-      </p:sp>
-      <p:sp>
-        <p:nvSpPr>
-          <p:cNvPr id="6" name="Rectangle 5"/>
+          <p:cNvPr id="5" name="Rectangle 4"/>
           <p:cNvSpPr/>
           <p:nvPr/>
         </p:nvSpPr>
         <p:spPr>
           <a:xfrm>
-            <a:off x="822960" y="2103120"/>
-            <a:ext cx="3322320" cy="3840480"/>
+            <a:off x="822960" y="1371600"/>
+            <a:ext cx="73152" cy="3566160"/>
           </a:xfrm>
           <a:prstGeom prst="rect">
             <a:avLst/>
           </a:prstGeom>
           <a:solidFill>
-            <a:srgbClr val="FFFFFF"/>
+            <a:srgbClr val="F47B20"/>
           </a:solidFill>
-          <a:ln w="15875">
-            <a:solidFill>
-              <a:srgbClr val="D8D2C6"/>
-            </a:solidFill>
+          <a:ln>
+            <a:noFill/>
           </a:ln>
           <a:effectLst/>
         </p:spPr>
@@ -4784,14 +6199,53 @@
       </p:sp>
       <p:sp>
         <p:nvSpPr>
+          <p:cNvPr id="6" name="TextBox 5"/>
+          <p:cNvSpPr txBox="1"/>
+          <p:nvPr/>
+        </p:nvSpPr>
+        <p:spPr>
+          <a:xfrm>
+            <a:off x="1188720" y="1371600"/>
+            <a:ext cx="10058400" cy="3566160"/>
+          </a:xfrm>
+          <a:prstGeom prst="rect">
+            <a:avLst/>
+          </a:prstGeom>
+          <a:noFill/>
+        </p:spPr>
+        <p:txBody>
+          <a:bodyPr wrap="square" anchor="ctr" lIns="0" rIns="0" tIns="0" bIns="0">
+            <a:spAutoFit/>
+          </a:bodyPr>
+          <a:lstStyle/>
+          <a:p>
+            <a:pPr algn="l">
+              <a:spcAft>
+                <a:spcPts val="1800"/>
+              </a:spcAft>
+            </a:pPr>
+            <a:r>
+              <a:rPr sz="4000" b="0" i="1">
+                <a:solidFill>
+                  <a:srgbClr val="1C1B19"/>
+                </a:solidFill>
+                <a:latin typeface="Source Serif 4"/>
+              </a:rPr>
+              <a:t>What's hardest to bring up with the adults at home?</a:t>
+            </a:r>
+          </a:p>
+        </p:txBody>
+      </p:sp>
+      <p:sp>
+        <p:nvSpPr>
           <p:cNvPr id="7" name="TextBox 6"/>
           <p:cNvSpPr txBox="1"/>
           <p:nvPr/>
         </p:nvSpPr>
         <p:spPr>
           <a:xfrm>
-            <a:off x="1051560" y="2286000"/>
-            <a:ext cx="2865120" cy="365760"/>
+            <a:off x="1188720" y="5120640"/>
+            <a:ext cx="10058400" cy="914400"/>
           </a:xfrm>
           <a:prstGeom prst="rect">
             <a:avLst/>
@@ -4806,304 +6260,17 @@
           <a:p>
             <a:pPr algn="l">
               <a:spcAft>
-                <a:spcPts val="585"/>
-              </a:spcAft>
-            </a:pPr>
-            <a:r>
-              <a:rPr sz="1300" b="1" i="0">
-                <a:solidFill>
-                  <a:srgbClr val="0B2D5B"/>
+                <a:spcPts val="810"/>
+              </a:spcAft>
+            </a:pPr>
+            <a:r>
+              <a:rPr sz="1800" b="0" i="0">
+                <a:solidFill>
+                  <a:srgbClr val="5D5A54"/>
                 </a:solidFill>
                 <a:latin typeface="Inter Tight"/>
               </a:rPr>
-              <a:t>TARIQ</a:t>
-            </a:r>
-          </a:p>
-        </p:txBody>
-      </p:sp>
-      <p:sp>
-        <p:nvSpPr>
-          <p:cNvPr id="8" name="TextBox 7"/>
-          <p:cNvSpPr txBox="1"/>
-          <p:nvPr/>
-        </p:nvSpPr>
-        <p:spPr>
-          <a:xfrm>
-            <a:off x="1051560" y="2743200"/>
-            <a:ext cx="2865120" cy="3017520"/>
-          </a:xfrm>
-          <a:prstGeom prst="rect">
-            <a:avLst/>
-          </a:prstGeom>
-          <a:noFill/>
-        </p:spPr>
-        <p:txBody>
-          <a:bodyPr wrap="square" anchor="t" lIns="0" rIns="0" tIns="0" bIns="0">
-            <a:spAutoFit/>
-          </a:bodyPr>
-          <a:lstStyle/>
-          <a:p>
-            <a:pPr algn="l">
-              <a:spcAft>
-                <a:spcPts val="810"/>
-              </a:spcAft>
-            </a:pPr>
-            <a:r>
-              <a:rPr sz="1800" b="0" i="0">
-                <a:solidFill>
-                  <a:srgbClr val="1C1B19"/>
-                </a:solidFill>
-                <a:latin typeface="Source Serif 4"/>
-              </a:rPr>
-              <a:t>Wants to go to a concert two hours away with friends. His parents say no before he finishes.</a:t>
-            </a:r>
-          </a:p>
-        </p:txBody>
-      </p:sp>
-      <p:sp>
-        <p:nvSpPr>
-          <p:cNvPr id="9" name="Rectangle 8"/>
-          <p:cNvSpPr/>
-          <p:nvPr/>
-        </p:nvSpPr>
-        <p:spPr>
-          <a:xfrm>
-            <a:off x="4419600" y="2103120"/>
-            <a:ext cx="3322320" cy="3840480"/>
-          </a:xfrm>
-          <a:prstGeom prst="rect">
-            <a:avLst/>
-          </a:prstGeom>
-          <a:solidFill>
-            <a:srgbClr val="FFFFFF"/>
-          </a:solidFill>
-          <a:ln w="15875">
-            <a:solidFill>
-              <a:srgbClr val="D8D2C6"/>
-            </a:solidFill>
-          </a:ln>
-          <a:effectLst/>
-        </p:spPr>
-        <p:style>
-          <a:lnRef idx="1">
-            <a:schemeClr val="accent1"/>
-          </a:lnRef>
-          <a:fillRef idx="3">
-            <a:schemeClr val="accent1"/>
-          </a:fillRef>
-          <a:effectRef idx="2">
-            <a:schemeClr val="accent1"/>
-          </a:effectRef>
-          <a:fontRef idx="minor">
-            <a:schemeClr val="lt1"/>
-          </a:fontRef>
-        </p:style>
-        <p:txBody>
-          <a:bodyPr rtlCol="0" anchor="ctr"/>
-          <a:lstStyle/>
-          <a:p>
-            <a:pPr algn="ctr"/>
-          </a:p>
-        </p:txBody>
-      </p:sp>
-      <p:sp>
-        <p:nvSpPr>
-          <p:cNvPr id="10" name="TextBox 9"/>
-          <p:cNvSpPr txBox="1"/>
-          <p:nvPr/>
-        </p:nvSpPr>
-        <p:spPr>
-          <a:xfrm>
-            <a:off x="4648200" y="2286000"/>
-            <a:ext cx="2865120" cy="365760"/>
-          </a:xfrm>
-          <a:prstGeom prst="rect">
-            <a:avLst/>
-          </a:prstGeom>
-          <a:noFill/>
-        </p:spPr>
-        <p:txBody>
-          <a:bodyPr wrap="square" anchor="t" lIns="0" rIns="0" tIns="0" bIns="0">
-            <a:spAutoFit/>
-          </a:bodyPr>
-          <a:lstStyle/>
-          <a:p>
-            <a:pPr algn="l">
-              <a:spcAft>
-                <a:spcPts val="585"/>
-              </a:spcAft>
-            </a:pPr>
-            <a:r>
-              <a:rPr sz="1300" b="1" i="0">
-                <a:solidFill>
-                  <a:srgbClr val="0B2D5B"/>
-                </a:solidFill>
-                <a:latin typeface="Inter Tight"/>
-              </a:rPr>
-              <a:t>PRIYA</a:t>
-            </a:r>
-          </a:p>
-        </p:txBody>
-      </p:sp>
-      <p:sp>
-        <p:nvSpPr>
-          <p:cNvPr id="11" name="TextBox 10"/>
-          <p:cNvSpPr txBox="1"/>
-          <p:nvPr/>
-        </p:nvSpPr>
-        <p:spPr>
-          <a:xfrm>
-            <a:off x="4648200" y="2743200"/>
-            <a:ext cx="2865120" cy="3017520"/>
-          </a:xfrm>
-          <a:prstGeom prst="rect">
-            <a:avLst/>
-          </a:prstGeom>
-          <a:noFill/>
-        </p:spPr>
-        <p:txBody>
-          <a:bodyPr wrap="square" anchor="t" lIns="0" rIns="0" tIns="0" bIns="0">
-            <a:spAutoFit/>
-          </a:bodyPr>
-          <a:lstStyle/>
-          <a:p>
-            <a:pPr algn="l">
-              <a:spcAft>
-                <a:spcPts val="810"/>
-              </a:spcAft>
-            </a:pPr>
-            <a:r>
-              <a:rPr sz="1800" b="0" i="0">
-                <a:solidFill>
-                  <a:srgbClr val="1C1B19"/>
-                </a:solidFill>
-                <a:latin typeface="Source Serif 4"/>
-              </a:rPr>
-              <a:t>Her grandmother, who she lives with, texts: "Why are you at Jordan's? You said the library."</a:t>
-            </a:r>
-          </a:p>
-        </p:txBody>
-      </p:sp>
-      <p:sp>
-        <p:nvSpPr>
-          <p:cNvPr id="12" name="Rectangle 11"/>
-          <p:cNvSpPr/>
-          <p:nvPr/>
-        </p:nvSpPr>
-        <p:spPr>
-          <a:xfrm>
-            <a:off x="8016239" y="2103120"/>
-            <a:ext cx="3322320" cy="3840480"/>
-          </a:xfrm>
-          <a:prstGeom prst="rect">
-            <a:avLst/>
-          </a:prstGeom>
-          <a:solidFill>
-            <a:srgbClr val="FFFFFF"/>
-          </a:solidFill>
-          <a:ln w="15875">
-            <a:solidFill>
-              <a:srgbClr val="D8D2C6"/>
-            </a:solidFill>
-          </a:ln>
-          <a:effectLst/>
-        </p:spPr>
-        <p:style>
-          <a:lnRef idx="1">
-            <a:schemeClr val="accent1"/>
-          </a:lnRef>
-          <a:fillRef idx="3">
-            <a:schemeClr val="accent1"/>
-          </a:fillRef>
-          <a:effectRef idx="2">
-            <a:schemeClr val="accent1"/>
-          </a:effectRef>
-          <a:fontRef idx="minor">
-            <a:schemeClr val="lt1"/>
-          </a:fontRef>
-        </p:style>
-        <p:txBody>
-          <a:bodyPr rtlCol="0" anchor="ctr"/>
-          <a:lstStyle/>
-          <a:p>
-            <a:pPr algn="ctr"/>
-          </a:p>
-        </p:txBody>
-      </p:sp>
-      <p:sp>
-        <p:nvSpPr>
-          <p:cNvPr id="13" name="TextBox 12"/>
-          <p:cNvSpPr txBox="1"/>
-          <p:nvPr/>
-        </p:nvSpPr>
-        <p:spPr>
-          <a:xfrm>
-            <a:off x="8244839" y="2286000"/>
-            <a:ext cx="2865120" cy="365760"/>
-          </a:xfrm>
-          <a:prstGeom prst="rect">
-            <a:avLst/>
-          </a:prstGeom>
-          <a:noFill/>
-        </p:spPr>
-        <p:txBody>
-          <a:bodyPr wrap="square" anchor="t" lIns="0" rIns="0" tIns="0" bIns="0">
-            <a:spAutoFit/>
-          </a:bodyPr>
-          <a:lstStyle/>
-          <a:p>
-            <a:pPr algn="l">
-              <a:spcAft>
-                <a:spcPts val="585"/>
-              </a:spcAft>
-            </a:pPr>
-            <a:r>
-              <a:rPr sz="1300" b="1" i="0">
-                <a:solidFill>
-                  <a:srgbClr val="0B2D5B"/>
-                </a:solidFill>
-                <a:latin typeface="Inter Tight"/>
-              </a:rPr>
-              <a:t>DIEGO</a:t>
-            </a:r>
-          </a:p>
-        </p:txBody>
-      </p:sp>
-      <p:sp>
-        <p:nvSpPr>
-          <p:cNvPr id="14" name="TextBox 13"/>
-          <p:cNvSpPr txBox="1"/>
-          <p:nvPr/>
-        </p:nvSpPr>
-        <p:spPr>
-          <a:xfrm>
-            <a:off x="8244839" y="2743200"/>
-            <a:ext cx="2865120" cy="3017520"/>
-          </a:xfrm>
-          <a:prstGeom prst="rect">
-            <a:avLst/>
-          </a:prstGeom>
-          <a:noFill/>
-        </p:spPr>
-        <p:txBody>
-          <a:bodyPr wrap="square" anchor="t" lIns="0" rIns="0" tIns="0" bIns="0">
-            <a:spAutoFit/>
-          </a:bodyPr>
-          <a:lstStyle/>
-          <a:p>
-            <a:pPr algn="l">
-              <a:spcAft>
-                <a:spcPts val="810"/>
-              </a:spcAft>
-            </a:pPr>
-            <a:r>
-              <a:rPr sz="1800" b="0" i="0">
-                <a:solidFill>
-                  <a:srgbClr val="1C1B19"/>
-                </a:solidFill>
-                <a:latin typeface="Source Serif 4"/>
-              </a:rPr>
-              <a:t>Has felt really low for weeks. He wants to tell his dad, who jumps straight to fixing things.</a:t>
+              <a:t>Write one: permission, something serious, school or the future, money, or something else. Fold it. No names.</a:t>
             </a:r>
           </a:p>
         </p:txBody>
@@ -5116,7 +6283,7 @@
 </p:sld>
 </file>
 
-<file path=ppt/slides/slide11.xml><?xml version="1.0" encoding="utf-8"?>
+<file path=ppt/slides/slide4.xml><?xml version="1.0" encoding="utf-8"?>
 <p:sld xmlns:a="http://schemas.openxmlformats.org/drawingml/2006/main" xmlns:p="http://schemas.openxmlformats.org/presentationml/2006/main" xmlns:r="http://schemas.openxmlformats.org/officeDocument/2006/relationships">
   <p:cSld>
     <p:bg>
@@ -5212,7 +6379,7 @@
                 </a:solidFill>
                 <a:latin typeface="Inter Tight"/>
               </a:rPr>
-              <a:t>BEFORE YOU GO</a:t>
+              <a:t>FREEDOM RUNS ON INFORMATION</a:t>
             </a:r>
           </a:p>
         </p:txBody>
@@ -5264,7 +6431,7 @@
         </p:nvSpPr>
         <p:spPr>
           <a:xfrm>
-            <a:off x="822960" y="1188720"/>
+            <a:off x="822960" y="1005840"/>
             <a:ext cx="10515600" cy="914400"/>
           </a:xfrm>
           <a:prstGeom prst="rect">
@@ -5280,70 +6447,31 @@
           <a:p>
             <a:pPr algn="l">
               <a:spcAft>
-                <a:spcPts val="1620"/>
-              </a:spcAft>
-            </a:pPr>
-            <a:r>
-              <a:rPr sz="3600" b="1" i="0">
+                <a:spcPts val="1530"/>
+              </a:spcAft>
+            </a:pPr>
+            <a:r>
+              <a:rPr sz="3400" b="1" i="0">
                 <a:solidFill>
                   <a:srgbClr val="1C1B19"/>
                 </a:solidFill>
                 <a:latin typeface="Source Serif 4"/>
               </a:rPr>
-              <a:t>Plan one conversation.</a:t>
-            </a:r>
-          </a:p>
-        </p:txBody>
-      </p:sp>
-      <p:sp>
-        <p:nvSpPr>
-          <p:cNvPr id="6" name="TextBox 5"/>
-          <p:cNvSpPr txBox="1"/>
-          <p:nvPr/>
-        </p:nvSpPr>
-        <p:spPr>
-          <a:xfrm>
-            <a:off x="822960" y="2286000"/>
-            <a:ext cx="10515600" cy="1463040"/>
-          </a:xfrm>
-          <a:prstGeom prst="rect">
-            <a:avLst/>
-          </a:prstGeom>
-          <a:noFill/>
-        </p:spPr>
-        <p:txBody>
-          <a:bodyPr wrap="square" anchor="t" lIns="0" rIns="0" tIns="0" bIns="0">
-            <a:spAutoFit/>
-          </a:bodyPr>
-          <a:lstStyle/>
-          <a:p>
-            <a:pPr algn="l">
-              <a:spcAft>
-                <a:spcPts val="1080"/>
-              </a:spcAft>
-            </a:pPr>
-            <a:r>
-              <a:rPr sz="2400" b="0" i="0">
-                <a:solidFill>
-                  <a:srgbClr val="1C1B19"/>
-                </a:solidFill>
-                <a:latin typeface="Source Serif 4"/>
-              </a:rPr>
-              <a:t>What you want from it, when you'll say it, and the worry you'll answer first. Write it for yourself.</a:t>
-            </a:r>
-          </a:p>
-        </p:txBody>
-      </p:sp>
-      <p:sp>
-        <p:nvSpPr>
-          <p:cNvPr id="7" name="Rectangle 6"/>
+              <a:t>Two loops most families move between</a:t>
+            </a:r>
+          </a:p>
+        </p:txBody>
+      </p:sp>
+      <p:sp>
+        <p:nvSpPr>
+          <p:cNvPr id="6" name="Rectangle 5"/>
           <p:cNvSpPr/>
           <p:nvPr/>
         </p:nvSpPr>
         <p:spPr>
           <a:xfrm>
-            <a:off x="822960" y="4023360"/>
-            <a:ext cx="10515600" cy="1371600"/>
+            <a:off x="822960" y="2103120"/>
+            <a:ext cx="5120640" cy="3931920"/>
           </a:xfrm>
           <a:prstGeom prst="rect">
             <a:avLst/>
@@ -5353,7 +6481,7 @@
           </a:solidFill>
           <a:ln w="15875">
             <a:solidFill>
-              <a:srgbClr val="1C1B19"/>
+              <a:srgbClr val="D8D2C6"/>
             </a:solidFill>
           </a:ln>
           <a:effectLst/>
@@ -5382,14 +6510,53 @@
       </p:sp>
       <p:sp>
         <p:nvSpPr>
+          <p:cNvPr id="7" name="TextBox 6"/>
+          <p:cNvSpPr txBox="1"/>
+          <p:nvPr/>
+        </p:nvSpPr>
+        <p:spPr>
+          <a:xfrm>
+            <a:off x="1097280" y="2286000"/>
+            <a:ext cx="4572000" cy="457200"/>
+          </a:xfrm>
+          <a:prstGeom prst="rect">
+            <a:avLst/>
+          </a:prstGeom>
+          <a:noFill/>
+        </p:spPr>
+        <p:txBody>
+          <a:bodyPr wrap="square" anchor="t" lIns="0" rIns="0" tIns="0" bIns="0">
+            <a:spAutoFit/>
+          </a:bodyPr>
+          <a:lstStyle/>
+          <a:p>
+            <a:pPr algn="l">
+              <a:spcAft>
+                <a:spcPts val="585"/>
+              </a:spcAft>
+            </a:pPr>
+            <a:r>
+              <a:rPr sz="1300" b="1" i="0">
+                <a:solidFill>
+                  <a:srgbClr val="0B2D5B"/>
+                </a:solidFill>
+                <a:latin typeface="Inter Tight"/>
+              </a:rPr>
+              <a:t>THE TRUST LOOP</a:t>
+            </a:r>
+          </a:p>
+        </p:txBody>
+      </p:sp>
+      <p:sp>
+        <p:nvSpPr>
           <p:cNvPr id="8" name="TextBox 7"/>
           <p:cNvSpPr txBox="1"/>
           <p:nvPr/>
         </p:nvSpPr>
         <p:spPr>
           <a:xfrm>
-            <a:off x="1097280" y="4206240"/>
-            <a:ext cx="10058400" cy="365760"/>
+            <a:off x="1097280" y="2788920"/>
+            <a:ext cx="4572000" cy="3108960"/>
           </a:xfrm>
           <a:prstGeom prst="rect">
             <a:avLst/>
@@ -5404,105 +6571,90 @@
           <a:p>
             <a:pPr algn="l">
               <a:spcAft>
-                <a:spcPts val="540"/>
-              </a:spcAft>
-            </a:pPr>
-            <a:r>
-              <a:rPr sz="1200" b="1" i="0">
-                <a:solidFill>
-                  <a:srgbClr val="0B2D5B"/>
-                </a:solidFill>
-                <a:latin typeface="Inter Tight"/>
-              </a:rPr>
-              <a:t>STUDENT PAGE</a:t>
-            </a:r>
-          </a:p>
-        </p:txBody>
-      </p:sp>
-      <p:sp>
-        <p:nvSpPr>
-          <p:cNvPr id="9" name="TextBox 8"/>
-          <p:cNvSpPr txBox="1"/>
-          <p:nvPr/>
-        </p:nvSpPr>
-        <p:spPr>
-          <a:xfrm>
-            <a:off x="1097280" y="4617720"/>
-            <a:ext cx="10058400" cy="640080"/>
-          </a:xfrm>
-          <a:prstGeom prst="rect">
-            <a:avLst/>
-          </a:prstGeom>
-          <a:noFill/>
-        </p:spPr>
-        <p:txBody>
-          <a:bodyPr wrap="square" anchor="t" lIns="0" rIns="0" tIns="0" bIns="0">
-            <a:spAutoFit/>
-          </a:bodyPr>
-          <a:lstStyle/>
-          <a:p>
-            <a:pPr algn="l">
-              <a:spcAft>
-                <a:spcPts val="900"/>
-              </a:spcAft>
-            </a:pPr>
-            <a:r>
-              <a:rPr sz="2000" b="0" i="0">
+                <a:spcPts val="855"/>
+              </a:spcAft>
+            </a:pPr>
+            <a:r>
+              <a:rPr sz="1900" b="0" i="0">
                 <a:solidFill>
                   <a:srgbClr val="1C1B19"/>
                 </a:solidFill>
-                <a:latin typeface="Inter Tight"/>
-              </a:rPr>
-              <a:t>https://rmwtoolkit.github.io/bcds-toolkit/talking-to-your-parents-high-school.html</a:t>
-            </a:r>
-          </a:p>
-        </p:txBody>
-      </p:sp>
-    </p:spTree>
-  </p:cSld>
-  <p:clrMapOvr>
-    <a:masterClrMapping/>
-  </p:clrMapOvr>
-</p:sld>
-</file>
-
-<file path=ppt/slides/slide2.xml><?xml version="1.0" encoding="utf-8"?>
-<p:sld xmlns:a="http://schemas.openxmlformats.org/drawingml/2006/main" xmlns:p="http://schemas.openxmlformats.org/presentationml/2006/main" xmlns:r="http://schemas.openxmlformats.org/officeDocument/2006/relationships" show="0">
-  <p:cSld>
-    <p:bg>
-      <p:bgPr>
-        <a:solidFill>
-          <a:srgbClr val="EEEBE4"/>
-        </a:solidFill>
-        <a:effectLst/>
-      </p:bgPr>
-    </p:bg>
-    <p:spTree>
-      <p:nvGrpSpPr>
-        <p:cNvPr id="1" name=""/>
-        <p:cNvGrpSpPr/>
-        <p:nvPr/>
-      </p:nvGrpSpPr>
-      <p:grpSpPr/>
-      <p:sp>
-        <p:nvSpPr>
-          <p:cNvPr id="2" name="Rectangle 1"/>
+                <a:latin typeface="Source Serif 4"/>
+              </a:rPr>
+              <a:t>You tell them some things</a:t>
+            </a:r>
+          </a:p>
+          <a:p>
+            <a:pPr algn="l">
+              <a:spcAft>
+                <a:spcPts val="855"/>
+              </a:spcAft>
+            </a:pPr>
+            <a:r>
+              <a:rPr sz="1900" b="0" i="0">
+                <a:solidFill>
+                  <a:srgbClr val="1C1B19"/>
+                </a:solidFill>
+                <a:latin typeface="Source Serif 4"/>
+              </a:rPr>
+              <a:t>They know more</a:t>
+            </a:r>
+          </a:p>
+          <a:p>
+            <a:pPr algn="l">
+              <a:spcAft>
+                <a:spcPts val="855"/>
+              </a:spcAft>
+            </a:pPr>
+            <a:r>
+              <a:rPr sz="1900" b="0" i="0">
+                <a:solidFill>
+                  <a:srgbClr val="1C1B19"/>
+                </a:solidFill>
+                <a:latin typeface="Source Serif 4"/>
+              </a:rPr>
+              <a:t>They worry less</a:t>
+            </a:r>
+          </a:p>
+          <a:p>
+            <a:pPr algn="l">
+              <a:spcAft>
+                <a:spcPts val="855"/>
+              </a:spcAft>
+            </a:pPr>
+            <a:r>
+              <a:rPr sz="1900" b="0" i="0">
+                <a:solidFill>
+                  <a:srgbClr val="1C1B19"/>
+                </a:solidFill>
+                <a:latin typeface="Source Serif 4"/>
+              </a:rPr>
+              <a:t>You get more room</a:t>
+            </a:r>
+          </a:p>
+        </p:txBody>
+      </p:sp>
+      <p:sp>
+        <p:nvSpPr>
+          <p:cNvPr id="9" name="Rectangle 8"/>
           <p:cNvSpPr/>
           <p:nvPr/>
         </p:nvSpPr>
         <p:spPr>
           <a:xfrm>
-            <a:off x="0" y="0"/>
-            <a:ext cx="12191695" cy="384048"/>
+            <a:off x="6309360" y="2103120"/>
+            <a:ext cx="5120640" cy="3931920"/>
           </a:xfrm>
           <a:prstGeom prst="rect">
             <a:avLst/>
           </a:prstGeom>
           <a:solidFill>
-            <a:srgbClr val="0B2D5B"/>
+            <a:srgbClr val="FFFFFF"/>
           </a:solidFill>
-          <a:ln>
-            <a:noFill/>
+          <a:ln w="15875">
+            <a:solidFill>
+              <a:srgbClr val="D8D2C6"/>
+            </a:solidFill>
           </a:ln>
           <a:effectLst/>
         </p:spPr>
@@ -5530,14 +6682,14 @@
       </p:sp>
       <p:sp>
         <p:nvSpPr>
-          <p:cNvPr id="3" name="TextBox 2"/>
+          <p:cNvPr id="10" name="TextBox 9"/>
           <p:cNvSpPr txBox="1"/>
           <p:nvPr/>
         </p:nvSpPr>
         <p:spPr>
           <a:xfrm>
-            <a:off x="548640" y="100584"/>
-            <a:ext cx="10972800" cy="274320"/>
+            <a:off x="6583680" y="2286000"/>
+            <a:ext cx="4572000" cy="457200"/>
           </a:xfrm>
           <a:prstGeom prst="rect">
             <a:avLst/>
@@ -5552,31 +6704,31 @@
           <a:p>
             <a:pPr algn="l">
               <a:spcAft>
-                <a:spcPts val="495"/>
-              </a:spcAft>
-            </a:pPr>
-            <a:r>
-              <a:rPr sz="1100" b="1" i="0">
-                <a:solidFill>
-                  <a:srgbClr val="FFFFFF"/>
+                <a:spcPts val="585"/>
+              </a:spcAft>
+            </a:pPr>
+            <a:r>
+              <a:rPr sz="1300" b="1" i="0">
+                <a:solidFill>
+                  <a:srgbClr val="0B2D5B"/>
                 </a:solidFill>
                 <a:latin typeface="Inter Tight"/>
               </a:rPr>
-              <a:t>TEACHER PAGE  ·  skipped when you present  ·  Before you teach</a:t>
-            </a:r>
-          </a:p>
-        </p:txBody>
-      </p:sp>
-      <p:sp>
-        <p:nvSpPr>
-          <p:cNvPr id="4" name="TextBox 3"/>
+              <a:t>THE WORRY LOOP</a:t>
+            </a:r>
+          </a:p>
+        </p:txBody>
+      </p:sp>
+      <p:sp>
+        <p:nvSpPr>
+          <p:cNvPr id="11" name="TextBox 10"/>
           <p:cNvSpPr txBox="1"/>
           <p:nvPr/>
         </p:nvSpPr>
         <p:spPr>
           <a:xfrm>
-            <a:off x="548640" y="685800"/>
-            <a:ext cx="10972800" cy="640080"/>
+            <a:off x="6583680" y="2788920"/>
+            <a:ext cx="4572000" cy="3108960"/>
           </a:xfrm>
           <a:prstGeom prst="rect">
             <a:avLst/>
@@ -5591,351 +6743,65 @@
           <a:p>
             <a:pPr algn="l">
               <a:spcAft>
-                <a:spcPts val="1350"/>
-              </a:spcAft>
-            </a:pPr>
-            <a:r>
-              <a:rPr sz="3000" b="1" i="0">
+                <a:spcPts val="855"/>
+              </a:spcAft>
+            </a:pPr>
+            <a:r>
+              <a:rPr sz="1900" b="0" i="0">
                 <a:solidFill>
                   <a:srgbClr val="1C1B19"/>
                 </a:solidFill>
                 <a:latin typeface="Source Serif 4"/>
               </a:rPr>
-              <a:t>Before you teach</a:t>
-            </a:r>
-          </a:p>
-        </p:txBody>
-      </p:sp>
-      <p:sp>
-        <p:nvSpPr>
-          <p:cNvPr id="5" name="TextBox 4"/>
-          <p:cNvSpPr txBox="1"/>
-          <p:nvPr/>
-        </p:nvSpPr>
-        <p:spPr>
-          <a:xfrm>
-            <a:off x="548640" y="1463040"/>
-            <a:ext cx="5394960" cy="4937760"/>
-          </a:xfrm>
-          <a:prstGeom prst="rect">
-            <a:avLst/>
-          </a:prstGeom>
-          <a:noFill/>
-        </p:spPr>
-        <p:txBody>
-          <a:bodyPr wrap="square" anchor="t" lIns="0" rIns="0" tIns="0" bIns="0">
-            <a:spAutoFit/>
-          </a:bodyPr>
-          <a:lstStyle/>
-          <a:p>
-            <a:pPr algn="l">
-              <a:spcAft>
-                <a:spcPts val="585"/>
-              </a:spcAft>
-            </a:pPr>
-            <a:r>
-              <a:rPr sz="1500" b="1" i="0">
+              <a:t>They don't know</a:t>
+            </a:r>
+          </a:p>
+          <a:p>
+            <a:pPr algn="l">
+              <a:spcAft>
+                <a:spcPts val="855"/>
+              </a:spcAft>
+            </a:pPr>
+            <a:r>
+              <a:rPr sz="1900" b="0" i="0">
                 <a:solidFill>
                   <a:srgbClr val="1C1B19"/>
                 </a:solidFill>
                 <a:latin typeface="Source Serif 4"/>
               </a:rPr>
-              <a:t>Not every home is safe.</a:t>
-            </a:r>
-          </a:p>
-          <a:p>
-            <a:pPr algn="l">
-              <a:spcAft>
-                <a:spcPts val="585"/>
-              </a:spcAft>
-            </a:pPr>
-            <a:r>
-              <a:rPr sz="1300" b="0" i="0">
+              <a:t>They fill in worst cases</a:t>
+            </a:r>
+          </a:p>
+          <a:p>
+            <a:pPr algn="l">
+              <a:spcAft>
+                <a:spcPts val="855"/>
+              </a:spcAft>
+            </a:pPr>
+            <a:r>
+              <a:rPr sz="1900" b="0" i="0">
                 <a:solidFill>
                   <a:srgbClr val="1C1B19"/>
                 </a:solidFill>
                 <a:latin typeface="Source Serif 4"/>
               </a:rPr>
-              <a:t>Never ask students to describe fights at home. If a student hints that home isn't safe (threats, someone getting hurt, being afraid to go home), thank them, take it out of the circle, and bring in a counselor that day. Know Beaver's reporting protocol before advisory. Childhelp answers at 1-800-422-4453 any time, and 911 is for emergencies.</a:t>
-            </a:r>
-          </a:p>
-          <a:p>
-            <a:pPr algn="l">
-              <a:spcAft>
-                <a:spcPts val="585"/>
-              </a:spcAft>
-            </a:pPr>
-            <a:r>
-              <a:rPr sz="1300" b="0" i="0">
+              <a:t>Tighter rules</a:t>
+            </a:r>
+          </a:p>
+          <a:p>
+            <a:pPr algn="l">
+              <a:spcAft>
+                <a:spcPts val="855"/>
+              </a:spcAft>
+            </a:pPr>
+            <a:r>
+              <a:rPr sz="1900" b="0" i="0">
                 <a:solidFill>
                   <a:srgbClr val="1C1B19"/>
                 </a:solidFill>
                 <a:latin typeface="Source Serif 4"/>
               </a:rPr>
-              <a:t/>
-            </a:r>
-          </a:p>
-          <a:p>
-            <a:pPr algn="l">
-              <a:spcAft>
-                <a:spcPts val="585"/>
-              </a:spcAft>
-            </a:pPr>
-            <a:r>
-              <a:rPr sz="1500" b="1" i="0">
-                <a:solidFill>
-                  <a:srgbClr val="1C1B19"/>
-                </a:solidFill>
-                <a:latin typeface="Source Serif 4"/>
-              </a:rPr>
-              <a:t>Say "the adults at home."</a:t>
-            </a:r>
-          </a:p>
-          <a:p>
-            <a:pPr algn="l">
-              <a:spcAft>
-                <a:spcPts val="585"/>
-              </a:spcAft>
-            </a:pPr>
-            <a:r>
-              <a:rPr sz="1300" b="0" i="0">
-                <a:solidFill>
-                  <a:srgbClr val="1C1B19"/>
-                </a:solidFill>
-                <a:latin typeface="Source Serif 4"/>
-              </a:rPr>
-              <a:t>Students live with one parent, two moms or two dads, grandparents, aunts or uncles, foster parents, older siblings, or between two homes. Some have a parent who is away or has died. Use "the adults at home" or "whoever is raising you," and avoid "your mom and dad."</a:t>
-            </a:r>
-          </a:p>
-          <a:p>
-            <a:pPr algn="l">
-              <a:spcAft>
-                <a:spcPts val="585"/>
-              </a:spcAft>
-            </a:pPr>
-            <a:r>
-              <a:rPr sz="1300" b="0" i="0">
-                <a:solidFill>
-                  <a:srgbClr val="1C1B19"/>
-                </a:solidFill>
-                <a:latin typeface="Source Serif 4"/>
-              </a:rPr>
-              <a:t/>
-            </a:r>
-          </a:p>
-          <a:p>
-            <a:pPr algn="l">
-              <a:spcAft>
-                <a:spcPts val="585"/>
-              </a:spcAft>
-            </a:pPr>
-            <a:r>
-              <a:rPr sz="1500" b="1" i="0">
-                <a:solidFill>
-                  <a:srgbClr val="1C1B19"/>
-                </a:solidFill>
-                <a:latin typeface="Source Serif 4"/>
-              </a:rPr>
-              <a:t>Keep the opening card to categories.</a:t>
-            </a:r>
-          </a:p>
-          <a:p>
-            <a:pPr algn="l">
-              <a:spcAft>
-                <a:spcPts val="585"/>
-              </a:spcAft>
-            </a:pPr>
-            <a:r>
-              <a:rPr sz="1300" b="0" i="0">
-                <a:solidFill>
-                  <a:srgbClr val="1C1B19"/>
-                </a:solidFill>
-                <a:latin typeface="Source Serif 4"/>
-              </a:rPr>
-              <a:t>Tally only which kind of conversation is hardest. Don't read anything else aloud. If a card says more, read it privately afterward and follow up with a counselor if it points to something serious.</a:t>
-            </a:r>
-          </a:p>
-          <a:p>
-            <a:pPr algn="l">
-              <a:spcAft>
-                <a:spcPts val="585"/>
-              </a:spcAft>
-            </a:pPr>
-            <a:r>
-              <a:rPr sz="1300" b="0" i="0">
-                <a:solidFill>
-                  <a:srgbClr val="1C1B19"/>
-                </a:solidFill>
-                <a:latin typeface="Source Serif 4"/>
-              </a:rPr>
-              <a:t/>
-            </a:r>
-          </a:p>
-        </p:txBody>
-      </p:sp>
-      <p:sp>
-        <p:nvSpPr>
-          <p:cNvPr id="6" name="TextBox 5"/>
-          <p:cNvSpPr txBox="1"/>
-          <p:nvPr/>
-        </p:nvSpPr>
-        <p:spPr>
-          <a:xfrm>
-            <a:off x="6217920" y="1463040"/>
-            <a:ext cx="5394960" cy="4937760"/>
-          </a:xfrm>
-          <a:prstGeom prst="rect">
-            <a:avLst/>
-          </a:prstGeom>
-          <a:noFill/>
-        </p:spPr>
-        <p:txBody>
-          <a:bodyPr wrap="square" anchor="t" lIns="0" rIns="0" tIns="0" bIns="0">
-            <a:spAutoFit/>
-          </a:bodyPr>
-          <a:lstStyle/>
-          <a:p>
-            <a:pPr algn="l">
-              <a:spcAft>
-                <a:spcPts val="585"/>
-              </a:spcAft>
-            </a:pPr>
-            <a:r>
-              <a:rPr sz="1500" b="1" i="0">
-                <a:solidFill>
-                  <a:srgbClr val="1C1B19"/>
-                </a:solidFill>
-                <a:latin typeface="Source Serif 4"/>
-              </a:rPr>
-              <a:t>Privacy is normal. Safety things need an adult.</a:t>
-            </a:r>
-          </a:p>
-          <a:p>
-            <a:pPr algn="l">
-              <a:spcAft>
-                <a:spcPts val="585"/>
-              </a:spcAft>
-            </a:pPr>
-            <a:r>
-              <a:rPr sz="1300" b="0" i="0">
-                <a:solidFill>
-                  <a:srgbClr val="1C1B19"/>
-                </a:solidFill>
-                <a:latin typeface="Source Serif 4"/>
-              </a:rPr>
-              <a:t>Don't tell students to share everything. Keeping a journal or a group chat private is normal at their age. You or a friend in danger, someone hurting you, or substances are different: those need an adult in the loop, even if it isn't a parent.</a:t>
-            </a:r>
-          </a:p>
-          <a:p>
-            <a:pPr algn="l">
-              <a:spcAft>
-                <a:spcPts val="585"/>
-              </a:spcAft>
-            </a:pPr>
-            <a:r>
-              <a:rPr sz="1300" b="0" i="0">
-                <a:solidFill>
-                  <a:srgbClr val="1C1B19"/>
-                </a:solidFill>
-                <a:latin typeface="Source Serif 4"/>
-              </a:rPr>
-              <a:t/>
-            </a:r>
-          </a:p>
-          <a:p>
-            <a:pPr algn="l">
-              <a:spcAft>
-                <a:spcPts val="585"/>
-              </a:spcAft>
-            </a:pPr>
-            <a:r>
-              <a:rPr sz="1500" b="1" i="0">
-                <a:solidFill>
-                  <a:srgbClr val="1C1B19"/>
-                </a:solidFill>
-                <a:latin typeface="Source Serif 4"/>
-              </a:rPr>
-              <a:t>Don't take sides.</a:t>
-            </a:r>
-          </a:p>
-          <a:p>
-            <a:pPr algn="l">
-              <a:spcAft>
-                <a:spcPts val="585"/>
-              </a:spcAft>
-            </a:pPr>
-            <a:r>
-              <a:rPr sz="1300" b="0" i="0">
-                <a:solidFill>
-                  <a:srgbClr val="1C1B19"/>
-                </a:solidFill>
-                <a:latin typeface="Source Serif 4"/>
-              </a:rPr>
-              <a:t>The lesson isn't about whether anyone's family rules are fair. Keep it on skills students can use. If a student vents about a specific rule, acknowledge it and bring it back to the plan.</a:t>
-            </a:r>
-          </a:p>
-          <a:p>
-            <a:pPr algn="l">
-              <a:spcAft>
-                <a:spcPts val="585"/>
-              </a:spcAft>
-            </a:pPr>
-            <a:r>
-              <a:rPr sz="1300" b="0" i="0">
-                <a:solidFill>
-                  <a:srgbClr val="1C1B19"/>
-                </a:solidFill>
-                <a:latin typeface="Source Serif 4"/>
-              </a:rPr>
-              <a:t/>
-            </a:r>
-          </a:p>
-          <a:p>
-            <a:pPr algn="l">
-              <a:spcAft>
-                <a:spcPts val="585"/>
-              </a:spcAft>
-            </a:pPr>
-            <a:r>
-              <a:rPr sz="1500" b="1" i="0">
-                <a:solidFill>
-                  <a:srgbClr val="1C1B19"/>
-                </a:solidFill>
-                <a:latin typeface="Source Serif 4"/>
-              </a:rPr>
-              <a:t>Diego's scenario is about feeling low.</a:t>
-            </a:r>
-          </a:p>
-          <a:p>
-            <a:pPr algn="l">
-              <a:spcAft>
-                <a:spcPts val="585"/>
-              </a:spcAft>
-            </a:pPr>
-            <a:r>
-              <a:rPr sz="1300" b="0" i="0">
-                <a:solidFill>
-                  <a:srgbClr val="1C1B19"/>
-                </a:solidFill>
-                <a:latin typeface="Source Serif 4"/>
-              </a:rPr>
-              <a:t>Keep the discussion on how he asks to be heard. If a student says it sounds like them, check in privately afterward and bring in a counselor. Don't ask about mood or safety in the circle.</a:t>
-            </a:r>
-          </a:p>
-          <a:p>
-            <a:pPr algn="l">
-              <a:spcAft>
-                <a:spcPts val="585"/>
-              </a:spcAft>
-            </a:pPr>
-            <a:r>
-              <a:rPr sz="1300" b="0" i="0">
-                <a:solidFill>
-                  <a:srgbClr val="1C1B19"/>
-                </a:solidFill>
-                <a:latin typeface="Source Serif 4"/>
-              </a:rPr>
-              <a:t/>
+              <a:t>You share even less</a:t>
             </a:r>
           </a:p>
         </p:txBody>
@@ -5948,13 +6814,13 @@
 </p:sld>
 </file>
 
-<file path=ppt/slides/slide3.xml><?xml version="1.0" encoding="utf-8"?>
-<p:sld xmlns:a="http://schemas.openxmlformats.org/drawingml/2006/main" xmlns:p="http://schemas.openxmlformats.org/presentationml/2006/main" xmlns:r="http://schemas.openxmlformats.org/officeDocument/2006/relationships" show="0">
+<file path=ppt/slides/slide5.xml><?xml version="1.0" encoding="utf-8"?>
+<p:sld xmlns:a="http://schemas.openxmlformats.org/drawingml/2006/main" xmlns:p="http://schemas.openxmlformats.org/presentationml/2006/main" xmlns:r="http://schemas.openxmlformats.org/officeDocument/2006/relationships">
   <p:cSld>
     <p:bg>
       <p:bgPr>
         <a:solidFill>
-          <a:srgbClr val="EEEBE4"/>
+          <a:srgbClr val="F7F4EE"/>
         </a:solidFill>
         <a:effectLst/>
       </p:bgPr>
@@ -5974,14 +6840,14 @@
         </p:nvSpPr>
         <p:spPr>
           <a:xfrm>
-            <a:off x="0" y="0"/>
-            <a:ext cx="12191695" cy="384048"/>
+            <a:off x="548640" y="502920"/>
+            <a:ext cx="457200" cy="54864"/>
           </a:xfrm>
           <a:prstGeom prst="rect">
             <a:avLst/>
           </a:prstGeom>
           <a:solidFill>
-            <a:srgbClr val="0B2D5B"/>
+            <a:srgbClr val="F47B20"/>
           </a:solidFill>
           <a:ln>
             <a:noFill/>
@@ -6018,8 +6884,8 @@
         </p:nvSpPr>
         <p:spPr>
           <a:xfrm>
-            <a:off x="548640" y="100584"/>
-            <a:ext cx="10972800" cy="274320"/>
+            <a:off x="1143000" y="393192"/>
+            <a:ext cx="8229600" cy="274320"/>
           </a:xfrm>
           <a:prstGeom prst="rect">
             <a:avLst/>
@@ -6034,17 +6900,17 @@
           <a:p>
             <a:pPr algn="l">
               <a:spcAft>
-                <a:spcPts val="495"/>
-              </a:spcAft>
-            </a:pPr>
-            <a:r>
-              <a:rPr sz="1100" b="1" i="0">
-                <a:solidFill>
-                  <a:srgbClr val="FFFFFF"/>
+                <a:spcPts val="540"/>
+              </a:spcAft>
+            </a:pPr>
+            <a:r>
+              <a:rPr sz="1200" b="1" i="0">
+                <a:solidFill>
+                  <a:srgbClr val="5D5A54"/>
                 </a:solidFill>
                 <a:latin typeface="Inter Tight"/>
               </a:rPr>
-              <a:t>TEACHER PAGE  ·  skipped when you present  ·  Every student in the room</a:t>
+              <a:t>WHAT'S GOING ON IN BOTH YOUR HEADS</a:t>
             </a:r>
           </a:p>
         </p:txBody>
@@ -6057,8 +6923,8 @@
         </p:nvSpPr>
         <p:spPr>
           <a:xfrm>
-            <a:off x="548640" y="685800"/>
-            <a:ext cx="10972800" cy="640080"/>
+            <a:off x="8229600" y="6400800"/>
+            <a:ext cx="3410712" cy="274320"/>
           </a:xfrm>
           <a:prstGeom prst="rect">
             <a:avLst/>
@@ -6071,19 +6937,19 @@
           </a:bodyPr>
           <a:lstStyle/>
           <a:p>
-            <a:pPr algn="l">
-              <a:spcAft>
-                <a:spcPts val="1350"/>
-              </a:spcAft>
-            </a:pPr>
-            <a:r>
-              <a:rPr sz="3000" b="1" i="0">
-                <a:solidFill>
-                  <a:srgbClr val="1C1B19"/>
-                </a:solidFill>
-                <a:latin typeface="Source Serif 4"/>
-              </a:rPr>
-              <a:t>Every student in the room</a:t>
+            <a:pPr algn="r">
+              <a:spcAft>
+                <a:spcPts val="450"/>
+              </a:spcAft>
+            </a:pPr>
+            <a:r>
+              <a:rPr sz="1000" b="0" i="0">
+                <a:solidFill>
+                  <a:srgbClr val="5D5A54"/>
+                </a:solidFill>
+                <a:latin typeface="Inter Tight"/>
+              </a:rPr>
+              <a:t>Beaver Counseling</a:t>
             </a:r>
           </a:p>
         </p:txBody>
@@ -6096,8 +6962,47 @@
         </p:nvSpPr>
         <p:spPr>
           <a:xfrm>
-            <a:off x="548640" y="1325880"/>
-            <a:ext cx="10972800" cy="365760"/>
+            <a:off x="822960" y="1463040"/>
+            <a:ext cx="10515600" cy="3291840"/>
+          </a:xfrm>
+          <a:prstGeom prst="rect">
+            <a:avLst/>
+          </a:prstGeom>
+          <a:noFill/>
+        </p:spPr>
+        <p:txBody>
+          <a:bodyPr wrap="square" anchor="ctr" lIns="0" rIns="0" tIns="0" bIns="0">
+            <a:spAutoFit/>
+          </a:bodyPr>
+          <a:lstStyle/>
+          <a:p>
+            <a:pPr algn="l">
+              <a:spcAft>
+                <a:spcPts val="2070"/>
+              </a:spcAft>
+            </a:pPr>
+            <a:r>
+              <a:rPr sz="4600" b="1" i="0">
+                <a:solidFill>
+                  <a:srgbClr val="1C1B19"/>
+                </a:solidFill>
+                <a:latin typeface="Source Serif 4"/>
+              </a:rPr>
+              <a:t>Fewer fights. Bigger feelings.</a:t>
+            </a:r>
+          </a:p>
+        </p:txBody>
+      </p:sp>
+      <p:sp>
+        <p:nvSpPr>
+          <p:cNvPr id="6" name="TextBox 5"/>
+          <p:cNvSpPr txBox="1"/>
+          <p:nvPr/>
+        </p:nvSpPr>
+        <p:spPr>
+          <a:xfrm>
+            <a:off x="822960" y="4846320"/>
+            <a:ext cx="10515600" cy="1097280"/>
           </a:xfrm>
           <a:prstGeom prst="rect">
             <a:avLst/>
@@ -6112,1002 +7017,17 @@
           <a:p>
             <a:pPr algn="l">
               <a:spcAft>
-                <a:spcPts val="630"/>
-              </a:spcAft>
-            </a:pPr>
-            <a:r>
-              <a:rPr sz="1400" b="0" i="0">
+                <a:spcPts val="990"/>
+              </a:spcAft>
+            </a:pPr>
+            <a:r>
+              <a:rPr sz="2200" b="0" i="1">
                 <a:solidFill>
                   <a:srgbClr val="5D5A54"/>
                 </a:solidFill>
-                <a:latin typeface="Inter Tight"/>
-              </a:rPr>
-              <a:t>Culture, family, identity, ability and money: what to keep in mind for this topic.</a:t>
-            </a:r>
-          </a:p>
-        </p:txBody>
-      </p:sp>
-      <p:sp>
-        <p:nvSpPr>
-          <p:cNvPr id="6" name="TextBox 5"/>
-          <p:cNvSpPr txBox="1"/>
-          <p:nvPr/>
-        </p:nvSpPr>
-        <p:spPr>
-          <a:xfrm>
-            <a:off x="548640" y="1828800"/>
-            <a:ext cx="5394960" cy="4572000"/>
-          </a:xfrm>
-          <a:prstGeom prst="rect">
-            <a:avLst/>
-          </a:prstGeom>
-          <a:noFill/>
-        </p:spPr>
-        <p:txBody>
-          <a:bodyPr wrap="square" anchor="t" lIns="0" rIns="0" tIns="0" bIns="0">
-            <a:spAutoFit/>
-          </a:bodyPr>
-          <a:lstStyle/>
-          <a:p>
-            <a:pPr algn="l">
-              <a:spcAft>
-                <a:spcPts val="585"/>
-              </a:spcAft>
-            </a:pPr>
-            <a:r>
-              <a:rPr sz="1500" b="1" i="0">
-                <a:solidFill>
-                  <a:srgbClr val="1C1B19"/>
-                </a:solidFill>
                 <a:latin typeface="Source Serif 4"/>
               </a:rPr>
-              <a:t>Family structure.</a:t>
-            </a:r>
-          </a:p>
-          <a:p>
-            <a:pPr algn="l">
-              <a:spcAft>
-                <a:spcPts val="585"/>
-              </a:spcAft>
-            </a:pPr>
-            <a:r>
-              <a:rPr sz="1300" b="0" i="0">
-                <a:solidFill>
-                  <a:srgbClr val="1C1B19"/>
-                </a:solidFill>
-                <a:latin typeface="Source Serif 4"/>
-              </a:rPr>
-              <a:t>Scenarios include parents, a grandmother and a single dad on purpose. When you talk it through, say "the adults at home." A student who splits time between two homes may be negotiating with two sets of rules at once.</a:t>
-            </a:r>
-          </a:p>
-          <a:p>
-            <a:pPr algn="l">
-              <a:spcAft>
-                <a:spcPts val="585"/>
-              </a:spcAft>
-            </a:pPr>
-            <a:r>
-              <a:rPr sz="1300" b="0" i="0">
-                <a:solidFill>
-                  <a:srgbClr val="1C1B19"/>
-                </a:solidFill>
-                <a:latin typeface="Source Serif 4"/>
-              </a:rPr>
-              <a:t/>
-            </a:r>
-          </a:p>
-          <a:p>
-            <a:pPr algn="l">
-              <a:spcAft>
-                <a:spcPts val="585"/>
-              </a:spcAft>
-            </a:pPr>
-            <a:r>
-              <a:rPr sz="1500" b="1" i="0">
-                <a:solidFill>
-                  <a:srgbClr val="1C1B19"/>
-                </a:solidFill>
-                <a:latin typeface="Source Serif 4"/>
-              </a:rPr>
-              <a:t>Families differ in how much teens negotiate.</a:t>
-            </a:r>
-          </a:p>
-          <a:p>
-            <a:pPr algn="l">
-              <a:spcAft>
-                <a:spcPts val="585"/>
-              </a:spcAft>
-            </a:pPr>
-            <a:r>
-              <a:rPr sz="1300" b="0" i="0">
-                <a:solidFill>
-                  <a:srgbClr val="1C1B19"/>
-                </a:solidFill>
-                <a:latin typeface="Source Serif 4"/>
-              </a:rPr>
-              <a:t>Some families expect teens to speak up and argue their case. In others, arguing back reads as disrespect, and asks go better through tone, timing, or a trusted relative. Neither is wrong. Ask students what works in their own family, privately. Avoid "In X families" generalizations.</a:t>
-            </a:r>
-          </a:p>
-          <a:p>
-            <a:pPr algn="l">
-              <a:spcAft>
-                <a:spcPts val="585"/>
-              </a:spcAft>
-            </a:pPr>
-            <a:r>
-              <a:rPr sz="1300" b="0" i="0">
-                <a:solidFill>
-                  <a:srgbClr val="1C1B19"/>
-                </a:solidFill>
-                <a:latin typeface="Source Serif 4"/>
-              </a:rPr>
-              <a:t/>
-            </a:r>
-          </a:p>
-          <a:p>
-            <a:pPr algn="l">
-              <a:spcAft>
-                <a:spcPts val="585"/>
-              </a:spcAft>
-            </a:pPr>
-            <a:r>
-              <a:rPr sz="1500" b="1" i="0">
-                <a:solidFill>
-                  <a:srgbClr val="1C1B19"/>
-                </a:solidFill>
-                <a:latin typeface="Source Serif 4"/>
-              </a:rPr>
-              <a:t>Different countries, different languages.</a:t>
-            </a:r>
-          </a:p>
-          <a:p>
-            <a:pPr algn="l">
-              <a:spcAft>
-                <a:spcPts val="585"/>
-              </a:spcAft>
-            </a:pPr>
-            <a:r>
-              <a:rPr sz="1300" b="0" i="0">
-                <a:solidFill>
-                  <a:srgbClr val="1C1B19"/>
-                </a:solidFill>
-                <a:latin typeface="Source Serif 4"/>
-              </a:rPr>
-              <a:t>Some students grew up somewhere their adults didn't, translate for their family, or speak another language at home. "Bring in a bridge" (an aunt, a grandparent, a coach, a counselor, a faith leader) can help across generations and cultures. If a family meeting would help, a counselor can ask about an interpreter.</a:t>
-            </a:r>
-          </a:p>
-          <a:p>
-            <a:pPr algn="l">
-              <a:spcAft>
-                <a:spcPts val="585"/>
-              </a:spcAft>
-            </a:pPr>
-            <a:r>
-              <a:rPr sz="1300" b="0" i="0">
-                <a:solidFill>
-                  <a:srgbClr val="1C1B19"/>
-                </a:solidFill>
-                <a:latin typeface="Source Serif 4"/>
-              </a:rPr>
-              <a:t/>
-            </a:r>
-          </a:p>
-        </p:txBody>
-      </p:sp>
-      <p:sp>
-        <p:nvSpPr>
-          <p:cNvPr id="7" name="TextBox 6"/>
-          <p:cNvSpPr txBox="1"/>
-          <p:nvPr/>
-        </p:nvSpPr>
-        <p:spPr>
-          <a:xfrm>
-            <a:off x="6217920" y="1828800"/>
-            <a:ext cx="5394960" cy="4572000"/>
-          </a:xfrm>
-          <a:prstGeom prst="rect">
-            <a:avLst/>
-          </a:prstGeom>
-          <a:noFill/>
-        </p:spPr>
-        <p:txBody>
-          <a:bodyPr wrap="square" anchor="t" lIns="0" rIns="0" tIns="0" bIns="0">
-            <a:spAutoFit/>
-          </a:bodyPr>
-          <a:lstStyle/>
-          <a:p>
-            <a:pPr algn="l">
-              <a:spcAft>
-                <a:spcPts val="585"/>
-              </a:spcAft>
-            </a:pPr>
-            <a:r>
-              <a:rPr sz="1500" b="1" i="0">
-                <a:solidFill>
-                  <a:srgbClr val="1C1B19"/>
-                </a:solidFill>
-                <a:latin typeface="Source Serif 4"/>
-              </a:rPr>
-              <a:t>Students who aren't out at home.</a:t>
-            </a:r>
-          </a:p>
-          <a:p>
-            <a:pPr algn="l">
-              <a:spcAft>
-                <a:spcPts val="585"/>
-              </a:spcAft>
-            </a:pPr>
-            <a:r>
-              <a:rPr sz="1300" b="0" i="0">
-                <a:solidFill>
-                  <a:srgbClr val="1C1B19"/>
-                </a:solidFill>
-                <a:latin typeface="Source Serif 4"/>
-              </a:rPr>
-              <a:t>The "what they don't know won't hurt" warning is about safety and trust. A student who isn't out at home doesn't owe that conversation to anyone, and needs a safe school adult. The Trevor Project (call 1-866-488-7386 or text START to 678-678) is there any time.</a:t>
-            </a:r>
-          </a:p>
-          <a:p>
-            <a:pPr algn="l">
-              <a:spcAft>
-                <a:spcPts val="585"/>
-              </a:spcAft>
-            </a:pPr>
-            <a:r>
-              <a:rPr sz="1300" b="0" i="0">
-                <a:solidFill>
-                  <a:srgbClr val="1C1B19"/>
-                </a:solidFill>
-                <a:latin typeface="Source Serif 4"/>
-              </a:rPr>
-              <a:t/>
-            </a:r>
-          </a:p>
-          <a:p>
-            <a:pPr algn="l">
-              <a:spcAft>
-                <a:spcPts val="585"/>
-              </a:spcAft>
-            </a:pPr>
-            <a:r>
-              <a:rPr sz="1500" b="1" i="0">
-                <a:solidFill>
-                  <a:srgbClr val="1C1B19"/>
-                </a:solidFill>
-                <a:latin typeface="Source Serif 4"/>
-              </a:rPr>
-              <a:t>Not every ask is about a party.</a:t>
-            </a:r>
-          </a:p>
-          <a:p>
-            <a:pPr algn="l">
-              <a:spcAft>
-                <a:spcPts val="585"/>
-              </a:spcAft>
-            </a:pPr>
-            <a:r>
-              <a:rPr sz="1300" b="0" i="0">
-                <a:solidFill>
-                  <a:srgbClr val="1C1B19"/>
-                </a:solidFill>
-                <a:latin typeface="Source Serif 4"/>
-              </a:rPr>
-              <a:t>Some students are asking about work hours, helping with money, rides, or college costs. Side-by-side moments don't require a car: cooking, walking, or the bus count. Checkpoints like texting when you arrive assume a phone, so offer a call from a friend's phone or a set check-in time too.</a:t>
-            </a:r>
-          </a:p>
-          <a:p>
-            <a:pPr algn="l">
-              <a:spcAft>
-                <a:spcPts val="585"/>
-              </a:spcAft>
-            </a:pPr>
-            <a:r>
-              <a:rPr sz="1300" b="0" i="0">
-                <a:solidFill>
-                  <a:srgbClr val="1C1B19"/>
-                </a:solidFill>
-                <a:latin typeface="Source Serif 4"/>
-              </a:rPr>
-              <a:t/>
-            </a:r>
-          </a:p>
-          <a:p>
-            <a:pPr algn="l">
-              <a:spcAft>
-                <a:spcPts val="585"/>
-              </a:spcAft>
-            </a:pPr>
-            <a:r>
-              <a:rPr sz="1500" b="1" i="0">
-                <a:solidFill>
-                  <a:srgbClr val="1C1B19"/>
-                </a:solidFill>
-                <a:latin typeface="Source Serif 4"/>
-              </a:rPr>
-              <a:t>Face to face is hard for some students.</a:t>
-            </a:r>
-          </a:p>
-          <a:p>
-            <a:pPr algn="l">
-              <a:spcAft>
-                <a:spcPts val="585"/>
-              </a:spcAft>
-            </a:pPr>
-            <a:r>
-              <a:rPr sz="1300" b="0" i="0">
-                <a:solidFill>
-                  <a:srgbClr val="1C1B19"/>
-                </a:solidFill>
-                <a:latin typeface="Source Serif 4"/>
-              </a:rPr>
-              <a:t>Autistic students, students with ADHD, and students with anxiety may lose their words in a heated talk or find eye contact hard. "Write it if saying it is hard" is a full strategy, and side by side often works better than face to face for everyone.</a:t>
-            </a:r>
-          </a:p>
-          <a:p>
-            <a:pPr algn="l">
-              <a:spcAft>
-                <a:spcPts val="585"/>
-              </a:spcAft>
-            </a:pPr>
-            <a:r>
-              <a:rPr sz="1300" b="0" i="0">
-                <a:solidFill>
-                  <a:srgbClr val="1C1B19"/>
-                </a:solidFill>
-                <a:latin typeface="Source Serif 4"/>
-              </a:rPr>
-              <a:t/>
-            </a:r>
-          </a:p>
-        </p:txBody>
-      </p:sp>
-    </p:spTree>
-  </p:cSld>
-  <p:clrMapOvr>
-    <a:masterClrMapping/>
-  </p:clrMapOvr>
-</p:sld>
-</file>
-
-<file path=ppt/slides/slide4.xml><?xml version="1.0" encoding="utf-8"?>
-<p:sld xmlns:a="http://schemas.openxmlformats.org/drawingml/2006/main" xmlns:p="http://schemas.openxmlformats.org/presentationml/2006/main" xmlns:r="http://schemas.openxmlformats.org/officeDocument/2006/relationships" show="0">
-  <p:cSld>
-    <p:bg>
-      <p:bgPr>
-        <a:solidFill>
-          <a:srgbClr val="EEEBE4"/>
-        </a:solidFill>
-        <a:effectLst/>
-      </p:bgPr>
-    </p:bg>
-    <p:spTree>
-      <p:nvGrpSpPr>
-        <p:cNvPr id="1" name=""/>
-        <p:cNvGrpSpPr/>
-        <p:nvPr/>
-      </p:nvGrpSpPr>
-      <p:grpSpPr/>
-      <p:sp>
-        <p:nvSpPr>
-          <p:cNvPr id="2" name="Rectangle 1"/>
-          <p:cNvSpPr/>
-          <p:nvPr/>
-        </p:nvSpPr>
-        <p:spPr>
-          <a:xfrm>
-            <a:off x="0" y="0"/>
-            <a:ext cx="12191695" cy="384048"/>
-          </a:xfrm>
-          <a:prstGeom prst="rect">
-            <a:avLst/>
-          </a:prstGeom>
-          <a:solidFill>
-            <a:srgbClr val="0B2D5B"/>
-          </a:solidFill>
-          <a:ln>
-            <a:noFill/>
-          </a:ln>
-          <a:effectLst/>
-        </p:spPr>
-        <p:style>
-          <a:lnRef idx="1">
-            <a:schemeClr val="accent1"/>
-          </a:lnRef>
-          <a:fillRef idx="3">
-            <a:schemeClr val="accent1"/>
-          </a:fillRef>
-          <a:effectRef idx="2">
-            <a:schemeClr val="accent1"/>
-          </a:effectRef>
-          <a:fontRef idx="minor">
-            <a:schemeClr val="lt1"/>
-          </a:fontRef>
-        </p:style>
-        <p:txBody>
-          <a:bodyPr rtlCol="0" anchor="ctr"/>
-          <a:lstStyle/>
-          <a:p>
-            <a:pPr algn="ctr"/>
-          </a:p>
-        </p:txBody>
-      </p:sp>
-      <p:sp>
-        <p:nvSpPr>
-          <p:cNvPr id="3" name="TextBox 2"/>
-          <p:cNvSpPr txBox="1"/>
-          <p:nvPr/>
-        </p:nvSpPr>
-        <p:spPr>
-          <a:xfrm>
-            <a:off x="548640" y="100584"/>
-            <a:ext cx="10972800" cy="274320"/>
-          </a:xfrm>
-          <a:prstGeom prst="rect">
-            <a:avLst/>
-          </a:prstGeom>
-          <a:noFill/>
-        </p:spPr>
-        <p:txBody>
-          <a:bodyPr wrap="square" anchor="t" lIns="0" rIns="0" tIns="0" bIns="0">
-            <a:spAutoFit/>
-          </a:bodyPr>
-          <a:lstStyle/>
-          <a:p>
-            <a:pPr algn="l">
-              <a:spcAft>
-                <a:spcPts val="495"/>
-              </a:spcAft>
-            </a:pPr>
-            <a:r>
-              <a:rPr sz="1100" b="1" i="0">
-                <a:solidFill>
-                  <a:srgbClr val="FFFFFF"/>
-                </a:solidFill>
-                <a:latin typeface="Inter Tight"/>
-              </a:rPr>
-              <a:t>TEACHER PAGE  ·  skipped when you present  ·  Background</a:t>
-            </a:r>
-          </a:p>
-        </p:txBody>
-      </p:sp>
-      <p:sp>
-        <p:nvSpPr>
-          <p:cNvPr id="4" name="TextBox 3"/>
-          <p:cNvSpPr txBox="1"/>
-          <p:nvPr/>
-        </p:nvSpPr>
-        <p:spPr>
-          <a:xfrm>
-            <a:off x="548640" y="685800"/>
-            <a:ext cx="10972800" cy="640080"/>
-          </a:xfrm>
-          <a:prstGeom prst="rect">
-            <a:avLst/>
-          </a:prstGeom>
-          <a:noFill/>
-        </p:spPr>
-        <p:txBody>
-          <a:bodyPr wrap="square" anchor="t" lIns="0" rIns="0" tIns="0" bIns="0">
-            <a:spAutoFit/>
-          </a:bodyPr>
-          <a:lstStyle/>
-          <a:p>
-            <a:pPr algn="l">
-              <a:spcAft>
-                <a:spcPts val="1350"/>
-              </a:spcAft>
-            </a:pPr>
-            <a:r>
-              <a:rPr sz="3000" b="1" i="0">
-                <a:solidFill>
-                  <a:srgbClr val="1C1B19"/>
-                </a:solidFill>
-                <a:latin typeface="Source Serif 4"/>
-              </a:rPr>
-              <a:t>What the research says</a:t>
-            </a:r>
-          </a:p>
-        </p:txBody>
-      </p:sp>
-      <p:sp>
-        <p:nvSpPr>
-          <p:cNvPr id="5" name="TextBox 4"/>
-          <p:cNvSpPr txBox="1"/>
-          <p:nvPr/>
-        </p:nvSpPr>
-        <p:spPr>
-          <a:xfrm>
-            <a:off x="548640" y="1463040"/>
-            <a:ext cx="5394960" cy="4937760"/>
-          </a:xfrm>
-          <a:prstGeom prst="rect">
-            <a:avLst/>
-          </a:prstGeom>
-          <a:noFill/>
-        </p:spPr>
-        <p:txBody>
-          <a:bodyPr wrap="square" anchor="t" lIns="0" rIns="0" tIns="0" bIns="0">
-            <a:spAutoFit/>
-          </a:bodyPr>
-          <a:lstStyle/>
-          <a:p>
-            <a:pPr algn="l">
-              <a:spcAft>
-                <a:spcPts val="585"/>
-              </a:spcAft>
-            </a:pPr>
-            <a:r>
-              <a:rPr sz="1300" b="0" i="0">
-                <a:solidFill>
-                  <a:srgbClr val="1C1B19"/>
-                </a:solidFill>
-                <a:latin typeface="Source Serif 4"/>
-              </a:rPr>
-              <a:t>In a study of more than 1,000 14-year-olds in Sweden, what parents knew about their teens' lives came mostly from what teens chose to tell them.</a:t>
-            </a:r>
-          </a:p>
-          <a:p>
-            <a:pPr algn="l">
-              <a:spcAft>
-                <a:spcPts val="585"/>
-              </a:spcAft>
-            </a:pPr>
-            <a:r>
-              <a:rPr sz="1050" b="0" i="0">
-                <a:solidFill>
-                  <a:srgbClr val="5D5A54"/>
-                </a:solidFill>
-                <a:latin typeface="Inter Tight"/>
-              </a:rPr>
-              <a:t>Kerr and Stattin, Developmental Psychology, 2000</a:t>
-            </a:r>
-          </a:p>
-          <a:p>
-            <a:pPr algn="l">
-              <a:spcAft>
-                <a:spcPts val="585"/>
-              </a:spcAft>
-            </a:pPr>
-            <a:r>
-              <a:rPr sz="1300" b="0" i="0">
-                <a:solidFill>
-                  <a:srgbClr val="1C1B19"/>
-                </a:solidFill>
-                <a:latin typeface="Source Serif 4"/>
-              </a:rPr>
-              <a:t>Rules and checking up explained less of what parents knew than teens' own telling, which led researchers to rethink what "parental monitoring" measures.</a:t>
-            </a:r>
-          </a:p>
-          <a:p>
-            <a:pPr algn="l">
-              <a:spcAft>
-                <a:spcPts val="585"/>
-              </a:spcAft>
-            </a:pPr>
-            <a:r>
-              <a:rPr sz="1050" b="0" i="0">
-                <a:solidFill>
-                  <a:srgbClr val="5D5A54"/>
-                </a:solidFill>
-                <a:latin typeface="Inter Tight"/>
-              </a:rPr>
-              <a:t>Stattin and Kerr, Child Development, 2000</a:t>
-            </a:r>
-          </a:p>
-          <a:p>
-            <a:pPr algn="l">
-              <a:spcAft>
-                <a:spcPts val="585"/>
-              </a:spcAft>
-            </a:pPr>
-            <a:r>
-              <a:rPr sz="1300" b="0" i="0">
-                <a:solidFill>
-                  <a:srgbClr val="1C1B19"/>
-                </a:solidFill>
-                <a:latin typeface="Source Serif 4"/>
-              </a:rPr>
-              <a:t>A review of dozens of studies found that the number of conflicts with parents drops across the teen years, while the emotional intensity of conflict rises from early to mid-adolescence.</a:t>
-            </a:r>
-          </a:p>
-          <a:p>
-            <a:pPr algn="l">
-              <a:spcAft>
-                <a:spcPts val="585"/>
-              </a:spcAft>
-            </a:pPr>
-            <a:r>
-              <a:rPr sz="1050" b="0" i="0">
-                <a:solidFill>
-                  <a:srgbClr val="5D5A54"/>
-                </a:solidFill>
-                <a:latin typeface="Inter Tight"/>
-              </a:rPr>
-              <a:t>Laursen, Coy and Collins, Child Development, 1998</a:t>
-            </a:r>
-          </a:p>
-        </p:txBody>
-      </p:sp>
-      <p:sp>
-        <p:nvSpPr>
-          <p:cNvPr id="6" name="TextBox 5"/>
-          <p:cNvSpPr txBox="1"/>
-          <p:nvPr/>
-        </p:nvSpPr>
-        <p:spPr>
-          <a:xfrm>
-            <a:off x="6217920" y="1463040"/>
-            <a:ext cx="5394960" cy="4937760"/>
-          </a:xfrm>
-          <a:prstGeom prst="rect">
-            <a:avLst/>
-          </a:prstGeom>
-          <a:noFill/>
-        </p:spPr>
-        <p:txBody>
-          <a:bodyPr wrap="square" anchor="t" lIns="0" rIns="0" tIns="0" bIns="0">
-            <a:spAutoFit/>
-          </a:bodyPr>
-          <a:lstStyle/>
-          <a:p>
-            <a:pPr algn="l">
-              <a:spcAft>
-                <a:spcPts val="585"/>
-              </a:spcAft>
-            </a:pPr>
-            <a:r>
-              <a:rPr sz="1300" b="0" i="0">
-                <a:solidFill>
-                  <a:srgbClr val="1C1B19"/>
-                </a:solidFill>
-                <a:latin typeface="Source Serif 4"/>
-              </a:rPr>
-              <a:t>Teens listening to recordings of their own mothers criticizing them showed more activity in emotional brain areas and less in areas for self-control and for understanding another person's point of view.</a:t>
-            </a:r>
-          </a:p>
-          <a:p>
-            <a:pPr algn="l">
-              <a:spcAft>
-                <a:spcPts val="585"/>
-              </a:spcAft>
-            </a:pPr>
-            <a:r>
-              <a:rPr sz="1050" b="0" i="0">
-                <a:solidFill>
-                  <a:srgbClr val="5D5A54"/>
-                </a:solidFill>
-                <a:latin typeface="Inter Tight"/>
-              </a:rPr>
-              <a:t>Lee, Siegle, Dahl, Hooley and Silk, Social Cognitive and Affective Neuroscience, 2015</a:t>
-            </a:r>
-          </a:p>
-          <a:p>
-            <a:pPr algn="l">
-              <a:spcAft>
-                <a:spcPts val="585"/>
-              </a:spcAft>
-            </a:pPr>
-            <a:r>
-              <a:rPr sz="1300" b="0" i="0">
-                <a:solidFill>
-                  <a:srgbClr val="1C1B19"/>
-                </a:solidFill>
-                <a:latin typeface="Source Serif 4"/>
-              </a:rPr>
-              <a:t>Teens from Mexican, Chinese, Filipino and European backgrounds differed in their beliefs about parents' authority.</a:t>
-            </a:r>
-          </a:p>
-          <a:p>
-            <a:pPr algn="l">
-              <a:spcAft>
-                <a:spcPts val="585"/>
-              </a:spcAft>
-            </a:pPr>
-            <a:r>
-              <a:rPr sz="1050" b="0" i="0">
-                <a:solidFill>
-                  <a:srgbClr val="5D5A54"/>
-                </a:solidFill>
-                <a:latin typeface="Inter Tight"/>
-              </a:rPr>
-              <a:t>Fuligni, Developmental Psychology, 1998</a:t>
-            </a:r>
-          </a:p>
-          <a:p>
-            <a:pPr algn="l">
-              <a:spcAft>
-                <a:spcPts val="585"/>
-              </a:spcAft>
-            </a:pPr>
-            <a:r>
-              <a:rPr sz="1300" b="0" i="0">
-                <a:solidFill>
-                  <a:srgbClr val="1C1B19"/>
-                </a:solidFill>
-                <a:latin typeface="Source Serif 4"/>
-              </a:rPr>
-              <a:t>Those same teens reported similar levels of conflict and closeness with their parents across backgrounds.</a:t>
-            </a:r>
-          </a:p>
-          <a:p>
-            <a:pPr algn="l">
-              <a:spcAft>
-                <a:spcPts val="585"/>
-              </a:spcAft>
-            </a:pPr>
-            <a:r>
-              <a:rPr sz="1050" b="0" i="0">
-                <a:solidFill>
-                  <a:srgbClr val="5D5A54"/>
-                </a:solidFill>
-                <a:latin typeface="Inter Tight"/>
-              </a:rPr>
-              <a:t>Fuligni, 1998</a:t>
-            </a:r>
-          </a:p>
-        </p:txBody>
-      </p:sp>
-    </p:spTree>
-  </p:cSld>
-  <p:clrMapOvr>
-    <a:masterClrMapping/>
-  </p:clrMapOvr>
-</p:sld>
-</file>
-
-<file path=ppt/slides/slide5.xml><?xml version="1.0" encoding="utf-8"?>
-<p:sld xmlns:a="http://schemas.openxmlformats.org/drawingml/2006/main" xmlns:p="http://schemas.openxmlformats.org/presentationml/2006/main" xmlns:r="http://schemas.openxmlformats.org/officeDocument/2006/relationships">
-  <p:cSld>
-    <p:bg>
-      <p:bgPr>
-        <a:solidFill>
-          <a:srgbClr val="0B2D5B"/>
-        </a:solidFill>
-        <a:effectLst/>
-      </p:bgPr>
-    </p:bg>
-    <p:spTree>
-      <p:nvGrpSpPr>
-        <p:cNvPr id="1" name=""/>
-        <p:cNvGrpSpPr/>
-        <p:nvPr/>
-      </p:nvGrpSpPr>
-      <p:grpSpPr/>
-      <p:sp>
-        <p:nvSpPr>
-          <p:cNvPr id="2" name="Rectangle 1"/>
-          <p:cNvSpPr/>
-          <p:nvPr/>
-        </p:nvSpPr>
-        <p:spPr>
-          <a:xfrm>
-            <a:off x="548640" y="502920"/>
-            <a:ext cx="457200" cy="54864"/>
-          </a:xfrm>
-          <a:prstGeom prst="rect">
-            <a:avLst/>
-          </a:prstGeom>
-          <a:solidFill>
-            <a:srgbClr val="F47B20"/>
-          </a:solidFill>
-          <a:ln>
-            <a:noFill/>
-          </a:ln>
-          <a:effectLst/>
-        </p:spPr>
-        <p:style>
-          <a:lnRef idx="1">
-            <a:schemeClr val="accent1"/>
-          </a:lnRef>
-          <a:fillRef idx="3">
-            <a:schemeClr val="accent1"/>
-          </a:fillRef>
-          <a:effectRef idx="2">
-            <a:schemeClr val="accent1"/>
-          </a:effectRef>
-          <a:fontRef idx="minor">
-            <a:schemeClr val="lt1"/>
-          </a:fontRef>
-        </p:style>
-        <p:txBody>
-          <a:bodyPr rtlCol="0" anchor="ctr"/>
-          <a:lstStyle/>
-          <a:p>
-            <a:pPr algn="ctr"/>
-          </a:p>
-        </p:txBody>
-      </p:sp>
-      <p:sp>
-        <p:nvSpPr>
-          <p:cNvPr id="3" name="TextBox 2"/>
-          <p:cNvSpPr txBox="1"/>
-          <p:nvPr/>
-        </p:nvSpPr>
-        <p:spPr>
-          <a:xfrm>
-            <a:off x="1143000" y="393192"/>
-            <a:ext cx="8229600" cy="274320"/>
-          </a:xfrm>
-          <a:prstGeom prst="rect">
-            <a:avLst/>
-          </a:prstGeom>
-          <a:noFill/>
-        </p:spPr>
-        <p:txBody>
-          <a:bodyPr wrap="square" anchor="t" lIns="0" rIns="0" tIns="0" bIns="0">
-            <a:spAutoFit/>
-          </a:bodyPr>
-          <a:lstStyle/>
-          <a:p>
-            <a:pPr algn="l">
-              <a:spcAft>
-                <a:spcPts val="540"/>
-              </a:spcAft>
-            </a:pPr>
-            <a:r>
-              <a:rPr sz="1200" b="1" i="0">
-                <a:solidFill>
-                  <a:srgbClr val="5D5A54"/>
-                </a:solidFill>
-                <a:latin typeface="Inter Tight"/>
-              </a:rPr>
-              <a:t>TALKING TO YOUR PARENTS (SO THEY ACTUALLY LISTEN)</a:t>
-            </a:r>
-          </a:p>
-        </p:txBody>
-      </p:sp>
-      <p:sp>
-        <p:nvSpPr>
-          <p:cNvPr id="4" name="TextBox 3"/>
-          <p:cNvSpPr txBox="1"/>
-          <p:nvPr/>
-        </p:nvSpPr>
-        <p:spPr>
-          <a:xfrm>
-            <a:off x="8229600" y="6400800"/>
-            <a:ext cx="3410712" cy="274320"/>
-          </a:xfrm>
-          <a:prstGeom prst="rect">
-            <a:avLst/>
-          </a:prstGeom>
-          <a:noFill/>
-        </p:spPr>
-        <p:txBody>
-          <a:bodyPr wrap="square" anchor="t" lIns="0" rIns="0" tIns="0" bIns="0">
-            <a:spAutoFit/>
-          </a:bodyPr>
-          <a:lstStyle/>
-          <a:p>
-            <a:pPr algn="r">
-              <a:spcAft>
-                <a:spcPts val="450"/>
-              </a:spcAft>
-            </a:pPr>
-            <a:r>
-              <a:rPr sz="1000" b="0" i="0">
-                <a:solidFill>
-                  <a:srgbClr val="5D5A54"/>
-                </a:solidFill>
-                <a:latin typeface="Inter Tight"/>
-              </a:rPr>
-              <a:t>Beaver Counseling</a:t>
-            </a:r>
-          </a:p>
-        </p:txBody>
-      </p:sp>
-      <p:sp>
-        <p:nvSpPr>
-          <p:cNvPr id="5" name="TextBox 4"/>
-          <p:cNvSpPr txBox="1"/>
-          <p:nvPr/>
-        </p:nvSpPr>
-        <p:spPr>
-          <a:xfrm>
-            <a:off x="822960" y="1371600"/>
-            <a:ext cx="10515600" cy="2377440"/>
-          </a:xfrm>
-          <a:prstGeom prst="rect">
-            <a:avLst/>
-          </a:prstGeom>
-          <a:noFill/>
-        </p:spPr>
-        <p:txBody>
-          <a:bodyPr wrap="square" anchor="b" lIns="0" rIns="0" tIns="0" bIns="0">
-            <a:spAutoFit/>
-          </a:bodyPr>
-          <a:lstStyle/>
-          <a:p>
-            <a:pPr algn="l">
-              <a:spcAft>
-                <a:spcPts val="2430"/>
-              </a:spcAft>
-            </a:pPr>
-            <a:r>
-              <a:rPr sz="5400" b="1" i="0">
-                <a:solidFill>
-                  <a:srgbClr val="FFFFFF"/>
-                </a:solidFill>
-                <a:latin typeface="Source Serif 4"/>
-              </a:rPr>
-              <a:t>Talking to Your Parents (So They Actually Listen)</a:t>
-            </a:r>
-          </a:p>
-        </p:txBody>
-      </p:sp>
-      <p:sp>
-        <p:nvSpPr>
-          <p:cNvPr id="6" name="TextBox 5"/>
-          <p:cNvSpPr txBox="1"/>
-          <p:nvPr/>
-        </p:nvSpPr>
-        <p:spPr>
-          <a:xfrm>
-            <a:off x="822960" y="3931920"/>
-            <a:ext cx="10515600" cy="914400"/>
-          </a:xfrm>
-          <a:prstGeom prst="rect">
-            <a:avLst/>
-          </a:prstGeom>
-          <a:noFill/>
-        </p:spPr>
-        <p:txBody>
-          <a:bodyPr wrap="square" anchor="t" lIns="0" rIns="0" tIns="0" bIns="0">
-            <a:spAutoFit/>
-          </a:bodyPr>
-          <a:lstStyle/>
-          <a:p>
-            <a:pPr algn="l">
-              <a:spcAft>
-                <a:spcPts val="1080"/>
-              </a:spcAft>
-            </a:pPr>
-            <a:r>
-              <a:rPr sz="2400" b="0" i="1">
-                <a:solidFill>
-                  <a:srgbClr val="E8E4DA"/>
-                </a:solidFill>
-                <a:latin typeface="Source Serif 4"/>
-              </a:rPr>
-              <a:t>"Parents" means whoever is raising you.</a:t>
-            </a:r>
-          </a:p>
-        </p:txBody>
-      </p:sp>
-      <p:sp>
-        <p:nvSpPr>
-          <p:cNvPr id="7" name="TextBox 6"/>
-          <p:cNvSpPr txBox="1"/>
-          <p:nvPr/>
-        </p:nvSpPr>
-        <p:spPr>
-          <a:xfrm>
-            <a:off x="822960" y="6035040"/>
-            <a:ext cx="7315200" cy="365760"/>
-          </a:xfrm>
-          <a:prstGeom prst="rect">
-            <a:avLst/>
-          </a:prstGeom>
-          <a:noFill/>
-        </p:spPr>
-        <p:txBody>
-          <a:bodyPr wrap="square" anchor="t" lIns="0" rIns="0" tIns="0" bIns="0">
-            <a:spAutoFit/>
-          </a:bodyPr>
-          <a:lstStyle/>
-          <a:p>
-            <a:pPr algn="l">
-              <a:spcAft>
-                <a:spcPts val="585"/>
-              </a:spcAft>
-            </a:pPr>
-            <a:r>
-              <a:rPr sz="1300" b="0" i="0">
-                <a:solidFill>
-                  <a:srgbClr val="E8E4DA"/>
-                </a:solidFill>
-                <a:latin typeface="Inter Tight"/>
-              </a:rPr>
-              <a:t>Beaver Upper School · Counseling</a:t>
+              <a:t>Across the teen years, arguments with parents get less frequent and run hotter.</a:t>
             </a:r>
           </a:p>
         </p:txBody>
@@ -7216,7 +7136,7 @@
                 </a:solidFill>
                 <a:latin typeface="Inter Tight"/>
               </a:rPr>
-              <a:t>ANONYMOUS CARDS</a:t>
+              <a:t>BEFORE YOU START</a:t>
             </a:r>
           </a:p>
         </p:txBody>
@@ -7262,45 +7182,40 @@
       </p:sp>
       <p:sp>
         <p:nvSpPr>
-          <p:cNvPr id="5" name="Rectangle 4"/>
-          <p:cNvSpPr/>
+          <p:cNvPr id="5" name="TextBox 4"/>
+          <p:cNvSpPr txBox="1"/>
           <p:nvPr/>
         </p:nvSpPr>
         <p:spPr>
           <a:xfrm>
-            <a:off x="822960" y="1371600"/>
-            <a:ext cx="73152" cy="3566160"/>
-          </a:xfrm>
-          <a:prstGeom prst="rect">
-            <a:avLst/>
-          </a:prstGeom>
-          <a:solidFill>
-            <a:srgbClr val="F47B20"/>
-          </a:solidFill>
-          <a:ln>
-            <a:noFill/>
-          </a:ln>
-          <a:effectLst/>
-        </p:spPr>
-        <p:style>
-          <a:lnRef idx="1">
-            <a:schemeClr val="accent1"/>
-          </a:lnRef>
-          <a:fillRef idx="3">
-            <a:schemeClr val="accent1"/>
-          </a:fillRef>
-          <a:effectRef idx="2">
-            <a:schemeClr val="accent1"/>
-          </a:effectRef>
-          <a:fontRef idx="minor">
-            <a:schemeClr val="lt1"/>
-          </a:fontRef>
-        </p:style>
-        <p:txBody>
-          <a:bodyPr rtlCol="0" anchor="ctr"/>
-          <a:lstStyle/>
-          <a:p>
-            <a:pPr algn="ctr"/>
+            <a:off x="822960" y="1005840"/>
+            <a:ext cx="10515600" cy="1097280"/>
+          </a:xfrm>
+          <a:prstGeom prst="rect">
+            <a:avLst/>
+          </a:prstGeom>
+          <a:noFill/>
+        </p:spPr>
+        <p:txBody>
+          <a:bodyPr wrap="square" anchor="t" lIns="0" rIns="0" tIns="0" bIns="0">
+            <a:spAutoFit/>
+          </a:bodyPr>
+          <a:lstStyle/>
+          <a:p>
+            <a:pPr algn="l">
+              <a:spcAft>
+                <a:spcPts val="1620"/>
+              </a:spcAft>
+            </a:pPr>
+            <a:r>
+              <a:rPr sz="3600" b="1" i="0">
+                <a:solidFill>
+                  <a:srgbClr val="1C1B19"/>
+                </a:solidFill>
+                <a:latin typeface="Source Serif 4"/>
+              </a:rPr>
+              <a:t>Clear ask, right moment, a plan for their worry</a:t>
+            </a:r>
           </a:p>
         </p:txBody>
       </p:sp>
@@ -7312,8 +7227,8 @@
         </p:nvSpPr>
         <p:spPr>
           <a:xfrm>
-            <a:off x="1188720" y="1371600"/>
-            <a:ext cx="10058400" cy="3566160"/>
+            <a:off x="822960" y="2057400"/>
+            <a:ext cx="548640" cy="804672"/>
           </a:xfrm>
           <a:prstGeom prst="rect">
             <a:avLst/>
@@ -7321,24 +7236,24 @@
           <a:noFill/>
         </p:spPr>
         <p:txBody>
-          <a:bodyPr wrap="square" anchor="ctr" lIns="0" rIns="0" tIns="0" bIns="0">
+          <a:bodyPr wrap="square" anchor="t" lIns="0" rIns="0" tIns="0" bIns="0">
             <a:spAutoFit/>
           </a:bodyPr>
           <a:lstStyle/>
           <a:p>
             <a:pPr algn="l">
               <a:spcAft>
-                <a:spcPts val="1800"/>
-              </a:spcAft>
-            </a:pPr>
-            <a:r>
-              <a:rPr sz="4000" b="0" i="1">
-                <a:solidFill>
-                  <a:srgbClr val="1C1B19"/>
+                <a:spcPts val="1170"/>
+              </a:spcAft>
+            </a:pPr>
+            <a:r>
+              <a:rPr sz="2600" b="1" i="0">
+                <a:solidFill>
+                  <a:srgbClr val="F47B20"/>
                 </a:solidFill>
                 <a:latin typeface="Source Serif 4"/>
               </a:rPr>
-              <a:t>What's hardest to bring up with the adults at home?</a:t>
+              <a:t>1</a:t>
             </a:r>
           </a:p>
         </p:txBody>
@@ -7351,8 +7266,8 @@
         </p:nvSpPr>
         <p:spPr>
           <a:xfrm>
-            <a:off x="1188720" y="5120640"/>
-            <a:ext cx="10058400" cy="914400"/>
+            <a:off x="1463040" y="2093976"/>
+            <a:ext cx="9875520" cy="804672"/>
           </a:xfrm>
           <a:prstGeom prst="rect">
             <a:avLst/>
@@ -7367,17 +7282,409 @@
           <a:p>
             <a:pPr algn="l">
               <a:spcAft>
-                <a:spcPts val="810"/>
-              </a:spcAft>
-            </a:pPr>
-            <a:r>
-              <a:rPr sz="1800" b="0" i="0">
+                <a:spcPts val="945"/>
+              </a:spcAft>
+            </a:pPr>
+            <a:r>
+              <a:rPr sz="2100" b="1" i="0">
+                <a:solidFill>
+                  <a:srgbClr val="1C1B19"/>
+                </a:solidFill>
+                <a:latin typeface="Source Serif 4"/>
+              </a:rPr>
+              <a:t>Know your ask.</a:t>
+            </a:r>
+          </a:p>
+          <a:p>
+            <a:pPr algn="l">
+              <a:spcAft>
+                <a:spcPts val="945"/>
+              </a:spcAft>
+            </a:pPr>
+            <a:r>
+              <a:rPr sz="1600" b="0" i="0">
                 <a:solidFill>
                   <a:srgbClr val="5D5A54"/>
                 </a:solidFill>
-                <a:latin typeface="Inter Tight"/>
-              </a:rPr>
-              <a:t>Write one: permission, something serious, school or the future, money, or something else. Fold it. No names.</a:t>
+                <a:latin typeface="Source Serif 4"/>
+              </a:rPr>
+              <a:t>Advice, help, permission, or just listening?</a:t>
+            </a:r>
+          </a:p>
+        </p:txBody>
+      </p:sp>
+      <p:sp>
+        <p:nvSpPr>
+          <p:cNvPr id="8" name="TextBox 7"/>
+          <p:cNvSpPr txBox="1"/>
+          <p:nvPr/>
+        </p:nvSpPr>
+        <p:spPr>
+          <a:xfrm>
+            <a:off x="822960" y="2862072"/>
+            <a:ext cx="548640" cy="804672"/>
+          </a:xfrm>
+          <a:prstGeom prst="rect">
+            <a:avLst/>
+          </a:prstGeom>
+          <a:noFill/>
+        </p:spPr>
+        <p:txBody>
+          <a:bodyPr wrap="square" anchor="t" lIns="0" rIns="0" tIns="0" bIns="0">
+            <a:spAutoFit/>
+          </a:bodyPr>
+          <a:lstStyle/>
+          <a:p>
+            <a:pPr algn="l">
+              <a:spcAft>
+                <a:spcPts val="1170"/>
+              </a:spcAft>
+            </a:pPr>
+            <a:r>
+              <a:rPr sz="2600" b="1" i="0">
+                <a:solidFill>
+                  <a:srgbClr val="F47B20"/>
+                </a:solidFill>
+                <a:latin typeface="Source Serif 4"/>
+              </a:rPr>
+              <a:t>2</a:t>
+            </a:r>
+          </a:p>
+        </p:txBody>
+      </p:sp>
+      <p:sp>
+        <p:nvSpPr>
+          <p:cNvPr id="9" name="TextBox 8"/>
+          <p:cNvSpPr txBox="1"/>
+          <p:nvPr/>
+        </p:nvSpPr>
+        <p:spPr>
+          <a:xfrm>
+            <a:off x="1463040" y="2898648"/>
+            <a:ext cx="9875520" cy="804672"/>
+          </a:xfrm>
+          <a:prstGeom prst="rect">
+            <a:avLst/>
+          </a:prstGeom>
+          <a:noFill/>
+        </p:spPr>
+        <p:txBody>
+          <a:bodyPr wrap="square" anchor="t" lIns="0" rIns="0" tIns="0" bIns="0">
+            <a:spAutoFit/>
+          </a:bodyPr>
+          <a:lstStyle/>
+          <a:p>
+            <a:pPr algn="l">
+              <a:spcAft>
+                <a:spcPts val="945"/>
+              </a:spcAft>
+            </a:pPr>
+            <a:r>
+              <a:rPr sz="2100" b="1" i="0">
+                <a:solidFill>
+                  <a:srgbClr val="1C1B19"/>
+                </a:solidFill>
+                <a:latin typeface="Source Serif 4"/>
+              </a:rPr>
+              <a:t>Pick your moment.</a:t>
+            </a:r>
+          </a:p>
+          <a:p>
+            <a:pPr algn="l">
+              <a:spcAft>
+                <a:spcPts val="945"/>
+              </a:spcAft>
+            </a:pPr>
+            <a:r>
+              <a:rPr sz="1600" b="0" i="0">
+                <a:solidFill>
+                  <a:srgbClr val="5D5A54"/>
+                </a:solidFill>
+                <a:latin typeface="Source Serif 4"/>
+              </a:rPr>
+              <a:t>Side by side often beats face to face.</a:t>
+            </a:r>
+          </a:p>
+        </p:txBody>
+      </p:sp>
+      <p:sp>
+        <p:nvSpPr>
+          <p:cNvPr id="10" name="TextBox 9"/>
+          <p:cNvSpPr txBox="1"/>
+          <p:nvPr/>
+        </p:nvSpPr>
+        <p:spPr>
+          <a:xfrm>
+            <a:off x="822960" y="3666744"/>
+            <a:ext cx="548640" cy="804672"/>
+          </a:xfrm>
+          <a:prstGeom prst="rect">
+            <a:avLst/>
+          </a:prstGeom>
+          <a:noFill/>
+        </p:spPr>
+        <p:txBody>
+          <a:bodyPr wrap="square" anchor="t" lIns="0" rIns="0" tIns="0" bIns="0">
+            <a:spAutoFit/>
+          </a:bodyPr>
+          <a:lstStyle/>
+          <a:p>
+            <a:pPr algn="l">
+              <a:spcAft>
+                <a:spcPts val="1170"/>
+              </a:spcAft>
+            </a:pPr>
+            <a:r>
+              <a:rPr sz="2600" b="1" i="0">
+                <a:solidFill>
+                  <a:srgbClr val="F47B20"/>
+                </a:solidFill>
+                <a:latin typeface="Source Serif 4"/>
+              </a:rPr>
+              <a:t>3</a:t>
+            </a:r>
+          </a:p>
+        </p:txBody>
+      </p:sp>
+      <p:sp>
+        <p:nvSpPr>
+          <p:cNvPr id="11" name="TextBox 10"/>
+          <p:cNvSpPr txBox="1"/>
+          <p:nvPr/>
+        </p:nvSpPr>
+        <p:spPr>
+          <a:xfrm>
+            <a:off x="1463040" y="3703320"/>
+            <a:ext cx="9875520" cy="804672"/>
+          </a:xfrm>
+          <a:prstGeom prst="rect">
+            <a:avLst/>
+          </a:prstGeom>
+          <a:noFill/>
+        </p:spPr>
+        <p:txBody>
+          <a:bodyPr wrap="square" anchor="t" lIns="0" rIns="0" tIns="0" bIns="0">
+            <a:spAutoFit/>
+          </a:bodyPr>
+          <a:lstStyle/>
+          <a:p>
+            <a:pPr algn="l">
+              <a:spcAft>
+                <a:spcPts val="945"/>
+              </a:spcAft>
+            </a:pPr>
+            <a:r>
+              <a:rPr sz="2100" b="1" i="0">
+                <a:solidFill>
+                  <a:srgbClr val="1C1B19"/>
+                </a:solidFill>
+                <a:latin typeface="Source Serif 4"/>
+              </a:rPr>
+              <a:t>Lead with their worry.</a:t>
+            </a:r>
+          </a:p>
+          <a:p>
+            <a:pPr algn="l">
+              <a:spcAft>
+                <a:spcPts val="945"/>
+              </a:spcAft>
+            </a:pPr>
+            <a:r>
+              <a:rPr sz="1600" b="0" i="0">
+                <a:solidFill>
+                  <a:srgbClr val="5D5A54"/>
+                </a:solidFill>
+                <a:latin typeface="Source Serif 4"/>
+              </a:rPr>
+              <a:t>"I know you're worried about who's driving."</a:t>
+            </a:r>
+          </a:p>
+        </p:txBody>
+      </p:sp>
+      <p:sp>
+        <p:nvSpPr>
+          <p:cNvPr id="12" name="TextBox 11"/>
+          <p:cNvSpPr txBox="1"/>
+          <p:nvPr/>
+        </p:nvSpPr>
+        <p:spPr>
+          <a:xfrm>
+            <a:off x="822960" y="4471416"/>
+            <a:ext cx="548640" cy="804672"/>
+          </a:xfrm>
+          <a:prstGeom prst="rect">
+            <a:avLst/>
+          </a:prstGeom>
+          <a:noFill/>
+        </p:spPr>
+        <p:txBody>
+          <a:bodyPr wrap="square" anchor="t" lIns="0" rIns="0" tIns="0" bIns="0">
+            <a:spAutoFit/>
+          </a:bodyPr>
+          <a:lstStyle/>
+          <a:p>
+            <a:pPr algn="l">
+              <a:spcAft>
+                <a:spcPts val="1170"/>
+              </a:spcAft>
+            </a:pPr>
+            <a:r>
+              <a:rPr sz="2600" b="1" i="0">
+                <a:solidFill>
+                  <a:srgbClr val="F47B20"/>
+                </a:solidFill>
+                <a:latin typeface="Source Serif 4"/>
+              </a:rPr>
+              <a:t>4</a:t>
+            </a:r>
+          </a:p>
+        </p:txBody>
+      </p:sp>
+      <p:sp>
+        <p:nvSpPr>
+          <p:cNvPr id="13" name="TextBox 12"/>
+          <p:cNvSpPr txBox="1"/>
+          <p:nvPr/>
+        </p:nvSpPr>
+        <p:spPr>
+          <a:xfrm>
+            <a:off x="1463040" y="4507992"/>
+            <a:ext cx="9875520" cy="804672"/>
+          </a:xfrm>
+          <a:prstGeom prst="rect">
+            <a:avLst/>
+          </a:prstGeom>
+          <a:noFill/>
+        </p:spPr>
+        <p:txBody>
+          <a:bodyPr wrap="square" anchor="t" lIns="0" rIns="0" tIns="0" bIns="0">
+            <a:spAutoFit/>
+          </a:bodyPr>
+          <a:lstStyle/>
+          <a:p>
+            <a:pPr algn="l">
+              <a:spcAft>
+                <a:spcPts val="945"/>
+              </a:spcAft>
+            </a:pPr>
+            <a:r>
+              <a:rPr sz="2100" b="1" i="0">
+                <a:solidFill>
+                  <a:srgbClr val="1C1B19"/>
+                </a:solidFill>
+                <a:latin typeface="Source Serif 4"/>
+              </a:rPr>
+              <a:t>Offer checkpoints.</a:t>
+            </a:r>
+          </a:p>
+          <a:p>
+            <a:pPr algn="l">
+              <a:spcAft>
+                <a:spcPts val="945"/>
+              </a:spcAft>
+            </a:pPr>
+            <a:r>
+              <a:rPr sz="1600" b="0" i="0">
+                <a:solidFill>
+                  <a:srgbClr val="5D5A54"/>
+                </a:solidFill>
+                <a:latin typeface="Source Serif 4"/>
+              </a:rPr>
+              <a:t>"I'll text when I get there and be home by 11."</a:t>
+            </a:r>
+          </a:p>
+        </p:txBody>
+      </p:sp>
+      <p:sp>
+        <p:nvSpPr>
+          <p:cNvPr id="14" name="TextBox 13"/>
+          <p:cNvSpPr txBox="1"/>
+          <p:nvPr/>
+        </p:nvSpPr>
+        <p:spPr>
+          <a:xfrm>
+            <a:off x="822960" y="5276088"/>
+            <a:ext cx="548640" cy="804672"/>
+          </a:xfrm>
+          <a:prstGeom prst="rect">
+            <a:avLst/>
+          </a:prstGeom>
+          <a:noFill/>
+        </p:spPr>
+        <p:txBody>
+          <a:bodyPr wrap="square" anchor="t" lIns="0" rIns="0" tIns="0" bIns="0">
+            <a:spAutoFit/>
+          </a:bodyPr>
+          <a:lstStyle/>
+          <a:p>
+            <a:pPr algn="l">
+              <a:spcAft>
+                <a:spcPts val="1170"/>
+              </a:spcAft>
+            </a:pPr>
+            <a:r>
+              <a:rPr sz="2600" b="1" i="0">
+                <a:solidFill>
+                  <a:srgbClr val="F47B20"/>
+                </a:solidFill>
+                <a:latin typeface="Source Serif 4"/>
+              </a:rPr>
+              <a:t>5</a:t>
+            </a:r>
+          </a:p>
+        </p:txBody>
+      </p:sp>
+      <p:sp>
+        <p:nvSpPr>
+          <p:cNvPr id="15" name="TextBox 14"/>
+          <p:cNvSpPr txBox="1"/>
+          <p:nvPr/>
+        </p:nvSpPr>
+        <p:spPr>
+          <a:xfrm>
+            <a:off x="1463040" y="5312664"/>
+            <a:ext cx="9875520" cy="804672"/>
+          </a:xfrm>
+          <a:prstGeom prst="rect">
+            <a:avLst/>
+          </a:prstGeom>
+          <a:noFill/>
+        </p:spPr>
+        <p:txBody>
+          <a:bodyPr wrap="square" anchor="t" lIns="0" rIns="0" tIns="0" bIns="0">
+            <a:spAutoFit/>
+          </a:bodyPr>
+          <a:lstStyle/>
+          <a:p>
+            <a:pPr algn="l">
+              <a:spcAft>
+                <a:spcPts val="945"/>
+              </a:spcAft>
+            </a:pPr>
+            <a:r>
+              <a:rPr sz="2100" b="1" i="0">
+                <a:solidFill>
+                  <a:srgbClr val="1C1B19"/>
+                </a:solidFill>
+                <a:latin typeface="Source Serif 4"/>
+              </a:rPr>
+              <a:t>Bring in a bridge.</a:t>
+            </a:r>
+          </a:p>
+          <a:p>
+            <a:pPr algn="l">
+              <a:spcAft>
+                <a:spcPts val="945"/>
+              </a:spcAft>
+            </a:pPr>
+            <a:r>
+              <a:rPr sz="1600" b="0" i="0">
+                <a:solidFill>
+                  <a:srgbClr val="5D5A54"/>
+                </a:solidFill>
+                <a:latin typeface="Source Serif 4"/>
+              </a:rPr>
+              <a:t>An aunt, grandparent, coach, counselor, or faith leader.</a:t>
             </a:r>
           </a:p>
         </p:txBody>
@@ -7486,7 +7793,7 @@
                 </a:solidFill>
                 <a:latin typeface="Inter Tight"/>
               </a:rPr>
-              <a:t>FREEDOM RUNS ON INFORMATION</a:t>
+              <a:t>THREE CONVERSATIONS</a:t>
             </a:r>
           </a:p>
         </p:txBody>
@@ -7564,7 +7871,7 @@
                 </a:solidFill>
                 <a:latin typeface="Source Serif 4"/>
               </a:rPr>
-              <a:t>Two loops most families move between</a:t>
+              <a:t>Which move gets you further?</a:t>
             </a:r>
           </a:p>
         </p:txBody>
@@ -7578,7 +7885,7 @@
         <p:spPr>
           <a:xfrm>
             <a:off x="822960" y="2103120"/>
-            <a:ext cx="5120640" cy="3931920"/>
+            <a:ext cx="3322320" cy="3840480"/>
           </a:xfrm>
           <a:prstGeom prst="rect">
             <a:avLst/>
@@ -7623,8 +7930,8 @@
         </p:nvSpPr>
         <p:spPr>
           <a:xfrm>
-            <a:off x="1097280" y="2286000"/>
-            <a:ext cx="4572000" cy="457200"/>
+            <a:off x="1051560" y="2286000"/>
+            <a:ext cx="2865120" cy="365760"/>
           </a:xfrm>
           <a:prstGeom prst="rect">
             <a:avLst/>
@@ -7649,7 +7956,7 @@
                 </a:solidFill>
                 <a:latin typeface="Inter Tight"/>
               </a:rPr>
-              <a:t>THE TRUST LOOP</a:t>
+              <a:t>TARIQ</a:t>
             </a:r>
           </a:p>
         </p:txBody>
@@ -7662,8 +7969,8 @@
         </p:nvSpPr>
         <p:spPr>
           <a:xfrm>
-            <a:off x="1097280" y="2788920"/>
-            <a:ext cx="4572000" cy="3108960"/>
+            <a:off x="1051560" y="2743200"/>
+            <a:ext cx="2865120" cy="3017520"/>
           </a:xfrm>
           <a:prstGeom prst="rect">
             <a:avLst/>
@@ -7678,65 +7985,17 @@
           <a:p>
             <a:pPr algn="l">
               <a:spcAft>
-                <a:spcPts val="855"/>
-              </a:spcAft>
-            </a:pPr>
-            <a:r>
-              <a:rPr sz="1900" b="0" i="0">
+                <a:spcPts val="810"/>
+              </a:spcAft>
+            </a:pPr>
+            <a:r>
+              <a:rPr sz="1800" b="0" i="0">
                 <a:solidFill>
                   <a:srgbClr val="1C1B19"/>
                 </a:solidFill>
                 <a:latin typeface="Source Serif 4"/>
               </a:rPr>
-              <a:t>You tell them some things</a:t>
-            </a:r>
-          </a:p>
-          <a:p>
-            <a:pPr algn="l">
-              <a:spcAft>
-                <a:spcPts val="855"/>
-              </a:spcAft>
-            </a:pPr>
-            <a:r>
-              <a:rPr sz="1900" b="0" i="0">
-                <a:solidFill>
-                  <a:srgbClr val="1C1B19"/>
-                </a:solidFill>
-                <a:latin typeface="Source Serif 4"/>
-              </a:rPr>
-              <a:t>They know more</a:t>
-            </a:r>
-          </a:p>
-          <a:p>
-            <a:pPr algn="l">
-              <a:spcAft>
-                <a:spcPts val="855"/>
-              </a:spcAft>
-            </a:pPr>
-            <a:r>
-              <a:rPr sz="1900" b="0" i="0">
-                <a:solidFill>
-                  <a:srgbClr val="1C1B19"/>
-                </a:solidFill>
-                <a:latin typeface="Source Serif 4"/>
-              </a:rPr>
-              <a:t>They worry less</a:t>
-            </a:r>
-          </a:p>
-          <a:p>
-            <a:pPr algn="l">
-              <a:spcAft>
-                <a:spcPts val="855"/>
-              </a:spcAft>
-            </a:pPr>
-            <a:r>
-              <a:rPr sz="1900" b="0" i="0">
-                <a:solidFill>
-                  <a:srgbClr val="1C1B19"/>
-                </a:solidFill>
-                <a:latin typeface="Source Serif 4"/>
-              </a:rPr>
-              <a:t>You get more room</a:t>
+              <a:t>Wants to go to a concert two hours away with friends. His parents say no before he finishes.</a:t>
             </a:r>
           </a:p>
         </p:txBody>
@@ -7749,8 +8008,8 @@
         </p:nvSpPr>
         <p:spPr>
           <a:xfrm>
-            <a:off x="6309360" y="2103120"/>
-            <a:ext cx="5120640" cy="3931920"/>
+            <a:off x="4419600" y="2103120"/>
+            <a:ext cx="3322320" cy="3840480"/>
           </a:xfrm>
           <a:prstGeom prst="rect">
             <a:avLst/>
@@ -7795,8 +8054,8 @@
         </p:nvSpPr>
         <p:spPr>
           <a:xfrm>
-            <a:off x="6583680" y="2286000"/>
-            <a:ext cx="4572000" cy="457200"/>
+            <a:off x="4648200" y="2286000"/>
+            <a:ext cx="2865120" cy="365760"/>
           </a:xfrm>
           <a:prstGeom prst="rect">
             <a:avLst/>
@@ -7821,7 +8080,7 @@
                 </a:solidFill>
                 <a:latin typeface="Inter Tight"/>
               </a:rPr>
-              <a:t>THE WORRY LOOP</a:t>
+              <a:t>PRIYA</a:t>
             </a:r>
           </a:p>
         </p:txBody>
@@ -7834,8 +8093,8 @@
         </p:nvSpPr>
         <p:spPr>
           <a:xfrm>
-            <a:off x="6583680" y="2788920"/>
-            <a:ext cx="4572000" cy="3108960"/>
+            <a:off x="4648200" y="2743200"/>
+            <a:ext cx="2865120" cy="3017520"/>
           </a:xfrm>
           <a:prstGeom prst="rect">
             <a:avLst/>
@@ -7850,65 +8109,141 @@
           <a:p>
             <a:pPr algn="l">
               <a:spcAft>
-                <a:spcPts val="855"/>
-              </a:spcAft>
-            </a:pPr>
-            <a:r>
-              <a:rPr sz="1900" b="0" i="0">
+                <a:spcPts val="810"/>
+              </a:spcAft>
+            </a:pPr>
+            <a:r>
+              <a:rPr sz="1800" b="0" i="0">
                 <a:solidFill>
                   <a:srgbClr val="1C1B19"/>
                 </a:solidFill>
                 <a:latin typeface="Source Serif 4"/>
               </a:rPr>
-              <a:t>They don't know</a:t>
-            </a:r>
-          </a:p>
-          <a:p>
-            <a:pPr algn="l">
-              <a:spcAft>
-                <a:spcPts val="855"/>
-              </a:spcAft>
-            </a:pPr>
-            <a:r>
-              <a:rPr sz="1900" b="0" i="0">
+              <a:t>Her grandmother, who she lives with, texts: "Why are you at Jordan's? You said the library."</a:t>
+            </a:r>
+          </a:p>
+        </p:txBody>
+      </p:sp>
+      <p:sp>
+        <p:nvSpPr>
+          <p:cNvPr id="12" name="Rectangle 11"/>
+          <p:cNvSpPr/>
+          <p:nvPr/>
+        </p:nvSpPr>
+        <p:spPr>
+          <a:xfrm>
+            <a:off x="8016239" y="2103120"/>
+            <a:ext cx="3322320" cy="3840480"/>
+          </a:xfrm>
+          <a:prstGeom prst="rect">
+            <a:avLst/>
+          </a:prstGeom>
+          <a:solidFill>
+            <a:srgbClr val="FFFFFF"/>
+          </a:solidFill>
+          <a:ln w="15875">
+            <a:solidFill>
+              <a:srgbClr val="D8D2C6"/>
+            </a:solidFill>
+          </a:ln>
+          <a:effectLst/>
+        </p:spPr>
+        <p:style>
+          <a:lnRef idx="1">
+            <a:schemeClr val="accent1"/>
+          </a:lnRef>
+          <a:fillRef idx="3">
+            <a:schemeClr val="accent1"/>
+          </a:fillRef>
+          <a:effectRef idx="2">
+            <a:schemeClr val="accent1"/>
+          </a:effectRef>
+          <a:fontRef idx="minor">
+            <a:schemeClr val="lt1"/>
+          </a:fontRef>
+        </p:style>
+        <p:txBody>
+          <a:bodyPr rtlCol="0" anchor="ctr"/>
+          <a:lstStyle/>
+          <a:p>
+            <a:pPr algn="ctr"/>
+          </a:p>
+        </p:txBody>
+      </p:sp>
+      <p:sp>
+        <p:nvSpPr>
+          <p:cNvPr id="13" name="TextBox 12"/>
+          <p:cNvSpPr txBox="1"/>
+          <p:nvPr/>
+        </p:nvSpPr>
+        <p:spPr>
+          <a:xfrm>
+            <a:off x="8244839" y="2286000"/>
+            <a:ext cx="2865120" cy="365760"/>
+          </a:xfrm>
+          <a:prstGeom prst="rect">
+            <a:avLst/>
+          </a:prstGeom>
+          <a:noFill/>
+        </p:spPr>
+        <p:txBody>
+          <a:bodyPr wrap="square" anchor="t" lIns="0" rIns="0" tIns="0" bIns="0">
+            <a:spAutoFit/>
+          </a:bodyPr>
+          <a:lstStyle/>
+          <a:p>
+            <a:pPr algn="l">
+              <a:spcAft>
+                <a:spcPts val="585"/>
+              </a:spcAft>
+            </a:pPr>
+            <a:r>
+              <a:rPr sz="1300" b="1" i="0">
+                <a:solidFill>
+                  <a:srgbClr val="0B2D5B"/>
+                </a:solidFill>
+                <a:latin typeface="Inter Tight"/>
+              </a:rPr>
+              <a:t>DIEGO</a:t>
+            </a:r>
+          </a:p>
+        </p:txBody>
+      </p:sp>
+      <p:sp>
+        <p:nvSpPr>
+          <p:cNvPr id="14" name="TextBox 13"/>
+          <p:cNvSpPr txBox="1"/>
+          <p:nvPr/>
+        </p:nvSpPr>
+        <p:spPr>
+          <a:xfrm>
+            <a:off x="8244839" y="2743200"/>
+            <a:ext cx="2865120" cy="3017520"/>
+          </a:xfrm>
+          <a:prstGeom prst="rect">
+            <a:avLst/>
+          </a:prstGeom>
+          <a:noFill/>
+        </p:spPr>
+        <p:txBody>
+          <a:bodyPr wrap="square" anchor="t" lIns="0" rIns="0" tIns="0" bIns="0">
+            <a:spAutoFit/>
+          </a:bodyPr>
+          <a:lstStyle/>
+          <a:p>
+            <a:pPr algn="l">
+              <a:spcAft>
+                <a:spcPts val="810"/>
+              </a:spcAft>
+            </a:pPr>
+            <a:r>
+              <a:rPr sz="1800" b="0" i="0">
                 <a:solidFill>
                   <a:srgbClr val="1C1B19"/>
                 </a:solidFill>
                 <a:latin typeface="Source Serif 4"/>
               </a:rPr>
-              <a:t>They fill in worst cases</a:t>
-            </a:r>
-          </a:p>
-          <a:p>
-            <a:pPr algn="l">
-              <a:spcAft>
-                <a:spcPts val="855"/>
-              </a:spcAft>
-            </a:pPr>
-            <a:r>
-              <a:rPr sz="1900" b="0" i="0">
-                <a:solidFill>
-                  <a:srgbClr val="1C1B19"/>
-                </a:solidFill>
-                <a:latin typeface="Source Serif 4"/>
-              </a:rPr>
-              <a:t>Tighter rules</a:t>
-            </a:r>
-          </a:p>
-          <a:p>
-            <a:pPr algn="l">
-              <a:spcAft>
-                <a:spcPts val="855"/>
-              </a:spcAft>
-            </a:pPr>
-            <a:r>
-              <a:rPr sz="1900" b="0" i="0">
-                <a:solidFill>
-                  <a:srgbClr val="1C1B19"/>
-                </a:solidFill>
-                <a:latin typeface="Source Serif 4"/>
-              </a:rPr>
-              <a:t>You share even less</a:t>
+              <a:t>Has felt really low for weeks. He wants to tell his dad, who jumps straight to fixing things.</a:t>
             </a:r>
           </a:p>
         </p:txBody>
@@ -8017,7 +8352,7 @@
                 </a:solidFill>
                 <a:latin typeface="Inter Tight"/>
               </a:rPr>
-              <a:t>WHAT'S GOING ON IN BOTH YOUR HEADS</a:t>
+              <a:t>BEFORE YOU GO</a:t>
             </a:r>
           </a:p>
         </p:txBody>
@@ -8069,8 +8404,8 @@
         </p:nvSpPr>
         <p:spPr>
           <a:xfrm>
-            <a:off x="822960" y="1463040"/>
-            <a:ext cx="10515600" cy="3291840"/>
+            <a:off x="822960" y="1188720"/>
+            <a:ext cx="10515600" cy="914400"/>
           </a:xfrm>
           <a:prstGeom prst="rect">
             <a:avLst/>
@@ -8078,24 +8413,24 @@
           <a:noFill/>
         </p:spPr>
         <p:txBody>
-          <a:bodyPr wrap="square" anchor="ctr" lIns="0" rIns="0" tIns="0" bIns="0">
+          <a:bodyPr wrap="square" anchor="t" lIns="0" rIns="0" tIns="0" bIns="0">
             <a:spAutoFit/>
           </a:bodyPr>
           <a:lstStyle/>
           <a:p>
             <a:pPr algn="l">
               <a:spcAft>
-                <a:spcPts val="2070"/>
-              </a:spcAft>
-            </a:pPr>
-            <a:r>
-              <a:rPr sz="4600" b="1" i="0">
+                <a:spcPts val="1620"/>
+              </a:spcAft>
+            </a:pPr>
+            <a:r>
+              <a:rPr sz="3600" b="1" i="0">
                 <a:solidFill>
                   <a:srgbClr val="1C1B19"/>
                 </a:solidFill>
                 <a:latin typeface="Source Serif 4"/>
               </a:rPr>
-              <a:t>Fewer fights. Bigger feelings.</a:t>
+              <a:t>Plan one conversation.</a:t>
             </a:r>
           </a:p>
         </p:txBody>
@@ -8108,8 +8443,8 @@
         </p:nvSpPr>
         <p:spPr>
           <a:xfrm>
-            <a:off x="822960" y="4846320"/>
-            <a:ext cx="10515600" cy="1097280"/>
+            <a:off x="822960" y="2286000"/>
+            <a:ext cx="10515600" cy="1463040"/>
           </a:xfrm>
           <a:prstGeom prst="rect">
             <a:avLst/>
@@ -8124,66 +8459,42 @@
           <a:p>
             <a:pPr algn="l">
               <a:spcAft>
-                <a:spcPts val="990"/>
-              </a:spcAft>
-            </a:pPr>
-            <a:r>
-              <a:rPr sz="2200" b="0" i="1">
-                <a:solidFill>
-                  <a:srgbClr val="5D5A54"/>
+                <a:spcPts val="1080"/>
+              </a:spcAft>
+            </a:pPr>
+            <a:r>
+              <a:rPr sz="2400" b="0" i="0">
+                <a:solidFill>
+                  <a:srgbClr val="1C1B19"/>
                 </a:solidFill>
                 <a:latin typeface="Source Serif 4"/>
               </a:rPr>
-              <a:t>Across the teen years, arguments with parents get less frequent and run hotter.</a:t>
-            </a:r>
-          </a:p>
-        </p:txBody>
-      </p:sp>
-    </p:spTree>
-  </p:cSld>
-  <p:clrMapOvr>
-    <a:masterClrMapping/>
-  </p:clrMapOvr>
-</p:sld>
-</file>
-
-<file path=ppt/slides/slide9.xml><?xml version="1.0" encoding="utf-8"?>
-<p:sld xmlns:a="http://schemas.openxmlformats.org/drawingml/2006/main" xmlns:p="http://schemas.openxmlformats.org/presentationml/2006/main" xmlns:r="http://schemas.openxmlformats.org/officeDocument/2006/relationships">
-  <p:cSld>
-    <p:bg>
-      <p:bgPr>
-        <a:solidFill>
-          <a:srgbClr val="F7F4EE"/>
-        </a:solidFill>
-        <a:effectLst/>
-      </p:bgPr>
-    </p:bg>
-    <p:spTree>
-      <p:nvGrpSpPr>
-        <p:cNvPr id="1" name=""/>
-        <p:cNvGrpSpPr/>
-        <p:nvPr/>
-      </p:nvGrpSpPr>
-      <p:grpSpPr/>
-      <p:sp>
-        <p:nvSpPr>
-          <p:cNvPr id="2" name="Rectangle 1"/>
+              <a:t>What you want from it, when you'll say it, and the worry you'll answer first. Write it for yourself.</a:t>
+            </a:r>
+          </a:p>
+        </p:txBody>
+      </p:sp>
+      <p:sp>
+        <p:nvSpPr>
+          <p:cNvPr id="7" name="Rectangle 6"/>
           <p:cNvSpPr/>
           <p:nvPr/>
         </p:nvSpPr>
         <p:spPr>
           <a:xfrm>
-            <a:off x="548640" y="502920"/>
-            <a:ext cx="457200" cy="54864"/>
+            <a:off x="822960" y="4023360"/>
+            <a:ext cx="10515600" cy="1371600"/>
           </a:xfrm>
           <a:prstGeom prst="rect">
             <a:avLst/>
           </a:prstGeom>
           <a:solidFill>
-            <a:srgbClr val="F47B20"/>
+            <a:srgbClr val="FFFFFF"/>
           </a:solidFill>
-          <a:ln>
-            <a:noFill/>
+          <a:ln w="15875">
+            <a:solidFill>
+              <a:srgbClr val="1C1B19"/>
+            </a:solidFill>
           </a:ln>
           <a:effectLst/>
         </p:spPr>
@@ -8211,14 +8522,162 @@
       </p:sp>
       <p:sp>
         <p:nvSpPr>
+          <p:cNvPr id="8" name="TextBox 7"/>
+          <p:cNvSpPr txBox="1"/>
+          <p:nvPr/>
+        </p:nvSpPr>
+        <p:spPr>
+          <a:xfrm>
+            <a:off x="1097280" y="4206240"/>
+            <a:ext cx="10058400" cy="365760"/>
+          </a:xfrm>
+          <a:prstGeom prst="rect">
+            <a:avLst/>
+          </a:prstGeom>
+          <a:noFill/>
+        </p:spPr>
+        <p:txBody>
+          <a:bodyPr wrap="square" anchor="t" lIns="0" rIns="0" tIns="0" bIns="0">
+            <a:spAutoFit/>
+          </a:bodyPr>
+          <a:lstStyle/>
+          <a:p>
+            <a:pPr algn="l">
+              <a:spcAft>
+                <a:spcPts val="540"/>
+              </a:spcAft>
+            </a:pPr>
+            <a:r>
+              <a:rPr sz="1200" b="1" i="0">
+                <a:solidFill>
+                  <a:srgbClr val="0B2D5B"/>
+                </a:solidFill>
+                <a:latin typeface="Inter Tight"/>
+              </a:rPr>
+              <a:t>STUDENT PAGE</a:t>
+            </a:r>
+          </a:p>
+        </p:txBody>
+      </p:sp>
+      <p:sp>
+        <p:nvSpPr>
+          <p:cNvPr id="9" name="TextBox 8"/>
+          <p:cNvSpPr txBox="1"/>
+          <p:nvPr/>
+        </p:nvSpPr>
+        <p:spPr>
+          <a:xfrm>
+            <a:off x="1097280" y="4617720"/>
+            <a:ext cx="10058400" cy="640080"/>
+          </a:xfrm>
+          <a:prstGeom prst="rect">
+            <a:avLst/>
+          </a:prstGeom>
+          <a:noFill/>
+        </p:spPr>
+        <p:txBody>
+          <a:bodyPr wrap="square" anchor="t" lIns="0" rIns="0" tIns="0" bIns="0">
+            <a:spAutoFit/>
+          </a:bodyPr>
+          <a:lstStyle/>
+          <a:p>
+            <a:pPr algn="l">
+              <a:spcAft>
+                <a:spcPts val="900"/>
+              </a:spcAft>
+            </a:pPr>
+            <a:r>
+              <a:rPr sz="2000" b="0" i="0">
+                <a:solidFill>
+                  <a:srgbClr val="1C1B19"/>
+                </a:solidFill>
+                <a:latin typeface="Inter Tight"/>
+              </a:rPr>
+              <a:t>https://rmwtoolkit.github.io/bcds-toolkit/talking-to-your-parents-high-school.html</a:t>
+            </a:r>
+          </a:p>
+        </p:txBody>
+      </p:sp>
+    </p:spTree>
+  </p:cSld>
+  <p:clrMapOvr>
+    <a:masterClrMapping/>
+  </p:clrMapOvr>
+</p:sld>
+</file>
+
+<file path=ppt/slides/slide9.xml><?xml version="1.0" encoding="utf-8"?>
+<p:sld xmlns:a="http://schemas.openxmlformats.org/drawingml/2006/main" xmlns:p="http://schemas.openxmlformats.org/presentationml/2006/main" xmlns:r="http://schemas.openxmlformats.org/officeDocument/2006/relationships" show="0">
+  <p:cSld>
+    <p:bg>
+      <p:bgPr>
+        <a:solidFill>
+          <a:srgbClr val="EEEBE4"/>
+        </a:solidFill>
+        <a:effectLst/>
+      </p:bgPr>
+    </p:bg>
+    <p:spTree>
+      <p:nvGrpSpPr>
+        <p:cNvPr id="1" name=""/>
+        <p:cNvGrpSpPr/>
+        <p:nvPr/>
+      </p:nvGrpSpPr>
+      <p:grpSpPr/>
+      <p:sp>
+        <p:nvSpPr>
+          <p:cNvPr id="2" name="Rectangle 1"/>
+          <p:cNvSpPr/>
+          <p:nvPr/>
+        </p:nvSpPr>
+        <p:spPr>
+          <a:xfrm>
+            <a:off x="0" y="0"/>
+            <a:ext cx="12191695" cy="384048"/>
+          </a:xfrm>
+          <a:prstGeom prst="rect">
+            <a:avLst/>
+          </a:prstGeom>
+          <a:solidFill>
+            <a:srgbClr val="0B2D5B"/>
+          </a:solidFill>
+          <a:ln>
+            <a:noFill/>
+          </a:ln>
+          <a:effectLst/>
+        </p:spPr>
+        <p:style>
+          <a:lnRef idx="1">
+            <a:schemeClr val="accent1"/>
+          </a:lnRef>
+          <a:fillRef idx="3">
+            <a:schemeClr val="accent1"/>
+          </a:fillRef>
+          <a:effectRef idx="2">
+            <a:schemeClr val="accent1"/>
+          </a:effectRef>
+          <a:fontRef idx="minor">
+            <a:schemeClr val="lt1"/>
+          </a:fontRef>
+        </p:style>
+        <p:txBody>
+          <a:bodyPr rtlCol="0" anchor="ctr"/>
+          <a:lstStyle/>
+          <a:p>
+            <a:pPr algn="ctr"/>
+          </a:p>
+        </p:txBody>
+      </p:sp>
+      <p:sp>
+        <p:nvSpPr>
           <p:cNvPr id="3" name="TextBox 2"/>
           <p:cNvSpPr txBox="1"/>
           <p:nvPr/>
         </p:nvSpPr>
         <p:spPr>
           <a:xfrm>
-            <a:off x="1143000" y="393192"/>
-            <a:ext cx="8229600" cy="274320"/>
+            <a:off x="548640" y="100584"/>
+            <a:ext cx="10972800" cy="274320"/>
           </a:xfrm>
           <a:prstGeom prst="rect">
             <a:avLst/>
@@ -8233,17 +8692,17 @@
           <a:p>
             <a:pPr algn="l">
               <a:spcAft>
-                <a:spcPts val="540"/>
-              </a:spcAft>
-            </a:pPr>
-            <a:r>
-              <a:rPr sz="1200" b="1" i="0">
-                <a:solidFill>
-                  <a:srgbClr val="5D5A54"/>
+                <a:spcPts val="495"/>
+              </a:spcAft>
+            </a:pPr>
+            <a:r>
+              <a:rPr sz="1100" b="1" i="0">
+                <a:solidFill>
+                  <a:srgbClr val="FFFFFF"/>
                 </a:solidFill>
                 <a:latin typeface="Inter Tight"/>
               </a:rPr>
-              <a:t>BEFORE YOU START</a:t>
+              <a:t>TEACHER PAGE  ·  skipped when you present  ·  Lesson plan</a:t>
             </a:r>
           </a:p>
         </p:txBody>
@@ -8256,8 +8715,8 @@
         </p:nvSpPr>
         <p:spPr>
           <a:xfrm>
-            <a:off x="8229600" y="6400800"/>
-            <a:ext cx="3410712" cy="274320"/>
+            <a:off x="548640" y="685800"/>
+            <a:ext cx="10972800" cy="731520"/>
           </a:xfrm>
           <a:prstGeom prst="rect">
             <a:avLst/>
@@ -8270,19 +8729,19 @@
           </a:bodyPr>
           <a:lstStyle/>
           <a:p>
-            <a:pPr algn="r">
-              <a:spcAft>
-                <a:spcPts val="450"/>
-              </a:spcAft>
-            </a:pPr>
-            <a:r>
-              <a:rPr sz="1000" b="0" i="0">
-                <a:solidFill>
-                  <a:srgbClr val="5D5A54"/>
-                </a:solidFill>
-                <a:latin typeface="Inter Tight"/>
-              </a:rPr>
-              <a:t>Beaver Counseling</a:t>
+            <a:pPr algn="l">
+              <a:spcAft>
+                <a:spcPts val="1530"/>
+              </a:spcAft>
+            </a:pPr>
+            <a:r>
+              <a:rPr sz="3400" b="1" i="0">
+                <a:solidFill>
+                  <a:srgbClr val="1C1B19"/>
+                </a:solidFill>
+                <a:latin typeface="Source Serif 4"/>
+              </a:rPr>
+              <a:t>Talking to Your Parents (So They Actually Listen)</a:t>
             </a:r>
           </a:p>
         </p:txBody>
@@ -8295,8 +8754,8 @@
         </p:nvSpPr>
         <p:spPr>
           <a:xfrm>
-            <a:off x="822960" y="1005840"/>
-            <a:ext cx="10515600" cy="1097280"/>
+            <a:off x="548640" y="1325880"/>
+            <a:ext cx="10972800" cy="365760"/>
           </a:xfrm>
           <a:prstGeom prst="rect">
             <a:avLst/>
@@ -8311,17 +8770,17 @@
           <a:p>
             <a:pPr algn="l">
               <a:spcAft>
-                <a:spcPts val="1620"/>
-              </a:spcAft>
-            </a:pPr>
-            <a:r>
-              <a:rPr sz="3600" b="1" i="0">
-                <a:solidFill>
-                  <a:srgbClr val="1C1B19"/>
-                </a:solidFill>
-                <a:latin typeface="Source Serif 4"/>
-              </a:rPr>
-              <a:t>Clear ask, right moment, a plan for their worry</a:t>
+                <a:spcPts val="630"/>
+              </a:spcAft>
+            </a:pPr>
+            <a:r>
+              <a:rPr sz="1400" b="0" i="0">
+                <a:solidFill>
+                  <a:srgbClr val="5D5A54"/>
+                </a:solidFill>
+                <a:latin typeface="Inter Tight"/>
+              </a:rPr>
+              <a:t>Upper School  ·  20 minutes (fits a 30-minute advisory, with time for your opening check-in; 10-minute version below)  ·  Any grade</a:t>
             </a:r>
           </a:p>
         </p:txBody>
@@ -8334,8 +8793,8 @@
         </p:nvSpPr>
         <p:spPr>
           <a:xfrm>
-            <a:off x="822960" y="2057400"/>
-            <a:ext cx="548640" cy="804672"/>
+            <a:off x="548640" y="1828800"/>
+            <a:ext cx="5120640" cy="4389120"/>
           </a:xfrm>
           <a:prstGeom prst="rect">
             <a:avLst/>
@@ -8350,17 +8809,113 @@
           <a:p>
             <a:pPr algn="l">
               <a:spcAft>
-                <a:spcPts val="1170"/>
-              </a:spcAft>
-            </a:pPr>
-            <a:r>
-              <a:rPr sz="2600" b="1" i="0">
-                <a:solidFill>
-                  <a:srgbClr val="F47B20"/>
+                <a:spcPts val="675"/>
+              </a:spcAft>
+            </a:pPr>
+            <a:r>
+              <a:rPr sz="1100" b="1" i="0">
+                <a:solidFill>
+                  <a:srgbClr val="0B2D5B"/>
+                </a:solidFill>
+                <a:latin typeface="Inter Tight"/>
+              </a:rPr>
+              <a:t>GOAL</a:t>
+            </a:r>
+          </a:p>
+          <a:p>
+            <a:pPr algn="l">
+              <a:spcAft>
+                <a:spcPts val="675"/>
+              </a:spcAft>
+            </a:pPr>
+            <a:r>
+              <a:rPr sz="1500" b="0" i="0">
+                <a:solidFill>
+                  <a:srgbClr val="1C1B19"/>
                 </a:solidFill>
                 <a:latin typeface="Source Serif 4"/>
               </a:rPr>
-              <a:t>1</a:t>
+              <a:t>Students can explain why what they share builds trust (the trust loop and the worry loop), plan a request with a clear ask, a good moment and an answer to the adults' worry, and know that a counselor is there when talking at home doesn't feel safe. "Parents" means whoever is raising them.</a:t>
+            </a:r>
+          </a:p>
+          <a:p>
+            <a:pPr algn="l">
+              <a:spcAft>
+                <a:spcPts val="675"/>
+              </a:spcAft>
+            </a:pPr>
+            <a:r>
+              <a:rPr sz="1500" b="0" i="0">
+                <a:solidFill>
+                  <a:srgbClr val="1C1B19"/>
+                </a:solidFill>
+                <a:latin typeface="Source Serif 4"/>
+              </a:rPr>
+              <a:t/>
+            </a:r>
+          </a:p>
+          <a:p>
+            <a:pPr algn="l">
+              <a:spcAft>
+                <a:spcPts val="675"/>
+              </a:spcAft>
+            </a:pPr>
+            <a:r>
+              <a:rPr sz="1100" b="1" i="0">
+                <a:solidFill>
+                  <a:srgbClr val="0B2D5B"/>
+                </a:solidFill>
+                <a:latin typeface="Inter Tight"/>
+              </a:rPr>
+              <a:t>MATERIALS</a:t>
+            </a:r>
+          </a:p>
+          <a:p>
+            <a:pPr algn="l">
+              <a:spcAft>
+                <a:spcPts val="675"/>
+              </a:spcAft>
+            </a:pPr>
+            <a:r>
+              <a:rPr sz="1500" b="0" i="0">
+                <a:solidFill>
+                  <a:srgbClr val="1C1B19"/>
+                </a:solidFill>
+                <a:latin typeface="Source Serif 4"/>
+              </a:rPr>
+              <a:t>Index cards: one per student, for the anonymous tally and the private plan</a:t>
+            </a:r>
+          </a:p>
+          <a:p>
+            <a:pPr algn="l">
+              <a:spcAft>
+                <a:spcPts val="675"/>
+              </a:spcAft>
+            </a:pPr>
+            <a:r>
+              <a:rPr sz="1500" b="0" i="0">
+                <a:solidFill>
+                  <a:srgbClr val="1C1B19"/>
+                </a:solidFill>
+                <a:latin typeface="Source Serif 4"/>
+              </a:rPr>
+              <a:t>A board or sheet of paper for the tally</a:t>
+            </a:r>
+          </a:p>
+          <a:p>
+            <a:pPr algn="l">
+              <a:spcAft>
+                <a:spcPts val="675"/>
+              </a:spcAft>
+            </a:pPr>
+            <a:r>
+              <a:rPr sz="1500" b="0" i="0">
+                <a:solidFill>
+                  <a:srgbClr val="1C1B19"/>
+                </a:solidFill>
+                <a:latin typeface="Source Serif 4"/>
+              </a:rPr>
+              <a:t>The student page link (last slide) to share after advisory</a:t>
             </a:r>
           </a:p>
         </p:txBody>
@@ -8373,8 +8928,8 @@
         </p:nvSpPr>
         <p:spPr>
           <a:xfrm>
-            <a:off x="1463040" y="2093976"/>
-            <a:ext cx="9875520" cy="804672"/>
+            <a:off x="6126480" y="1828800"/>
+            <a:ext cx="5486400" cy="4389120"/>
           </a:xfrm>
           <a:prstGeom prst="rect">
             <a:avLst/>
@@ -8389,409 +8944,215 @@
           <a:p>
             <a:pPr algn="l">
               <a:spcAft>
-                <a:spcPts val="945"/>
-              </a:spcAft>
-            </a:pPr>
-            <a:r>
-              <a:rPr sz="2100" b="1" i="0">
+                <a:spcPts val="630"/>
+              </a:spcAft>
+            </a:pPr>
+            <a:r>
+              <a:rPr sz="1100" b="1" i="0">
+                <a:solidFill>
+                  <a:srgbClr val="0B2D5B"/>
+                </a:solidFill>
+                <a:latin typeface="Inter Tight"/>
+              </a:rPr>
+              <a:t>FLOW</a:t>
+            </a:r>
+          </a:p>
+          <a:p>
+            <a:pPr algn="l">
+              <a:spcAft>
+                <a:spcPts val="630"/>
+              </a:spcAft>
+            </a:pPr>
+            <a:r>
+              <a:rPr sz="1300" b="1" i="0">
+                <a:solidFill>
+                  <a:srgbClr val="F47B20"/>
+                </a:solidFill>
+                <a:latin typeface="Inter Tight"/>
+              </a:rPr>
+              <a:t>3 min   </a:t>
+            </a:r>
+            <a:r>
+              <a:rPr sz="1400" b="0" i="0">
                 <a:solidFill>
                   <a:srgbClr val="1C1B19"/>
                 </a:solidFill>
                 <a:latin typeface="Source Serif 4"/>
               </a:rPr>
-              <a:t>Know your ask.</a:t>
-            </a:r>
-          </a:p>
-          <a:p>
-            <a:pPr algn="l">
-              <a:spcAft>
-                <a:spcPts val="945"/>
-              </a:spcAft>
-            </a:pPr>
-            <a:r>
-              <a:rPr sz="1600" b="0" i="0">
-                <a:solidFill>
-                  <a:srgbClr val="5D5A54"/>
+              <a:t>What's hardest to bring up? (anonymous cards)</a:t>
+            </a:r>
+          </a:p>
+          <a:p>
+            <a:pPr algn="l">
+              <a:spcAft>
+                <a:spcPts val="630"/>
+              </a:spcAft>
+            </a:pPr>
+            <a:r>
+              <a:rPr sz="1300" b="1" i="0">
+                <a:solidFill>
+                  <a:srgbClr val="F47B20"/>
+                </a:solidFill>
+                <a:latin typeface="Inter Tight"/>
+              </a:rPr>
+              <a:t>4 min   </a:t>
+            </a:r>
+            <a:r>
+              <a:rPr sz="1400" b="0" i="0">
+                <a:solidFill>
+                  <a:srgbClr val="1C1B19"/>
                 </a:solidFill>
                 <a:latin typeface="Source Serif 4"/>
               </a:rPr>
-              <a:t>Advice, help, permission, or just listening?</a:t>
-            </a:r>
-          </a:p>
-        </p:txBody>
-      </p:sp>
-      <p:sp>
-        <p:nvSpPr>
-          <p:cNvPr id="8" name="TextBox 7"/>
-          <p:cNvSpPr txBox="1"/>
-          <p:nvPr/>
-        </p:nvSpPr>
-        <p:spPr>
-          <a:xfrm>
-            <a:off x="822960" y="2862072"/>
-            <a:ext cx="548640" cy="804672"/>
-          </a:xfrm>
-          <a:prstGeom prst="rect">
-            <a:avLst/>
-          </a:prstGeom>
-          <a:noFill/>
-        </p:spPr>
-        <p:txBody>
-          <a:bodyPr wrap="square" anchor="t" lIns="0" rIns="0" tIns="0" bIns="0">
-            <a:spAutoFit/>
-          </a:bodyPr>
-          <a:lstStyle/>
-          <a:p>
-            <a:pPr algn="l">
-              <a:spcAft>
-                <a:spcPts val="1170"/>
-              </a:spcAft>
-            </a:pPr>
-            <a:r>
-              <a:rPr sz="2600" b="1" i="0">
+              <a:t>The trust loop and the worry loop (pair-share)</a:t>
+            </a:r>
+          </a:p>
+          <a:p>
+            <a:pPr algn="l">
+              <a:spcAft>
+                <a:spcPts val="630"/>
+              </a:spcAft>
+            </a:pPr>
+            <a:r>
+              <a:rPr sz="1300" b="1" i="0">
                 <a:solidFill>
                   <a:srgbClr val="F47B20"/>
                 </a:solidFill>
+                <a:latin typeface="Inter Tight"/>
+              </a:rPr>
+              <a:t>3 min   </a:t>
+            </a:r>
+            <a:r>
+              <a:rPr sz="1400" b="0" i="0">
+                <a:solidFill>
+                  <a:srgbClr val="1C1B19"/>
+                </a:solidFill>
                 <a:latin typeface="Source Serif 4"/>
               </a:rPr>
-              <a:t>2</a:t>
-            </a:r>
-          </a:p>
-        </p:txBody>
-      </p:sp>
-      <p:sp>
-        <p:nvSpPr>
-          <p:cNvPr id="9" name="TextBox 8"/>
-          <p:cNvSpPr txBox="1"/>
-          <p:nvPr/>
-        </p:nvSpPr>
-        <p:spPr>
-          <a:xfrm>
-            <a:off x="1463040" y="2898648"/>
-            <a:ext cx="9875520" cy="804672"/>
-          </a:xfrm>
-          <a:prstGeom prst="rect">
-            <a:avLst/>
-          </a:prstGeom>
-          <a:noFill/>
-        </p:spPr>
-        <p:txBody>
-          <a:bodyPr wrap="square" anchor="t" lIns="0" rIns="0" tIns="0" bIns="0">
-            <a:spAutoFit/>
-          </a:bodyPr>
-          <a:lstStyle/>
-          <a:p>
-            <a:pPr algn="l">
-              <a:spcAft>
-                <a:spcPts val="945"/>
-              </a:spcAft>
-            </a:pPr>
-            <a:r>
-              <a:rPr sz="2100" b="1" i="0">
+              <a:t>Fewer fights, bigger feelings</a:t>
+            </a:r>
+          </a:p>
+          <a:p>
+            <a:pPr algn="l">
+              <a:spcAft>
+                <a:spcPts val="630"/>
+              </a:spcAft>
+            </a:pPr>
+            <a:r>
+              <a:rPr sz="1300" b="1" i="0">
+                <a:solidFill>
+                  <a:srgbClr val="F47B20"/>
+                </a:solidFill>
+                <a:latin typeface="Inter Tight"/>
+              </a:rPr>
+              <a:t>3 min   </a:t>
+            </a:r>
+            <a:r>
+              <a:rPr sz="1400" b="0" i="0">
                 <a:solidFill>
                   <a:srgbClr val="1C1B19"/>
                 </a:solidFill>
                 <a:latin typeface="Source Serif 4"/>
               </a:rPr>
-              <a:t>Pick your moment.</a:t>
-            </a:r>
-          </a:p>
-          <a:p>
-            <a:pPr algn="l">
-              <a:spcAft>
-                <a:spcPts val="945"/>
-              </a:spcAft>
-            </a:pPr>
-            <a:r>
-              <a:rPr sz="1600" b="0" i="0">
-                <a:solidFill>
-                  <a:srgbClr val="5D5A54"/>
+              <a:t>Clear ask, right moment, a plan for their worry</a:t>
+            </a:r>
+          </a:p>
+          <a:p>
+            <a:pPr algn="l">
+              <a:spcAft>
+                <a:spcPts val="630"/>
+              </a:spcAft>
+            </a:pPr>
+            <a:r>
+              <a:rPr sz="1300" b="1" i="0">
+                <a:solidFill>
+                  <a:srgbClr val="F47B20"/>
+                </a:solidFill>
+                <a:latin typeface="Inter Tight"/>
+              </a:rPr>
+              <a:t>5 min   </a:t>
+            </a:r>
+            <a:r>
+              <a:rPr sz="1400" b="0" i="0">
+                <a:solidFill>
+                  <a:srgbClr val="1C1B19"/>
                 </a:solidFill>
                 <a:latin typeface="Source Serif 4"/>
               </a:rPr>
-              <a:t>Side by side often beats face to face.</a:t>
-            </a:r>
-          </a:p>
-        </p:txBody>
-      </p:sp>
-      <p:sp>
-        <p:nvSpPr>
-          <p:cNvPr id="10" name="TextBox 9"/>
-          <p:cNvSpPr txBox="1"/>
-          <p:nvPr/>
-        </p:nvSpPr>
-        <p:spPr>
-          <a:xfrm>
-            <a:off x="822960" y="3666744"/>
-            <a:ext cx="548640" cy="804672"/>
-          </a:xfrm>
-          <a:prstGeom prst="rect">
-            <a:avLst/>
-          </a:prstGeom>
-          <a:noFill/>
-        </p:spPr>
-        <p:txBody>
-          <a:bodyPr wrap="square" anchor="t" lIns="0" rIns="0" tIns="0" bIns="0">
-            <a:spAutoFit/>
-          </a:bodyPr>
-          <a:lstStyle/>
-          <a:p>
-            <a:pPr algn="l">
-              <a:spcAft>
-                <a:spcPts val="1170"/>
-              </a:spcAft>
-            </a:pPr>
-            <a:r>
-              <a:rPr sz="2600" b="1" i="0">
+              <a:t>Three conversations (scenario talk)</a:t>
+            </a:r>
+          </a:p>
+          <a:p>
+            <a:pPr algn="l">
+              <a:spcAft>
+                <a:spcPts val="630"/>
+              </a:spcAft>
+            </a:pPr>
+            <a:r>
+              <a:rPr sz="1300" b="1" i="0">
                 <a:solidFill>
                   <a:srgbClr val="F47B20"/>
                 </a:solidFill>
+                <a:latin typeface="Inter Tight"/>
+              </a:rPr>
+              <a:t>2 min   </a:t>
+            </a:r>
+            <a:r>
+              <a:rPr sz="1400" b="0" i="0">
+                <a:solidFill>
+                  <a:srgbClr val="1C1B19"/>
+                </a:solidFill>
                 <a:latin typeface="Source Serif 4"/>
               </a:rPr>
-              <a:t>3</a:t>
-            </a:r>
-          </a:p>
-        </p:txBody>
-      </p:sp>
-      <p:sp>
-        <p:nvSpPr>
-          <p:cNvPr id="11" name="TextBox 10"/>
-          <p:cNvSpPr txBox="1"/>
-          <p:nvPr/>
-        </p:nvSpPr>
-        <p:spPr>
-          <a:xfrm>
-            <a:off x="1463040" y="3703320"/>
-            <a:ext cx="9875520" cy="804672"/>
-          </a:xfrm>
-          <a:prstGeom prst="rect">
-            <a:avLst/>
-          </a:prstGeom>
-          <a:noFill/>
-        </p:spPr>
-        <p:txBody>
-          <a:bodyPr wrap="square" anchor="t" lIns="0" rIns="0" tIns="0" bIns="0">
-            <a:spAutoFit/>
-          </a:bodyPr>
-          <a:lstStyle/>
-          <a:p>
-            <a:pPr algn="l">
-              <a:spcAft>
-                <a:spcPts val="945"/>
-              </a:spcAft>
-            </a:pPr>
-            <a:r>
-              <a:rPr sz="2100" b="1" i="0">
+              <a:t>Plan one conversation (private) and the link</a:t>
+            </a:r>
+          </a:p>
+          <a:p>
+            <a:pPr algn="l">
+              <a:spcAft>
+                <a:spcPts val="630"/>
+              </a:spcAft>
+            </a:pPr>
+            <a:r>
+              <a:rPr sz="1400" b="0" i="0">
                 <a:solidFill>
                   <a:srgbClr val="1C1B19"/>
                 </a:solidFill>
                 <a:latin typeface="Source Serif 4"/>
               </a:rPr>
-              <a:t>Lead with their worry.</a:t>
-            </a:r>
-          </a:p>
-          <a:p>
-            <a:pPr algn="l">
-              <a:spcAft>
-                <a:spcPts val="945"/>
-              </a:spcAft>
-            </a:pPr>
-            <a:r>
-              <a:rPr sz="1600" b="0" i="0">
-                <a:solidFill>
-                  <a:srgbClr val="5D5A54"/>
+              <a:t/>
+            </a:r>
+          </a:p>
+          <a:p>
+            <a:pPr algn="l">
+              <a:spcAft>
+                <a:spcPts val="630"/>
+              </a:spcAft>
+            </a:pPr>
+            <a:r>
+              <a:rPr sz="1100" b="1" i="0">
+                <a:solidFill>
+                  <a:srgbClr val="0B2D5B"/>
+                </a:solidFill>
+                <a:latin typeface="Inter Tight"/>
+              </a:rPr>
+              <a:t>SHORT ON TIME (10-MINUTE CHECK-IN)</a:t>
+            </a:r>
+          </a:p>
+          <a:p>
+            <a:pPr algn="l">
+              <a:spcAft>
+                <a:spcPts val="630"/>
+              </a:spcAft>
+            </a:pPr>
+            <a:r>
+              <a:rPr sz="1400" b="0" i="0">
+                <a:solidFill>
+                  <a:srgbClr val="1C1B19"/>
                 </a:solidFill>
                 <a:latin typeface="Source Serif 4"/>
               </a:rPr>
-              <a:t>"I know you're worried about who's driving."</a:t>
-            </a:r>
-          </a:p>
-        </p:txBody>
-      </p:sp>
-      <p:sp>
-        <p:nvSpPr>
-          <p:cNvPr id="12" name="TextBox 11"/>
-          <p:cNvSpPr txBox="1"/>
-          <p:nvPr/>
-        </p:nvSpPr>
-        <p:spPr>
-          <a:xfrm>
-            <a:off x="822960" y="4471416"/>
-            <a:ext cx="548640" cy="804672"/>
-          </a:xfrm>
-          <a:prstGeom prst="rect">
-            <a:avLst/>
-          </a:prstGeom>
-          <a:noFill/>
-        </p:spPr>
-        <p:txBody>
-          <a:bodyPr wrap="square" anchor="t" lIns="0" rIns="0" tIns="0" bIns="0">
-            <a:spAutoFit/>
-          </a:bodyPr>
-          <a:lstStyle/>
-          <a:p>
-            <a:pPr algn="l">
-              <a:spcAft>
-                <a:spcPts val="1170"/>
-              </a:spcAft>
-            </a:pPr>
-            <a:r>
-              <a:rPr sz="2600" b="1" i="0">
-                <a:solidFill>
-                  <a:srgbClr val="F47B20"/>
-                </a:solidFill>
-                <a:latin typeface="Source Serif 4"/>
-              </a:rPr>
-              <a:t>4</a:t>
-            </a:r>
-          </a:p>
-        </p:txBody>
-      </p:sp>
-      <p:sp>
-        <p:nvSpPr>
-          <p:cNvPr id="13" name="TextBox 12"/>
-          <p:cNvSpPr txBox="1"/>
-          <p:nvPr/>
-        </p:nvSpPr>
-        <p:spPr>
-          <a:xfrm>
-            <a:off x="1463040" y="4507992"/>
-            <a:ext cx="9875520" cy="804672"/>
-          </a:xfrm>
-          <a:prstGeom prst="rect">
-            <a:avLst/>
-          </a:prstGeom>
-          <a:noFill/>
-        </p:spPr>
-        <p:txBody>
-          <a:bodyPr wrap="square" anchor="t" lIns="0" rIns="0" tIns="0" bIns="0">
-            <a:spAutoFit/>
-          </a:bodyPr>
-          <a:lstStyle/>
-          <a:p>
-            <a:pPr algn="l">
-              <a:spcAft>
-                <a:spcPts val="945"/>
-              </a:spcAft>
-            </a:pPr>
-            <a:r>
-              <a:rPr sz="2100" b="1" i="0">
-                <a:solidFill>
-                  <a:srgbClr val="1C1B19"/>
-                </a:solidFill>
-                <a:latin typeface="Source Serif 4"/>
-              </a:rPr>
-              <a:t>Offer checkpoints.</a:t>
-            </a:r>
-          </a:p>
-          <a:p>
-            <a:pPr algn="l">
-              <a:spcAft>
-                <a:spcPts val="945"/>
-              </a:spcAft>
-            </a:pPr>
-            <a:r>
-              <a:rPr sz="1600" b="0" i="0">
-                <a:solidFill>
-                  <a:srgbClr val="5D5A54"/>
-                </a:solidFill>
-                <a:latin typeface="Source Serif 4"/>
-              </a:rPr>
-              <a:t>"I'll text when I get there and be home by 11."</a:t>
-            </a:r>
-          </a:p>
-        </p:txBody>
-      </p:sp>
-      <p:sp>
-        <p:nvSpPr>
-          <p:cNvPr id="14" name="TextBox 13"/>
-          <p:cNvSpPr txBox="1"/>
-          <p:nvPr/>
-        </p:nvSpPr>
-        <p:spPr>
-          <a:xfrm>
-            <a:off x="822960" y="5276088"/>
-            <a:ext cx="548640" cy="804672"/>
-          </a:xfrm>
-          <a:prstGeom prst="rect">
-            <a:avLst/>
-          </a:prstGeom>
-          <a:noFill/>
-        </p:spPr>
-        <p:txBody>
-          <a:bodyPr wrap="square" anchor="t" lIns="0" rIns="0" tIns="0" bIns="0">
-            <a:spAutoFit/>
-          </a:bodyPr>
-          <a:lstStyle/>
-          <a:p>
-            <a:pPr algn="l">
-              <a:spcAft>
-                <a:spcPts val="1170"/>
-              </a:spcAft>
-            </a:pPr>
-            <a:r>
-              <a:rPr sz="2600" b="1" i="0">
-                <a:solidFill>
-                  <a:srgbClr val="F47B20"/>
-                </a:solidFill>
-                <a:latin typeface="Source Serif 4"/>
-              </a:rPr>
-              <a:t>5</a:t>
-            </a:r>
-          </a:p>
-        </p:txBody>
-      </p:sp>
-      <p:sp>
-        <p:nvSpPr>
-          <p:cNvPr id="15" name="TextBox 14"/>
-          <p:cNvSpPr txBox="1"/>
-          <p:nvPr/>
-        </p:nvSpPr>
-        <p:spPr>
-          <a:xfrm>
-            <a:off x="1463040" y="5312664"/>
-            <a:ext cx="9875520" cy="804672"/>
-          </a:xfrm>
-          <a:prstGeom prst="rect">
-            <a:avLst/>
-          </a:prstGeom>
-          <a:noFill/>
-        </p:spPr>
-        <p:txBody>
-          <a:bodyPr wrap="square" anchor="t" lIns="0" rIns="0" tIns="0" bIns="0">
-            <a:spAutoFit/>
-          </a:bodyPr>
-          <a:lstStyle/>
-          <a:p>
-            <a:pPr algn="l">
-              <a:spcAft>
-                <a:spcPts val="945"/>
-              </a:spcAft>
-            </a:pPr>
-            <a:r>
-              <a:rPr sz="2100" b="1" i="0">
-                <a:solidFill>
-                  <a:srgbClr val="1C1B19"/>
-                </a:solidFill>
-                <a:latin typeface="Source Serif 4"/>
-              </a:rPr>
-              <a:t>Bring in a bridge.</a:t>
-            </a:r>
-          </a:p>
-          <a:p>
-            <a:pPr algn="l">
-              <a:spcAft>
-                <a:spcPts val="945"/>
-              </a:spcAft>
-            </a:pPr>
-            <a:r>
-              <a:rPr sz="1600" b="0" i="0">
-                <a:solidFill>
-                  <a:srgbClr val="5D5A54"/>
-                </a:solidFill>
-                <a:latin typeface="Source Serif 4"/>
-              </a:rPr>
-              <a:t>An aunt, grandparent, coach, counselor, or faith leader.</a:t>
+              <a:t>The anonymous tally (2), the two loops (3), clear ask, right moment, a plan for their worry (3), plan one conversation and the link (2).</a:t>
             </a:r>
           </a:p>
         </p:txBody>

--- a/decks/talking-to-your-parents-lesson-v2.pptx
+++ b/decks/talking-to-your-parents-lesson-v2.pptx
@@ -4549,7 +4549,7 @@
                 </a:solidFill>
                 <a:latin typeface="Source Serif 4"/>
               </a:rPr>
-              <a:t>Never ask students to describe fights at home. If a student hints that home isn't safe (threats, someone getting hurt, being afraid to go home), thank them, take it out of the circle, and bring in a counselor that day. Know Beaver's reporting protocol before advisory. Childhelp answers at 1-800-422-4453 any time, and 911 is for emergencies.</a:t>
+              <a:t>Never ask students to describe fights at home. If a student hints that home isn't safe (threats, someone getting hurt, being afraid to go home), thank them, take it out of the circle, and bring in a counselor that day. Childhelp answers at 1-800-422-4453 any time, and 911 is for emergencies.</a:t>
             </a:r>
           </a:p>
           <a:p>
@@ -6001,6 +6001,45 @@
                 <a:latin typeface="Inter Tight"/>
               </a:rPr>
               <a:t>Beaver Upper School · Counseling</a:t>
+            </a:r>
+          </a:p>
+        </p:txBody>
+      </p:sp>
+      <p:sp>
+        <p:nvSpPr>
+          <p:cNvPr id="8" name="TextBox 7"/>
+          <p:cNvSpPr txBox="1"/>
+          <p:nvPr/>
+        </p:nvSpPr>
+        <p:spPr>
+          <a:xfrm>
+            <a:off x="6766560" y="5897880"/>
+            <a:ext cx="4846320" cy="640080"/>
+          </a:xfrm>
+          <a:prstGeom prst="rect">
+            <a:avLst/>
+          </a:prstGeom>
+          <a:noFill/>
+        </p:spPr>
+        <p:txBody>
+          <a:bodyPr wrap="square" anchor="t" lIns="0" rIns="0" tIns="0" bIns="0">
+            <a:spAutoFit/>
+          </a:bodyPr>
+          <a:lstStyle/>
+          <a:p>
+            <a:pPr algn="r">
+              <a:spcAft>
+                <a:spcPts val="495"/>
+              </a:spcAft>
+            </a:pPr>
+            <a:r>
+              <a:rPr sz="1100" b="0" i="0">
+                <a:solidFill>
+                  <a:srgbClr val="E8E4DA"/>
+                </a:solidFill>
+                <a:latin typeface="Inter Tight"/>
+              </a:rPr>
+              <a:t>Written by Dr. Rick Wilson, with AI-assisted drafting. Every lesson is reviewed and edited by Dr. Wilson.</a:t>
             </a:r>
           </a:p>
         </p:txBody>
